--- a/260418_add/supplefigure_260420/SuppFig_S18_IGHV_coherence_forest.pptx
+++ b/260418_add/supplefigure_260420/SuppFig_S18_IGHV_coherence_forest.pptx
@@ -3156,14 +3156,58 @@
                 </a:solidFill>
                 <a:latin typeface="Arial"/>
               </a:rPr>
-              <a:t>IGH V-gene directional-coherence forest (53 V-genes, 12 paired subjects)</a:t>
-            </a:r>
+              <a:t>IGH V-gene directional-coherence forest (Bashford-Rogers 2019 style gray zero-band + focus gold)</a:t>
+            </a:r>
+          </a:p>
+        </p:txBody>
+      </p:sp>
+      <p:sp>
+        <p:nvSpPr>
+          <p:cNvPr id="4" name="Rectangle 3"/>
+          <p:cNvSpPr/>
+          <p:nvPr/>
+        </p:nvSpPr>
+        <p:spPr>
+          <a:xfrm>
+            <a:off x="6435090" y="1097280"/>
+            <a:ext cx="388620" cy="5303520"/>
+          </a:xfrm>
+          <a:prstGeom prst="rect">
+            <a:avLst/>
+          </a:prstGeom>
+          <a:solidFill>
+            <a:srgbClr val="EEEEEE"/>
+          </a:solidFill>
+          <a:ln>
+            <a:noFill/>
+          </a:ln>
+          <a:effectLst/>
+        </p:spPr>
+        <p:style>
+          <a:lnRef idx="1">
+            <a:schemeClr val="accent1"/>
+          </a:lnRef>
+          <a:fillRef idx="3">
+            <a:schemeClr val="accent1"/>
+          </a:fillRef>
+          <a:effectRef idx="2">
+            <a:schemeClr val="accent1"/>
+          </a:effectRef>
+          <a:fontRef idx="minor">
+            <a:schemeClr val="lt1"/>
+          </a:fontRef>
+        </p:style>
+        <p:txBody>
+          <a:bodyPr rtlCol="0" anchor="ctr"/>
+          <a:lstStyle/>
+          <a:p>
+            <a:pPr algn="ctr"/>
           </a:p>
         </p:txBody>
       </p:sp>
       <p:cxnSp>
         <p:nvCxnSpPr>
-          <p:cNvPr id="4" name="Connector 3"/>
+          <p:cNvPr id="5" name="Connector 4"/>
           <p:cNvCxnSpPr/>
           <p:nvPr/>
         </p:nvCxnSpPr>
@@ -3199,14 +3243,14 @@
       </p:cxnSp>
       <p:sp>
         <p:nvSpPr>
-          <p:cNvPr id="5" name="TextBox 4"/>
+          <p:cNvPr id="6" name="TextBox 5"/>
           <p:cNvSpPr txBox="1"/>
           <p:nvPr/>
         </p:nvSpPr>
         <p:spPr>
           <a:xfrm>
-            <a:off x="2743200" y="914400"/>
-            <a:ext cx="3886200" cy="182880"/>
+            <a:off x="2743200" y="868680"/>
+            <a:ext cx="3886200" cy="201168"/>
           </a:xfrm>
           <a:prstGeom prst="rect">
             <a:avLst/>
@@ -3228,21 +3272,21 @@
                 </a:solidFill>
                 <a:latin typeface="Arial"/>
               </a:rPr>
-              <a:t>bad (n up / total) ←</a:t>
-            </a:r>
-          </a:p>
-        </p:txBody>
-      </p:sp>
-      <p:sp>
-        <p:nvSpPr>
-          <p:cNvPr id="6" name="TextBox 5"/>
+              <a:t>bad (n up / 6) ←</a:t>
+            </a:r>
+          </a:p>
+        </p:txBody>
+      </p:sp>
+      <p:sp>
+        <p:nvSpPr>
+          <p:cNvPr id="7" name="TextBox 6"/>
           <p:cNvSpPr txBox="1"/>
           <p:nvPr/>
         </p:nvSpPr>
         <p:spPr>
           <a:xfrm>
-            <a:off x="6629400" y="914400"/>
-            <a:ext cx="3886200" cy="182880"/>
+            <a:off x="6629400" y="868680"/>
+            <a:ext cx="3886200" cy="201168"/>
           </a:xfrm>
           <a:prstGeom prst="rect">
             <a:avLst/>
@@ -3264,14 +3308,14 @@
                 </a:solidFill>
                 <a:latin typeface="Arial"/>
               </a:rPr>
-              <a:t>→ good (n down / total)</a:t>
-            </a:r>
-          </a:p>
-        </p:txBody>
-      </p:sp>
-      <p:sp>
-        <p:nvSpPr>
-          <p:cNvPr id="7" name="Rectangle 6"/>
+              <a:t>→ good (n down / 6)</a:t>
+            </a:r>
+          </a:p>
+        </p:txBody>
+      </p:sp>
+      <p:sp>
+        <p:nvSpPr>
+          <p:cNvPr id="8" name="Rectangle 7"/>
           <p:cNvSpPr/>
           <p:nvPr/>
         </p:nvSpPr>
@@ -3317,7 +3361,7 @@
       </p:sp>
       <p:sp>
         <p:nvSpPr>
-          <p:cNvPr id="8" name="Rectangle 7"/>
+          <p:cNvPr id="9" name="Rectangle 8"/>
           <p:cNvSpPr/>
           <p:nvPr/>
         </p:nvSpPr>
@@ -3363,7 +3407,7 @@
       </p:sp>
       <p:sp>
         <p:nvSpPr>
-          <p:cNvPr id="9" name="TextBox 8"/>
+          <p:cNvPr id="10" name="TextBox 9"/>
           <p:cNvSpPr txBox="1"/>
           <p:nvPr/>
         </p:nvSpPr>
@@ -3399,7 +3443,7 @@
       </p:sp>
       <p:sp>
         <p:nvSpPr>
-          <p:cNvPr id="10" name="TextBox 9"/>
+          <p:cNvPr id="11" name="TextBox 10"/>
           <p:cNvSpPr txBox="1"/>
           <p:nvPr/>
         </p:nvSpPr>
@@ -3435,7 +3479,7 @@
       </p:sp>
       <p:sp>
         <p:nvSpPr>
-          <p:cNvPr id="11" name="Rectangle 10"/>
+          <p:cNvPr id="12" name="Rectangle 11"/>
           <p:cNvSpPr/>
           <p:nvPr/>
         </p:nvSpPr>
@@ -3481,7 +3525,7 @@
       </p:sp>
       <p:sp>
         <p:nvSpPr>
-          <p:cNvPr id="12" name="Rectangle 11"/>
+          <p:cNvPr id="13" name="Rectangle 12"/>
           <p:cNvSpPr/>
           <p:nvPr/>
         </p:nvSpPr>
@@ -3527,7 +3571,7 @@
       </p:sp>
       <p:sp>
         <p:nvSpPr>
-          <p:cNvPr id="13" name="TextBox 12"/>
+          <p:cNvPr id="14" name="TextBox 13"/>
           <p:cNvSpPr txBox="1"/>
           <p:nvPr/>
         </p:nvSpPr>
@@ -3563,7 +3607,7 @@
       </p:sp>
       <p:sp>
         <p:nvSpPr>
-          <p:cNvPr id="14" name="TextBox 13"/>
+          <p:cNvPr id="15" name="TextBox 14"/>
           <p:cNvSpPr txBox="1"/>
           <p:nvPr/>
         </p:nvSpPr>
@@ -3599,7 +3643,7 @@
       </p:sp>
       <p:sp>
         <p:nvSpPr>
-          <p:cNvPr id="15" name="Rectangle 14"/>
+          <p:cNvPr id="16" name="Rectangle 15"/>
           <p:cNvSpPr/>
           <p:nvPr/>
         </p:nvSpPr>
@@ -3645,7 +3689,7 @@
       </p:sp>
       <p:sp>
         <p:nvSpPr>
-          <p:cNvPr id="16" name="Rectangle 15"/>
+          <p:cNvPr id="17" name="Rectangle 16"/>
           <p:cNvSpPr/>
           <p:nvPr/>
         </p:nvSpPr>
@@ -3691,7 +3735,7 @@
       </p:sp>
       <p:sp>
         <p:nvSpPr>
-          <p:cNvPr id="17" name="TextBox 16"/>
+          <p:cNvPr id="18" name="TextBox 17"/>
           <p:cNvSpPr txBox="1"/>
           <p:nvPr/>
         </p:nvSpPr>
@@ -3727,7 +3771,7 @@
       </p:sp>
       <p:sp>
         <p:nvSpPr>
-          <p:cNvPr id="18" name="TextBox 17"/>
+          <p:cNvPr id="19" name="TextBox 18"/>
           <p:cNvSpPr txBox="1"/>
           <p:nvPr/>
         </p:nvSpPr>
@@ -3763,7 +3807,7 @@
       </p:sp>
       <p:sp>
         <p:nvSpPr>
-          <p:cNvPr id="19" name="Rectangle 18"/>
+          <p:cNvPr id="20" name="Rectangle 19"/>
           <p:cNvSpPr/>
           <p:nvPr/>
         </p:nvSpPr>
@@ -3809,7 +3853,7 @@
       </p:sp>
       <p:sp>
         <p:nvSpPr>
-          <p:cNvPr id="20" name="Rectangle 19"/>
+          <p:cNvPr id="21" name="Rectangle 20"/>
           <p:cNvSpPr/>
           <p:nvPr/>
         </p:nvSpPr>
@@ -3855,7 +3899,7 @@
       </p:sp>
       <p:sp>
         <p:nvSpPr>
-          <p:cNvPr id="21" name="TextBox 20"/>
+          <p:cNvPr id="22" name="TextBox 21"/>
           <p:cNvSpPr txBox="1"/>
           <p:nvPr/>
         </p:nvSpPr>
@@ -3891,7 +3935,7 @@
       </p:sp>
       <p:sp>
         <p:nvSpPr>
-          <p:cNvPr id="22" name="TextBox 21"/>
+          <p:cNvPr id="23" name="TextBox 22"/>
           <p:cNvSpPr txBox="1"/>
           <p:nvPr/>
         </p:nvSpPr>
@@ -3927,7 +3971,7 @@
       </p:sp>
       <p:sp>
         <p:nvSpPr>
-          <p:cNvPr id="23" name="Rectangle 22"/>
+          <p:cNvPr id="24" name="Rectangle 23"/>
           <p:cNvSpPr/>
           <p:nvPr/>
         </p:nvSpPr>
@@ -3973,7 +4017,7 @@
       </p:sp>
       <p:sp>
         <p:nvSpPr>
-          <p:cNvPr id="24" name="Rectangle 23"/>
+          <p:cNvPr id="25" name="Rectangle 24"/>
           <p:cNvSpPr/>
           <p:nvPr/>
         </p:nvSpPr>
@@ -4019,7 +4063,7 @@
       </p:sp>
       <p:sp>
         <p:nvSpPr>
-          <p:cNvPr id="25" name="TextBox 24"/>
+          <p:cNvPr id="26" name="TextBox 25"/>
           <p:cNvSpPr txBox="1"/>
           <p:nvPr/>
         </p:nvSpPr>
@@ -4055,7 +4099,7 @@
       </p:sp>
       <p:sp>
         <p:nvSpPr>
-          <p:cNvPr id="26" name="TextBox 25"/>
+          <p:cNvPr id="27" name="TextBox 26"/>
           <p:cNvSpPr txBox="1"/>
           <p:nvPr/>
         </p:nvSpPr>
@@ -4091,7 +4135,7 @@
       </p:sp>
       <p:sp>
         <p:nvSpPr>
-          <p:cNvPr id="27" name="Rectangle 26"/>
+          <p:cNvPr id="28" name="Rectangle 27"/>
           <p:cNvSpPr/>
           <p:nvPr/>
         </p:nvSpPr>
@@ -4137,7 +4181,7 @@
       </p:sp>
       <p:sp>
         <p:nvSpPr>
-          <p:cNvPr id="28" name="Rectangle 27"/>
+          <p:cNvPr id="29" name="Rectangle 28"/>
           <p:cNvSpPr/>
           <p:nvPr/>
         </p:nvSpPr>
@@ -4183,7 +4227,7 @@
       </p:sp>
       <p:sp>
         <p:nvSpPr>
-          <p:cNvPr id="29" name="TextBox 28"/>
+          <p:cNvPr id="30" name="TextBox 29"/>
           <p:cNvSpPr txBox="1"/>
           <p:nvPr/>
         </p:nvSpPr>
@@ -4219,7 +4263,7 @@
       </p:sp>
       <p:sp>
         <p:nvSpPr>
-          <p:cNvPr id="30" name="TextBox 29"/>
+          <p:cNvPr id="31" name="TextBox 30"/>
           <p:cNvSpPr txBox="1"/>
           <p:nvPr/>
         </p:nvSpPr>
@@ -4255,7 +4299,7 @@
       </p:sp>
       <p:sp>
         <p:nvSpPr>
-          <p:cNvPr id="31" name="Rectangle 30"/>
+          <p:cNvPr id="32" name="Rectangle 31"/>
           <p:cNvSpPr/>
           <p:nvPr/>
         </p:nvSpPr>
@@ -4301,7 +4345,7 @@
       </p:sp>
       <p:sp>
         <p:nvSpPr>
-          <p:cNvPr id="32" name="Rectangle 31"/>
+          <p:cNvPr id="33" name="Rectangle 32"/>
           <p:cNvSpPr/>
           <p:nvPr/>
         </p:nvSpPr>
@@ -4347,7 +4391,7 @@
       </p:sp>
       <p:sp>
         <p:nvSpPr>
-          <p:cNvPr id="33" name="TextBox 32"/>
+          <p:cNvPr id="34" name="TextBox 33"/>
           <p:cNvSpPr txBox="1"/>
           <p:nvPr/>
         </p:nvSpPr>
@@ -4383,7 +4427,7 @@
       </p:sp>
       <p:sp>
         <p:nvSpPr>
-          <p:cNvPr id="34" name="TextBox 33"/>
+          <p:cNvPr id="35" name="TextBox 34"/>
           <p:cNvSpPr txBox="1"/>
           <p:nvPr/>
         </p:nvSpPr>
@@ -4419,7 +4463,7 @@
       </p:sp>
       <p:sp>
         <p:nvSpPr>
-          <p:cNvPr id="35" name="Rectangle 34"/>
+          <p:cNvPr id="36" name="Rectangle 35"/>
           <p:cNvSpPr/>
           <p:nvPr/>
         </p:nvSpPr>
@@ -4465,7 +4509,7 @@
       </p:sp>
       <p:sp>
         <p:nvSpPr>
-          <p:cNvPr id="36" name="Rectangle 35"/>
+          <p:cNvPr id="37" name="Rectangle 36"/>
           <p:cNvSpPr/>
           <p:nvPr/>
         </p:nvSpPr>
@@ -4511,7 +4555,7 @@
       </p:sp>
       <p:sp>
         <p:nvSpPr>
-          <p:cNvPr id="37" name="TextBox 36"/>
+          <p:cNvPr id="38" name="TextBox 37"/>
           <p:cNvSpPr txBox="1"/>
           <p:nvPr/>
         </p:nvSpPr>
@@ -4547,7 +4591,7 @@
       </p:sp>
       <p:sp>
         <p:nvSpPr>
-          <p:cNvPr id="38" name="TextBox 37"/>
+          <p:cNvPr id="39" name="TextBox 38"/>
           <p:cNvSpPr txBox="1"/>
           <p:nvPr/>
         </p:nvSpPr>
@@ -4583,7 +4627,7 @@
       </p:sp>
       <p:sp>
         <p:nvSpPr>
-          <p:cNvPr id="39" name="Rectangle 38"/>
+          <p:cNvPr id="40" name="Rectangle 39"/>
           <p:cNvSpPr/>
           <p:nvPr/>
         </p:nvSpPr>
@@ -4629,7 +4673,7 @@
       </p:sp>
       <p:sp>
         <p:nvSpPr>
-          <p:cNvPr id="40" name="Rectangle 39"/>
+          <p:cNvPr id="41" name="Rectangle 40"/>
           <p:cNvSpPr/>
           <p:nvPr/>
         </p:nvSpPr>
@@ -4675,7 +4719,7 @@
       </p:sp>
       <p:sp>
         <p:nvSpPr>
-          <p:cNvPr id="41" name="TextBox 40"/>
+          <p:cNvPr id="42" name="TextBox 41"/>
           <p:cNvSpPr txBox="1"/>
           <p:nvPr/>
         </p:nvSpPr>
@@ -4711,7 +4755,7 @@
       </p:sp>
       <p:sp>
         <p:nvSpPr>
-          <p:cNvPr id="42" name="TextBox 41"/>
+          <p:cNvPr id="43" name="TextBox 42"/>
           <p:cNvSpPr txBox="1"/>
           <p:nvPr/>
         </p:nvSpPr>
@@ -4747,7 +4791,7 @@
       </p:sp>
       <p:sp>
         <p:nvSpPr>
-          <p:cNvPr id="43" name="Rectangle 42"/>
+          <p:cNvPr id="44" name="Rectangle 43"/>
           <p:cNvSpPr/>
           <p:nvPr/>
         </p:nvSpPr>
@@ -4793,7 +4837,7 @@
       </p:sp>
       <p:sp>
         <p:nvSpPr>
-          <p:cNvPr id="44" name="Rectangle 43"/>
+          <p:cNvPr id="45" name="Rectangle 44"/>
           <p:cNvSpPr/>
           <p:nvPr/>
         </p:nvSpPr>
@@ -4839,7 +4883,7 @@
       </p:sp>
       <p:sp>
         <p:nvSpPr>
-          <p:cNvPr id="45" name="TextBox 44"/>
+          <p:cNvPr id="46" name="TextBox 45"/>
           <p:cNvSpPr txBox="1"/>
           <p:nvPr/>
         </p:nvSpPr>
@@ -4875,7 +4919,7 @@
       </p:sp>
       <p:sp>
         <p:nvSpPr>
-          <p:cNvPr id="46" name="TextBox 45"/>
+          <p:cNvPr id="47" name="TextBox 46"/>
           <p:cNvSpPr txBox="1"/>
           <p:nvPr/>
         </p:nvSpPr>
@@ -4911,7 +4955,7 @@
       </p:sp>
       <p:sp>
         <p:nvSpPr>
-          <p:cNvPr id="47" name="Rectangle 46"/>
+          <p:cNvPr id="48" name="Rectangle 47"/>
           <p:cNvSpPr/>
           <p:nvPr/>
         </p:nvSpPr>
@@ -4957,7 +5001,7 @@
       </p:sp>
       <p:sp>
         <p:nvSpPr>
-          <p:cNvPr id="48" name="Rectangle 47"/>
+          <p:cNvPr id="49" name="Rectangle 48"/>
           <p:cNvSpPr/>
           <p:nvPr/>
         </p:nvSpPr>
@@ -5003,7 +5047,7 @@
       </p:sp>
       <p:sp>
         <p:nvSpPr>
-          <p:cNvPr id="49" name="TextBox 48"/>
+          <p:cNvPr id="50" name="TextBox 49"/>
           <p:cNvSpPr txBox="1"/>
           <p:nvPr/>
         </p:nvSpPr>
@@ -5039,7 +5083,7 @@
       </p:sp>
       <p:sp>
         <p:nvSpPr>
-          <p:cNvPr id="50" name="TextBox 49"/>
+          <p:cNvPr id="51" name="TextBox 50"/>
           <p:cNvSpPr txBox="1"/>
           <p:nvPr/>
         </p:nvSpPr>
@@ -5075,7 +5119,7 @@
       </p:sp>
       <p:sp>
         <p:nvSpPr>
-          <p:cNvPr id="51" name="Rectangle 50"/>
+          <p:cNvPr id="52" name="Rectangle 51"/>
           <p:cNvSpPr/>
           <p:nvPr/>
         </p:nvSpPr>
@@ -5121,7 +5165,7 @@
       </p:sp>
       <p:sp>
         <p:nvSpPr>
-          <p:cNvPr id="52" name="Rectangle 51"/>
+          <p:cNvPr id="53" name="Rectangle 52"/>
           <p:cNvSpPr/>
           <p:nvPr/>
         </p:nvSpPr>
@@ -5167,7 +5211,7 @@
       </p:sp>
       <p:sp>
         <p:nvSpPr>
-          <p:cNvPr id="53" name="TextBox 52"/>
+          <p:cNvPr id="54" name="TextBox 53"/>
           <p:cNvSpPr txBox="1"/>
           <p:nvPr/>
         </p:nvSpPr>
@@ -5203,7 +5247,7 @@
       </p:sp>
       <p:sp>
         <p:nvSpPr>
-          <p:cNvPr id="54" name="TextBox 53"/>
+          <p:cNvPr id="55" name="TextBox 54"/>
           <p:cNvSpPr txBox="1"/>
           <p:nvPr/>
         </p:nvSpPr>
@@ -5239,7 +5283,7 @@
       </p:sp>
       <p:sp>
         <p:nvSpPr>
-          <p:cNvPr id="55" name="Rectangle 54"/>
+          <p:cNvPr id="56" name="Rectangle 55"/>
           <p:cNvSpPr/>
           <p:nvPr/>
         </p:nvSpPr>
@@ -5285,7 +5329,7 @@
       </p:sp>
       <p:sp>
         <p:nvSpPr>
-          <p:cNvPr id="56" name="Rectangle 55"/>
+          <p:cNvPr id="57" name="Rectangle 56"/>
           <p:cNvSpPr/>
           <p:nvPr/>
         </p:nvSpPr>
@@ -5331,7 +5375,7 @@
       </p:sp>
       <p:sp>
         <p:nvSpPr>
-          <p:cNvPr id="57" name="TextBox 56"/>
+          <p:cNvPr id="58" name="TextBox 57"/>
           <p:cNvSpPr txBox="1"/>
           <p:nvPr/>
         </p:nvSpPr>
@@ -5367,7 +5411,7 @@
       </p:sp>
       <p:sp>
         <p:nvSpPr>
-          <p:cNvPr id="58" name="TextBox 57"/>
+          <p:cNvPr id="59" name="TextBox 58"/>
           <p:cNvSpPr txBox="1"/>
           <p:nvPr/>
         </p:nvSpPr>
@@ -5403,7 +5447,7 @@
       </p:sp>
       <p:sp>
         <p:nvSpPr>
-          <p:cNvPr id="59" name="Rectangle 58"/>
+          <p:cNvPr id="60" name="Rectangle 59"/>
           <p:cNvSpPr/>
           <p:nvPr/>
         </p:nvSpPr>
@@ -5449,7 +5493,7 @@
       </p:sp>
       <p:sp>
         <p:nvSpPr>
-          <p:cNvPr id="60" name="Rectangle 59"/>
+          <p:cNvPr id="61" name="Rectangle 60"/>
           <p:cNvSpPr/>
           <p:nvPr/>
         </p:nvSpPr>
@@ -5495,7 +5539,7 @@
       </p:sp>
       <p:sp>
         <p:nvSpPr>
-          <p:cNvPr id="61" name="TextBox 60"/>
+          <p:cNvPr id="62" name="TextBox 61"/>
           <p:cNvSpPr txBox="1"/>
           <p:nvPr/>
         </p:nvSpPr>
@@ -5531,7 +5575,7 @@
       </p:sp>
       <p:sp>
         <p:nvSpPr>
-          <p:cNvPr id="62" name="TextBox 61"/>
+          <p:cNvPr id="63" name="TextBox 62"/>
           <p:cNvSpPr txBox="1"/>
           <p:nvPr/>
         </p:nvSpPr>
@@ -5567,7 +5611,7 @@
       </p:sp>
       <p:sp>
         <p:nvSpPr>
-          <p:cNvPr id="63" name="Rectangle 62"/>
+          <p:cNvPr id="64" name="Rectangle 63"/>
           <p:cNvSpPr/>
           <p:nvPr/>
         </p:nvSpPr>
@@ -5613,7 +5657,7 @@
       </p:sp>
       <p:sp>
         <p:nvSpPr>
-          <p:cNvPr id="64" name="Rectangle 63"/>
+          <p:cNvPr id="65" name="Rectangle 64"/>
           <p:cNvSpPr/>
           <p:nvPr/>
         </p:nvSpPr>
@@ -5659,7 +5703,7 @@
       </p:sp>
       <p:sp>
         <p:nvSpPr>
-          <p:cNvPr id="65" name="TextBox 64"/>
+          <p:cNvPr id="66" name="TextBox 65"/>
           <p:cNvSpPr txBox="1"/>
           <p:nvPr/>
         </p:nvSpPr>
@@ -5695,7 +5739,7 @@
       </p:sp>
       <p:sp>
         <p:nvSpPr>
-          <p:cNvPr id="66" name="TextBox 65"/>
+          <p:cNvPr id="67" name="TextBox 66"/>
           <p:cNvSpPr txBox="1"/>
           <p:nvPr/>
         </p:nvSpPr>
@@ -5731,7 +5775,7 @@
       </p:sp>
       <p:sp>
         <p:nvSpPr>
-          <p:cNvPr id="67" name="Rectangle 66"/>
+          <p:cNvPr id="68" name="Rectangle 67"/>
           <p:cNvSpPr/>
           <p:nvPr/>
         </p:nvSpPr>
@@ -5777,7 +5821,7 @@
       </p:sp>
       <p:sp>
         <p:nvSpPr>
-          <p:cNvPr id="68" name="Rectangle 67"/>
+          <p:cNvPr id="69" name="Rectangle 68"/>
           <p:cNvSpPr/>
           <p:nvPr/>
         </p:nvSpPr>
@@ -5823,7 +5867,7 @@
       </p:sp>
       <p:sp>
         <p:nvSpPr>
-          <p:cNvPr id="69" name="TextBox 68"/>
+          <p:cNvPr id="70" name="TextBox 69"/>
           <p:cNvSpPr txBox="1"/>
           <p:nvPr/>
         </p:nvSpPr>
@@ -5859,7 +5903,7 @@
       </p:sp>
       <p:sp>
         <p:nvSpPr>
-          <p:cNvPr id="70" name="TextBox 69"/>
+          <p:cNvPr id="71" name="TextBox 70"/>
           <p:cNvSpPr txBox="1"/>
           <p:nvPr/>
         </p:nvSpPr>
@@ -5895,7 +5939,7 @@
       </p:sp>
       <p:sp>
         <p:nvSpPr>
-          <p:cNvPr id="71" name="Rectangle 70"/>
+          <p:cNvPr id="72" name="Rectangle 71"/>
           <p:cNvSpPr/>
           <p:nvPr/>
         </p:nvSpPr>
@@ -5941,7 +5985,7 @@
       </p:sp>
       <p:sp>
         <p:nvSpPr>
-          <p:cNvPr id="72" name="Rectangle 71"/>
+          <p:cNvPr id="73" name="Rectangle 72"/>
           <p:cNvSpPr/>
           <p:nvPr/>
         </p:nvSpPr>
@@ -5987,7 +6031,7 @@
       </p:sp>
       <p:sp>
         <p:nvSpPr>
-          <p:cNvPr id="73" name="TextBox 72"/>
+          <p:cNvPr id="74" name="TextBox 73"/>
           <p:cNvSpPr txBox="1"/>
           <p:nvPr/>
         </p:nvSpPr>
@@ -6023,7 +6067,7 @@
       </p:sp>
       <p:sp>
         <p:nvSpPr>
-          <p:cNvPr id="74" name="TextBox 73"/>
+          <p:cNvPr id="75" name="TextBox 74"/>
           <p:cNvSpPr txBox="1"/>
           <p:nvPr/>
         </p:nvSpPr>
@@ -6059,7 +6103,7 @@
       </p:sp>
       <p:sp>
         <p:nvSpPr>
-          <p:cNvPr id="75" name="Rectangle 74"/>
+          <p:cNvPr id="76" name="Rectangle 75"/>
           <p:cNvSpPr/>
           <p:nvPr/>
         </p:nvSpPr>
@@ -6105,7 +6149,7 @@
       </p:sp>
       <p:sp>
         <p:nvSpPr>
-          <p:cNvPr id="76" name="Rectangle 75"/>
+          <p:cNvPr id="77" name="Rectangle 76"/>
           <p:cNvSpPr/>
           <p:nvPr/>
         </p:nvSpPr>
@@ -6151,7 +6195,7 @@
       </p:sp>
       <p:sp>
         <p:nvSpPr>
-          <p:cNvPr id="77" name="TextBox 76"/>
+          <p:cNvPr id="78" name="TextBox 77"/>
           <p:cNvSpPr txBox="1"/>
           <p:nvPr/>
         </p:nvSpPr>
@@ -6187,7 +6231,7 @@
       </p:sp>
       <p:sp>
         <p:nvSpPr>
-          <p:cNvPr id="78" name="TextBox 77"/>
+          <p:cNvPr id="79" name="TextBox 78"/>
           <p:cNvSpPr txBox="1"/>
           <p:nvPr/>
         </p:nvSpPr>
@@ -6223,7 +6267,7 @@
       </p:sp>
       <p:sp>
         <p:nvSpPr>
-          <p:cNvPr id="79" name="Rectangle 78"/>
+          <p:cNvPr id="80" name="Rectangle 79"/>
           <p:cNvSpPr/>
           <p:nvPr/>
         </p:nvSpPr>
@@ -6269,7 +6313,7 @@
       </p:sp>
       <p:sp>
         <p:nvSpPr>
-          <p:cNvPr id="80" name="Rectangle 79"/>
+          <p:cNvPr id="81" name="Rectangle 80"/>
           <p:cNvSpPr/>
           <p:nvPr/>
         </p:nvSpPr>
@@ -6315,7 +6359,7 @@
       </p:sp>
       <p:sp>
         <p:nvSpPr>
-          <p:cNvPr id="81" name="TextBox 80"/>
+          <p:cNvPr id="82" name="TextBox 81"/>
           <p:cNvSpPr txBox="1"/>
           <p:nvPr/>
         </p:nvSpPr>
@@ -6351,7 +6395,7 @@
       </p:sp>
       <p:sp>
         <p:nvSpPr>
-          <p:cNvPr id="82" name="TextBox 81"/>
+          <p:cNvPr id="83" name="TextBox 82"/>
           <p:cNvSpPr txBox="1"/>
           <p:nvPr/>
         </p:nvSpPr>
@@ -6387,7 +6431,7 @@
       </p:sp>
       <p:sp>
         <p:nvSpPr>
-          <p:cNvPr id="83" name="Rectangle 82"/>
+          <p:cNvPr id="84" name="Rectangle 83"/>
           <p:cNvSpPr/>
           <p:nvPr/>
         </p:nvSpPr>
@@ -6433,7 +6477,7 @@
       </p:sp>
       <p:sp>
         <p:nvSpPr>
-          <p:cNvPr id="84" name="Rectangle 83"/>
+          <p:cNvPr id="85" name="Rectangle 84"/>
           <p:cNvSpPr/>
           <p:nvPr/>
         </p:nvSpPr>
@@ -6479,7 +6523,7 @@
       </p:sp>
       <p:sp>
         <p:nvSpPr>
-          <p:cNvPr id="85" name="TextBox 84"/>
+          <p:cNvPr id="86" name="TextBox 85"/>
           <p:cNvSpPr txBox="1"/>
           <p:nvPr/>
         </p:nvSpPr>
@@ -6515,7 +6559,7 @@
       </p:sp>
       <p:sp>
         <p:nvSpPr>
-          <p:cNvPr id="86" name="TextBox 85"/>
+          <p:cNvPr id="87" name="TextBox 86"/>
           <p:cNvSpPr txBox="1"/>
           <p:nvPr/>
         </p:nvSpPr>
@@ -6551,7 +6595,7 @@
       </p:sp>
       <p:sp>
         <p:nvSpPr>
-          <p:cNvPr id="87" name="Rectangle 86"/>
+          <p:cNvPr id="88" name="Rectangle 87"/>
           <p:cNvSpPr/>
           <p:nvPr/>
         </p:nvSpPr>
@@ -6597,7 +6641,7 @@
       </p:sp>
       <p:sp>
         <p:nvSpPr>
-          <p:cNvPr id="88" name="Rectangle 87"/>
+          <p:cNvPr id="89" name="Rectangle 88"/>
           <p:cNvSpPr/>
           <p:nvPr/>
         </p:nvSpPr>
@@ -6643,7 +6687,7 @@
       </p:sp>
       <p:sp>
         <p:nvSpPr>
-          <p:cNvPr id="89" name="TextBox 88"/>
+          <p:cNvPr id="90" name="TextBox 89"/>
           <p:cNvSpPr txBox="1"/>
           <p:nvPr/>
         </p:nvSpPr>
@@ -6679,7 +6723,7 @@
       </p:sp>
       <p:sp>
         <p:nvSpPr>
-          <p:cNvPr id="90" name="TextBox 89"/>
+          <p:cNvPr id="91" name="TextBox 90"/>
           <p:cNvSpPr txBox="1"/>
           <p:nvPr/>
         </p:nvSpPr>
@@ -6715,7 +6759,7 @@
       </p:sp>
       <p:sp>
         <p:nvSpPr>
-          <p:cNvPr id="91" name="Rectangle 90"/>
+          <p:cNvPr id="92" name="Rectangle 91"/>
           <p:cNvSpPr/>
           <p:nvPr/>
         </p:nvSpPr>
@@ -6761,7 +6805,7 @@
       </p:sp>
       <p:sp>
         <p:nvSpPr>
-          <p:cNvPr id="92" name="Rectangle 91"/>
+          <p:cNvPr id="93" name="Rectangle 92"/>
           <p:cNvSpPr/>
           <p:nvPr/>
         </p:nvSpPr>
@@ -6807,7 +6851,7 @@
       </p:sp>
       <p:sp>
         <p:nvSpPr>
-          <p:cNvPr id="93" name="TextBox 92"/>
+          <p:cNvPr id="94" name="TextBox 93"/>
           <p:cNvSpPr txBox="1"/>
           <p:nvPr/>
         </p:nvSpPr>
@@ -6843,7 +6887,7 @@
       </p:sp>
       <p:sp>
         <p:nvSpPr>
-          <p:cNvPr id="94" name="TextBox 93"/>
+          <p:cNvPr id="95" name="TextBox 94"/>
           <p:cNvSpPr txBox="1"/>
           <p:nvPr/>
         </p:nvSpPr>
@@ -6879,7 +6923,7 @@
       </p:sp>
       <p:sp>
         <p:nvSpPr>
-          <p:cNvPr id="95" name="Rectangle 94"/>
+          <p:cNvPr id="96" name="Rectangle 95"/>
           <p:cNvSpPr/>
           <p:nvPr/>
         </p:nvSpPr>
@@ -6925,7 +6969,7 @@
       </p:sp>
       <p:sp>
         <p:nvSpPr>
-          <p:cNvPr id="96" name="Rectangle 95"/>
+          <p:cNvPr id="97" name="Rectangle 96"/>
           <p:cNvSpPr/>
           <p:nvPr/>
         </p:nvSpPr>
@@ -6971,7 +7015,7 @@
       </p:sp>
       <p:sp>
         <p:nvSpPr>
-          <p:cNvPr id="97" name="TextBox 96"/>
+          <p:cNvPr id="98" name="TextBox 97"/>
           <p:cNvSpPr txBox="1"/>
           <p:nvPr/>
         </p:nvSpPr>
@@ -7007,7 +7051,7 @@
       </p:sp>
       <p:sp>
         <p:nvSpPr>
-          <p:cNvPr id="98" name="TextBox 97"/>
+          <p:cNvPr id="99" name="TextBox 98"/>
           <p:cNvSpPr txBox="1"/>
           <p:nvPr/>
         </p:nvSpPr>
@@ -7043,7 +7087,7 @@
       </p:sp>
       <p:sp>
         <p:nvSpPr>
-          <p:cNvPr id="99" name="Rectangle 98"/>
+          <p:cNvPr id="100" name="Rectangle 99"/>
           <p:cNvSpPr/>
           <p:nvPr/>
         </p:nvSpPr>
@@ -7089,7 +7133,7 @@
       </p:sp>
       <p:sp>
         <p:nvSpPr>
-          <p:cNvPr id="100" name="Rectangle 99"/>
+          <p:cNvPr id="101" name="Rectangle 100"/>
           <p:cNvSpPr/>
           <p:nvPr/>
         </p:nvSpPr>
@@ -7135,7 +7179,7 @@
       </p:sp>
       <p:sp>
         <p:nvSpPr>
-          <p:cNvPr id="101" name="TextBox 100"/>
+          <p:cNvPr id="102" name="TextBox 101"/>
           <p:cNvSpPr txBox="1"/>
           <p:nvPr/>
         </p:nvSpPr>
@@ -7171,7 +7215,7 @@
       </p:sp>
       <p:sp>
         <p:nvSpPr>
-          <p:cNvPr id="102" name="TextBox 101"/>
+          <p:cNvPr id="103" name="TextBox 102"/>
           <p:cNvSpPr txBox="1"/>
           <p:nvPr/>
         </p:nvSpPr>
@@ -7207,7 +7251,7 @@
       </p:sp>
       <p:sp>
         <p:nvSpPr>
-          <p:cNvPr id="103" name="Rectangle 102"/>
+          <p:cNvPr id="104" name="Rectangle 103"/>
           <p:cNvSpPr/>
           <p:nvPr/>
         </p:nvSpPr>
@@ -7253,7 +7297,7 @@
       </p:sp>
       <p:sp>
         <p:nvSpPr>
-          <p:cNvPr id="104" name="Rectangle 103"/>
+          <p:cNvPr id="105" name="Rectangle 104"/>
           <p:cNvSpPr/>
           <p:nvPr/>
         </p:nvSpPr>
@@ -7299,7 +7343,7 @@
       </p:sp>
       <p:sp>
         <p:nvSpPr>
-          <p:cNvPr id="105" name="TextBox 104"/>
+          <p:cNvPr id="106" name="TextBox 105"/>
           <p:cNvSpPr txBox="1"/>
           <p:nvPr/>
         </p:nvSpPr>
@@ -7335,7 +7379,7 @@
       </p:sp>
       <p:sp>
         <p:nvSpPr>
-          <p:cNvPr id="106" name="TextBox 105"/>
+          <p:cNvPr id="107" name="TextBox 106"/>
           <p:cNvSpPr txBox="1"/>
           <p:nvPr/>
         </p:nvSpPr>
@@ -7371,7 +7415,7 @@
       </p:sp>
       <p:sp>
         <p:nvSpPr>
-          <p:cNvPr id="107" name="Rectangle 106"/>
+          <p:cNvPr id="108" name="Rectangle 107"/>
           <p:cNvSpPr/>
           <p:nvPr/>
         </p:nvSpPr>
@@ -7417,7 +7461,7 @@
       </p:sp>
       <p:sp>
         <p:nvSpPr>
-          <p:cNvPr id="108" name="Rectangle 107"/>
+          <p:cNvPr id="109" name="Rectangle 108"/>
           <p:cNvSpPr/>
           <p:nvPr/>
         </p:nvSpPr>
@@ -7463,7 +7507,7 @@
       </p:sp>
       <p:sp>
         <p:nvSpPr>
-          <p:cNvPr id="109" name="TextBox 108"/>
+          <p:cNvPr id="110" name="TextBox 109"/>
           <p:cNvSpPr txBox="1"/>
           <p:nvPr/>
         </p:nvSpPr>
@@ -7499,7 +7543,7 @@
       </p:sp>
       <p:sp>
         <p:nvSpPr>
-          <p:cNvPr id="110" name="TextBox 109"/>
+          <p:cNvPr id="111" name="TextBox 110"/>
           <p:cNvSpPr txBox="1"/>
           <p:nvPr/>
         </p:nvSpPr>
@@ -7535,7 +7579,7 @@
       </p:sp>
       <p:sp>
         <p:nvSpPr>
-          <p:cNvPr id="111" name="Rectangle 110"/>
+          <p:cNvPr id="112" name="Rectangle 111"/>
           <p:cNvSpPr/>
           <p:nvPr/>
         </p:nvSpPr>
@@ -7581,7 +7625,7 @@
       </p:sp>
       <p:sp>
         <p:nvSpPr>
-          <p:cNvPr id="112" name="Rectangle 111"/>
+          <p:cNvPr id="113" name="Rectangle 112"/>
           <p:cNvSpPr/>
           <p:nvPr/>
         </p:nvSpPr>
@@ -7627,7 +7671,7 @@
       </p:sp>
       <p:sp>
         <p:nvSpPr>
-          <p:cNvPr id="113" name="TextBox 112"/>
+          <p:cNvPr id="114" name="TextBox 113"/>
           <p:cNvSpPr txBox="1"/>
           <p:nvPr/>
         </p:nvSpPr>
@@ -7663,7 +7707,7 @@
       </p:sp>
       <p:sp>
         <p:nvSpPr>
-          <p:cNvPr id="114" name="TextBox 113"/>
+          <p:cNvPr id="115" name="TextBox 114"/>
           <p:cNvSpPr txBox="1"/>
           <p:nvPr/>
         </p:nvSpPr>
@@ -7699,7 +7743,7 @@
       </p:sp>
       <p:sp>
         <p:nvSpPr>
-          <p:cNvPr id="115" name="Rectangle 114"/>
+          <p:cNvPr id="116" name="Rectangle 115"/>
           <p:cNvSpPr/>
           <p:nvPr/>
         </p:nvSpPr>
@@ -7745,7 +7789,7 @@
       </p:sp>
       <p:sp>
         <p:nvSpPr>
-          <p:cNvPr id="116" name="Rectangle 115"/>
+          <p:cNvPr id="117" name="Rectangle 116"/>
           <p:cNvSpPr/>
           <p:nvPr/>
         </p:nvSpPr>
@@ -7791,7 +7835,7 @@
       </p:sp>
       <p:sp>
         <p:nvSpPr>
-          <p:cNvPr id="117" name="TextBox 116"/>
+          <p:cNvPr id="118" name="TextBox 117"/>
           <p:cNvSpPr txBox="1"/>
           <p:nvPr/>
         </p:nvSpPr>
@@ -7827,7 +7871,7 @@
       </p:sp>
       <p:sp>
         <p:nvSpPr>
-          <p:cNvPr id="118" name="TextBox 117"/>
+          <p:cNvPr id="119" name="TextBox 118"/>
           <p:cNvSpPr txBox="1"/>
           <p:nvPr/>
         </p:nvSpPr>
@@ -7863,7 +7907,7 @@
       </p:sp>
       <p:sp>
         <p:nvSpPr>
-          <p:cNvPr id="119" name="Rectangle 118"/>
+          <p:cNvPr id="120" name="Rectangle 119"/>
           <p:cNvSpPr/>
           <p:nvPr/>
         </p:nvSpPr>
@@ -7909,7 +7953,7 @@
       </p:sp>
       <p:sp>
         <p:nvSpPr>
-          <p:cNvPr id="120" name="Rectangle 119"/>
+          <p:cNvPr id="121" name="Rectangle 120"/>
           <p:cNvSpPr/>
           <p:nvPr/>
         </p:nvSpPr>
@@ -7955,7 +7999,7 @@
       </p:sp>
       <p:sp>
         <p:nvSpPr>
-          <p:cNvPr id="121" name="TextBox 120"/>
+          <p:cNvPr id="122" name="TextBox 121"/>
           <p:cNvSpPr txBox="1"/>
           <p:nvPr/>
         </p:nvSpPr>
@@ -7991,7 +8035,7 @@
       </p:sp>
       <p:sp>
         <p:nvSpPr>
-          <p:cNvPr id="122" name="TextBox 121"/>
+          <p:cNvPr id="123" name="TextBox 122"/>
           <p:cNvSpPr txBox="1"/>
           <p:nvPr/>
         </p:nvSpPr>
@@ -8027,7 +8071,7 @@
       </p:sp>
       <p:sp>
         <p:nvSpPr>
-          <p:cNvPr id="123" name="Rectangle 122"/>
+          <p:cNvPr id="124" name="Rectangle 123"/>
           <p:cNvSpPr/>
           <p:nvPr/>
         </p:nvSpPr>
@@ -8073,7 +8117,7 @@
       </p:sp>
       <p:sp>
         <p:nvSpPr>
-          <p:cNvPr id="124" name="Rectangle 123"/>
+          <p:cNvPr id="125" name="Rectangle 124"/>
           <p:cNvSpPr/>
           <p:nvPr/>
         </p:nvSpPr>
@@ -8119,7 +8163,7 @@
       </p:sp>
       <p:sp>
         <p:nvSpPr>
-          <p:cNvPr id="125" name="TextBox 124"/>
+          <p:cNvPr id="126" name="TextBox 125"/>
           <p:cNvSpPr txBox="1"/>
           <p:nvPr/>
         </p:nvSpPr>
@@ -8155,7 +8199,7 @@
       </p:sp>
       <p:sp>
         <p:nvSpPr>
-          <p:cNvPr id="126" name="TextBox 125"/>
+          <p:cNvPr id="127" name="TextBox 126"/>
           <p:cNvSpPr txBox="1"/>
           <p:nvPr/>
         </p:nvSpPr>
@@ -8191,7 +8235,7 @@
       </p:sp>
       <p:sp>
         <p:nvSpPr>
-          <p:cNvPr id="127" name="Rectangle 126"/>
+          <p:cNvPr id="128" name="Rectangle 127"/>
           <p:cNvSpPr/>
           <p:nvPr/>
         </p:nvSpPr>
@@ -8237,7 +8281,7 @@
       </p:sp>
       <p:sp>
         <p:nvSpPr>
-          <p:cNvPr id="128" name="Rectangle 127"/>
+          <p:cNvPr id="129" name="Rectangle 128"/>
           <p:cNvSpPr/>
           <p:nvPr/>
         </p:nvSpPr>
@@ -8283,7 +8327,7 @@
       </p:sp>
       <p:sp>
         <p:nvSpPr>
-          <p:cNvPr id="129" name="TextBox 128"/>
+          <p:cNvPr id="130" name="TextBox 129"/>
           <p:cNvSpPr txBox="1"/>
           <p:nvPr/>
         </p:nvSpPr>
@@ -8319,7 +8363,7 @@
       </p:sp>
       <p:sp>
         <p:nvSpPr>
-          <p:cNvPr id="130" name="TextBox 129"/>
+          <p:cNvPr id="131" name="TextBox 130"/>
           <p:cNvSpPr txBox="1"/>
           <p:nvPr/>
         </p:nvSpPr>
@@ -8355,7 +8399,7 @@
       </p:sp>
       <p:sp>
         <p:nvSpPr>
-          <p:cNvPr id="131" name="Rectangle 130"/>
+          <p:cNvPr id="132" name="Rectangle 131"/>
           <p:cNvSpPr/>
           <p:nvPr/>
         </p:nvSpPr>
@@ -8401,7 +8445,7 @@
       </p:sp>
       <p:sp>
         <p:nvSpPr>
-          <p:cNvPr id="132" name="Rectangle 131"/>
+          <p:cNvPr id="133" name="Rectangle 132"/>
           <p:cNvSpPr/>
           <p:nvPr/>
         </p:nvSpPr>
@@ -8447,7 +8491,7 @@
       </p:sp>
       <p:sp>
         <p:nvSpPr>
-          <p:cNvPr id="133" name="TextBox 132"/>
+          <p:cNvPr id="134" name="TextBox 133"/>
           <p:cNvSpPr txBox="1"/>
           <p:nvPr/>
         </p:nvSpPr>
@@ -8483,7 +8527,7 @@
       </p:sp>
       <p:sp>
         <p:nvSpPr>
-          <p:cNvPr id="134" name="TextBox 133"/>
+          <p:cNvPr id="135" name="TextBox 134"/>
           <p:cNvSpPr txBox="1"/>
           <p:nvPr/>
         </p:nvSpPr>
@@ -8519,7 +8563,7 @@
       </p:sp>
       <p:sp>
         <p:nvSpPr>
-          <p:cNvPr id="135" name="Rectangle 134"/>
+          <p:cNvPr id="136" name="Rectangle 135"/>
           <p:cNvSpPr/>
           <p:nvPr/>
         </p:nvSpPr>
@@ -8565,7 +8609,7 @@
       </p:sp>
       <p:sp>
         <p:nvSpPr>
-          <p:cNvPr id="136" name="Rectangle 135"/>
+          <p:cNvPr id="137" name="Rectangle 136"/>
           <p:cNvSpPr/>
           <p:nvPr/>
         </p:nvSpPr>
@@ -8611,7 +8655,7 @@
       </p:sp>
       <p:sp>
         <p:nvSpPr>
-          <p:cNvPr id="137" name="TextBox 136"/>
+          <p:cNvPr id="138" name="TextBox 137"/>
           <p:cNvSpPr txBox="1"/>
           <p:nvPr/>
         </p:nvSpPr>
@@ -8647,7 +8691,7 @@
       </p:sp>
       <p:sp>
         <p:nvSpPr>
-          <p:cNvPr id="138" name="TextBox 137"/>
+          <p:cNvPr id="139" name="TextBox 138"/>
           <p:cNvSpPr txBox="1"/>
           <p:nvPr/>
         </p:nvSpPr>
@@ -8683,7 +8727,7 @@
       </p:sp>
       <p:sp>
         <p:nvSpPr>
-          <p:cNvPr id="139" name="Rectangle 138"/>
+          <p:cNvPr id="140" name="Rectangle 139"/>
           <p:cNvSpPr/>
           <p:nvPr/>
         </p:nvSpPr>
@@ -8729,7 +8773,7 @@
       </p:sp>
       <p:sp>
         <p:nvSpPr>
-          <p:cNvPr id="140" name="Rectangle 139"/>
+          <p:cNvPr id="141" name="Rectangle 140"/>
           <p:cNvSpPr/>
           <p:nvPr/>
         </p:nvSpPr>
@@ -8775,7 +8819,7 @@
       </p:sp>
       <p:sp>
         <p:nvSpPr>
-          <p:cNvPr id="141" name="TextBox 140"/>
+          <p:cNvPr id="142" name="TextBox 141"/>
           <p:cNvSpPr txBox="1"/>
           <p:nvPr/>
         </p:nvSpPr>
@@ -8811,7 +8855,7 @@
       </p:sp>
       <p:sp>
         <p:nvSpPr>
-          <p:cNvPr id="142" name="TextBox 141"/>
+          <p:cNvPr id="143" name="TextBox 142"/>
           <p:cNvSpPr txBox="1"/>
           <p:nvPr/>
         </p:nvSpPr>
@@ -8847,7 +8891,7 @@
       </p:sp>
       <p:sp>
         <p:nvSpPr>
-          <p:cNvPr id="143" name="Rectangle 142"/>
+          <p:cNvPr id="144" name="Rectangle 143"/>
           <p:cNvSpPr/>
           <p:nvPr/>
         </p:nvSpPr>
@@ -8893,7 +8937,7 @@
       </p:sp>
       <p:sp>
         <p:nvSpPr>
-          <p:cNvPr id="144" name="Rectangle 143"/>
+          <p:cNvPr id="145" name="Rectangle 144"/>
           <p:cNvSpPr/>
           <p:nvPr/>
         </p:nvSpPr>
@@ -8939,7 +8983,7 @@
       </p:sp>
       <p:sp>
         <p:nvSpPr>
-          <p:cNvPr id="145" name="TextBox 144"/>
+          <p:cNvPr id="146" name="TextBox 145"/>
           <p:cNvSpPr txBox="1"/>
           <p:nvPr/>
         </p:nvSpPr>
@@ -8975,7 +9019,7 @@
       </p:sp>
       <p:sp>
         <p:nvSpPr>
-          <p:cNvPr id="146" name="TextBox 145"/>
+          <p:cNvPr id="147" name="TextBox 146"/>
           <p:cNvSpPr txBox="1"/>
           <p:nvPr/>
         </p:nvSpPr>
@@ -9011,7 +9055,7 @@
       </p:sp>
       <p:sp>
         <p:nvSpPr>
-          <p:cNvPr id="147" name="Rectangle 146"/>
+          <p:cNvPr id="148" name="Rectangle 147"/>
           <p:cNvSpPr/>
           <p:nvPr/>
         </p:nvSpPr>
@@ -9057,7 +9101,7 @@
       </p:sp>
       <p:sp>
         <p:nvSpPr>
-          <p:cNvPr id="148" name="Rectangle 147"/>
+          <p:cNvPr id="149" name="Rectangle 148"/>
           <p:cNvSpPr/>
           <p:nvPr/>
         </p:nvSpPr>
@@ -9103,7 +9147,7 @@
       </p:sp>
       <p:sp>
         <p:nvSpPr>
-          <p:cNvPr id="149" name="TextBox 148"/>
+          <p:cNvPr id="150" name="TextBox 149"/>
           <p:cNvSpPr txBox="1"/>
           <p:nvPr/>
         </p:nvSpPr>
@@ -9139,7 +9183,7 @@
       </p:sp>
       <p:sp>
         <p:nvSpPr>
-          <p:cNvPr id="150" name="TextBox 149"/>
+          <p:cNvPr id="151" name="TextBox 150"/>
           <p:cNvSpPr txBox="1"/>
           <p:nvPr/>
         </p:nvSpPr>
@@ -9175,7 +9219,7 @@
       </p:sp>
       <p:sp>
         <p:nvSpPr>
-          <p:cNvPr id="151" name="Rectangle 150"/>
+          <p:cNvPr id="152" name="Rectangle 151"/>
           <p:cNvSpPr/>
           <p:nvPr/>
         </p:nvSpPr>
@@ -9221,7 +9265,7 @@
       </p:sp>
       <p:sp>
         <p:nvSpPr>
-          <p:cNvPr id="152" name="Rectangle 151"/>
+          <p:cNvPr id="153" name="Rectangle 152"/>
           <p:cNvSpPr/>
           <p:nvPr/>
         </p:nvSpPr>
@@ -9267,7 +9311,7 @@
       </p:sp>
       <p:sp>
         <p:nvSpPr>
-          <p:cNvPr id="153" name="TextBox 152"/>
+          <p:cNvPr id="154" name="TextBox 153"/>
           <p:cNvSpPr txBox="1"/>
           <p:nvPr/>
         </p:nvSpPr>
@@ -9303,7 +9347,7 @@
       </p:sp>
       <p:sp>
         <p:nvSpPr>
-          <p:cNvPr id="154" name="TextBox 153"/>
+          <p:cNvPr id="155" name="TextBox 154"/>
           <p:cNvSpPr txBox="1"/>
           <p:nvPr/>
         </p:nvSpPr>
@@ -9339,7 +9383,7 @@
       </p:sp>
       <p:sp>
         <p:nvSpPr>
-          <p:cNvPr id="155" name="Rectangle 154"/>
+          <p:cNvPr id="156" name="Rectangle 155"/>
           <p:cNvSpPr/>
           <p:nvPr/>
         </p:nvSpPr>
@@ -9385,7 +9429,7 @@
       </p:sp>
       <p:sp>
         <p:nvSpPr>
-          <p:cNvPr id="156" name="Rectangle 155"/>
+          <p:cNvPr id="157" name="Rectangle 156"/>
           <p:cNvSpPr/>
           <p:nvPr/>
         </p:nvSpPr>
@@ -9431,7 +9475,7 @@
       </p:sp>
       <p:sp>
         <p:nvSpPr>
-          <p:cNvPr id="157" name="TextBox 156"/>
+          <p:cNvPr id="158" name="TextBox 157"/>
           <p:cNvSpPr txBox="1"/>
           <p:nvPr/>
         </p:nvSpPr>
@@ -9467,7 +9511,7 @@
       </p:sp>
       <p:sp>
         <p:nvSpPr>
-          <p:cNvPr id="158" name="TextBox 157"/>
+          <p:cNvPr id="159" name="TextBox 158"/>
           <p:cNvSpPr txBox="1"/>
           <p:nvPr/>
         </p:nvSpPr>
@@ -9503,7 +9547,7 @@
       </p:sp>
       <p:sp>
         <p:nvSpPr>
-          <p:cNvPr id="159" name="Rectangle 158"/>
+          <p:cNvPr id="160" name="Rectangle 159"/>
           <p:cNvSpPr/>
           <p:nvPr/>
         </p:nvSpPr>
@@ -9549,7 +9593,7 @@
       </p:sp>
       <p:sp>
         <p:nvSpPr>
-          <p:cNvPr id="160" name="Rectangle 159"/>
+          <p:cNvPr id="161" name="Rectangle 160"/>
           <p:cNvSpPr/>
           <p:nvPr/>
         </p:nvSpPr>
@@ -9595,7 +9639,7 @@
       </p:sp>
       <p:sp>
         <p:nvSpPr>
-          <p:cNvPr id="161" name="TextBox 160"/>
+          <p:cNvPr id="162" name="TextBox 161"/>
           <p:cNvSpPr txBox="1"/>
           <p:nvPr/>
         </p:nvSpPr>
@@ -9631,7 +9675,7 @@
       </p:sp>
       <p:sp>
         <p:nvSpPr>
-          <p:cNvPr id="162" name="TextBox 161"/>
+          <p:cNvPr id="163" name="TextBox 162"/>
           <p:cNvSpPr txBox="1"/>
           <p:nvPr/>
         </p:nvSpPr>
@@ -9667,7 +9711,7 @@
       </p:sp>
       <p:sp>
         <p:nvSpPr>
-          <p:cNvPr id="163" name="Rectangle 162"/>
+          <p:cNvPr id="164" name="Rectangle 163"/>
           <p:cNvSpPr/>
           <p:nvPr/>
         </p:nvSpPr>
@@ -9713,7 +9757,7 @@
       </p:sp>
       <p:sp>
         <p:nvSpPr>
-          <p:cNvPr id="164" name="Rectangle 163"/>
+          <p:cNvPr id="165" name="Rectangle 164"/>
           <p:cNvSpPr/>
           <p:nvPr/>
         </p:nvSpPr>
@@ -9759,7 +9803,7 @@
       </p:sp>
       <p:sp>
         <p:nvSpPr>
-          <p:cNvPr id="165" name="TextBox 164"/>
+          <p:cNvPr id="166" name="TextBox 165"/>
           <p:cNvSpPr txBox="1"/>
           <p:nvPr/>
         </p:nvSpPr>
@@ -9795,7 +9839,7 @@
       </p:sp>
       <p:sp>
         <p:nvSpPr>
-          <p:cNvPr id="166" name="TextBox 165"/>
+          <p:cNvPr id="167" name="TextBox 166"/>
           <p:cNvSpPr txBox="1"/>
           <p:nvPr/>
         </p:nvSpPr>
@@ -9831,7 +9875,7 @@
       </p:sp>
       <p:sp>
         <p:nvSpPr>
-          <p:cNvPr id="167" name="Rectangle 166"/>
+          <p:cNvPr id="168" name="Rectangle 167"/>
           <p:cNvSpPr/>
           <p:nvPr/>
         </p:nvSpPr>
@@ -9877,7 +9921,7 @@
       </p:sp>
       <p:sp>
         <p:nvSpPr>
-          <p:cNvPr id="168" name="Rectangle 167"/>
+          <p:cNvPr id="169" name="Rectangle 168"/>
           <p:cNvSpPr/>
           <p:nvPr/>
         </p:nvSpPr>
@@ -9923,7 +9967,7 @@
       </p:sp>
       <p:sp>
         <p:nvSpPr>
-          <p:cNvPr id="169" name="TextBox 168"/>
+          <p:cNvPr id="170" name="TextBox 169"/>
           <p:cNvSpPr txBox="1"/>
           <p:nvPr/>
         </p:nvSpPr>
@@ -9959,7 +10003,7 @@
       </p:sp>
       <p:sp>
         <p:nvSpPr>
-          <p:cNvPr id="170" name="TextBox 169"/>
+          <p:cNvPr id="171" name="TextBox 170"/>
           <p:cNvSpPr txBox="1"/>
           <p:nvPr/>
         </p:nvSpPr>
@@ -9995,7 +10039,7 @@
       </p:sp>
       <p:sp>
         <p:nvSpPr>
-          <p:cNvPr id="171" name="Rectangle 170"/>
+          <p:cNvPr id="172" name="Rectangle 171"/>
           <p:cNvSpPr/>
           <p:nvPr/>
         </p:nvSpPr>
@@ -10041,7 +10085,7 @@
       </p:sp>
       <p:sp>
         <p:nvSpPr>
-          <p:cNvPr id="172" name="Rectangle 171"/>
+          <p:cNvPr id="173" name="Rectangle 172"/>
           <p:cNvSpPr/>
           <p:nvPr/>
         </p:nvSpPr>
@@ -10087,7 +10131,7 @@
       </p:sp>
       <p:sp>
         <p:nvSpPr>
-          <p:cNvPr id="173" name="TextBox 172"/>
+          <p:cNvPr id="174" name="TextBox 173"/>
           <p:cNvSpPr txBox="1"/>
           <p:nvPr/>
         </p:nvSpPr>
@@ -10123,7 +10167,7 @@
       </p:sp>
       <p:sp>
         <p:nvSpPr>
-          <p:cNvPr id="174" name="TextBox 173"/>
+          <p:cNvPr id="175" name="TextBox 174"/>
           <p:cNvSpPr txBox="1"/>
           <p:nvPr/>
         </p:nvSpPr>
@@ -10159,7 +10203,7 @@
       </p:sp>
       <p:sp>
         <p:nvSpPr>
-          <p:cNvPr id="175" name="Rectangle 174"/>
+          <p:cNvPr id="176" name="Rectangle 175"/>
           <p:cNvSpPr/>
           <p:nvPr/>
         </p:nvSpPr>
@@ -10205,7 +10249,7 @@
       </p:sp>
       <p:sp>
         <p:nvSpPr>
-          <p:cNvPr id="176" name="Rectangle 175"/>
+          <p:cNvPr id="177" name="Rectangle 176"/>
           <p:cNvSpPr/>
           <p:nvPr/>
         </p:nvSpPr>
@@ -10251,7 +10295,7 @@
       </p:sp>
       <p:sp>
         <p:nvSpPr>
-          <p:cNvPr id="177" name="TextBox 176"/>
+          <p:cNvPr id="178" name="TextBox 177"/>
           <p:cNvSpPr txBox="1"/>
           <p:nvPr/>
         </p:nvSpPr>
@@ -10287,7 +10331,7 @@
       </p:sp>
       <p:sp>
         <p:nvSpPr>
-          <p:cNvPr id="178" name="TextBox 177"/>
+          <p:cNvPr id="179" name="TextBox 178"/>
           <p:cNvSpPr txBox="1"/>
           <p:nvPr/>
         </p:nvSpPr>
@@ -10323,7 +10367,7 @@
       </p:sp>
       <p:sp>
         <p:nvSpPr>
-          <p:cNvPr id="179" name="Rectangle 178"/>
+          <p:cNvPr id="180" name="Rectangle 179"/>
           <p:cNvSpPr/>
           <p:nvPr/>
         </p:nvSpPr>
@@ -10369,7 +10413,7 @@
       </p:sp>
       <p:sp>
         <p:nvSpPr>
-          <p:cNvPr id="180" name="Rectangle 179"/>
+          <p:cNvPr id="181" name="Rectangle 180"/>
           <p:cNvSpPr/>
           <p:nvPr/>
         </p:nvSpPr>
@@ -10415,7 +10459,7 @@
       </p:sp>
       <p:sp>
         <p:nvSpPr>
-          <p:cNvPr id="181" name="TextBox 180"/>
+          <p:cNvPr id="182" name="TextBox 181"/>
           <p:cNvSpPr txBox="1"/>
           <p:nvPr/>
         </p:nvSpPr>
@@ -10451,7 +10495,7 @@
       </p:sp>
       <p:sp>
         <p:nvSpPr>
-          <p:cNvPr id="182" name="TextBox 181"/>
+          <p:cNvPr id="183" name="TextBox 182"/>
           <p:cNvSpPr txBox="1"/>
           <p:nvPr/>
         </p:nvSpPr>
@@ -10487,7 +10531,7 @@
       </p:sp>
       <p:sp>
         <p:nvSpPr>
-          <p:cNvPr id="183" name="Rectangle 182"/>
+          <p:cNvPr id="184" name="Rectangle 183"/>
           <p:cNvSpPr/>
           <p:nvPr/>
         </p:nvSpPr>
@@ -10533,7 +10577,7 @@
       </p:sp>
       <p:sp>
         <p:nvSpPr>
-          <p:cNvPr id="184" name="Rectangle 183"/>
+          <p:cNvPr id="185" name="Rectangle 184"/>
           <p:cNvSpPr/>
           <p:nvPr/>
         </p:nvSpPr>
@@ -10579,7 +10623,7 @@
       </p:sp>
       <p:sp>
         <p:nvSpPr>
-          <p:cNvPr id="185" name="TextBox 184"/>
+          <p:cNvPr id="186" name="TextBox 185"/>
           <p:cNvSpPr txBox="1"/>
           <p:nvPr/>
         </p:nvSpPr>
@@ -10615,7 +10659,7 @@
       </p:sp>
       <p:sp>
         <p:nvSpPr>
-          <p:cNvPr id="186" name="TextBox 185"/>
+          <p:cNvPr id="187" name="TextBox 186"/>
           <p:cNvSpPr txBox="1"/>
           <p:nvPr/>
         </p:nvSpPr>
@@ -10651,7 +10695,7 @@
       </p:sp>
       <p:sp>
         <p:nvSpPr>
-          <p:cNvPr id="187" name="Rectangle 186"/>
+          <p:cNvPr id="188" name="Rectangle 187"/>
           <p:cNvSpPr/>
           <p:nvPr/>
         </p:nvSpPr>
@@ -10697,7 +10741,7 @@
       </p:sp>
       <p:sp>
         <p:nvSpPr>
-          <p:cNvPr id="188" name="Rectangle 187"/>
+          <p:cNvPr id="189" name="Rectangle 188"/>
           <p:cNvSpPr/>
           <p:nvPr/>
         </p:nvSpPr>
@@ -10743,7 +10787,7 @@
       </p:sp>
       <p:sp>
         <p:nvSpPr>
-          <p:cNvPr id="189" name="TextBox 188"/>
+          <p:cNvPr id="190" name="TextBox 189"/>
           <p:cNvSpPr txBox="1"/>
           <p:nvPr/>
         </p:nvSpPr>
@@ -10779,7 +10823,7 @@
       </p:sp>
       <p:sp>
         <p:nvSpPr>
-          <p:cNvPr id="190" name="TextBox 189"/>
+          <p:cNvPr id="191" name="TextBox 190"/>
           <p:cNvSpPr txBox="1"/>
           <p:nvPr/>
         </p:nvSpPr>
@@ -10815,7 +10859,7 @@
       </p:sp>
       <p:sp>
         <p:nvSpPr>
-          <p:cNvPr id="191" name="Rectangle 190"/>
+          <p:cNvPr id="192" name="Rectangle 191"/>
           <p:cNvSpPr/>
           <p:nvPr/>
         </p:nvSpPr>
@@ -10861,7 +10905,7 @@
       </p:sp>
       <p:sp>
         <p:nvSpPr>
-          <p:cNvPr id="192" name="Rectangle 191"/>
+          <p:cNvPr id="193" name="Rectangle 192"/>
           <p:cNvSpPr/>
           <p:nvPr/>
         </p:nvSpPr>
@@ -10907,7 +10951,7 @@
       </p:sp>
       <p:sp>
         <p:nvSpPr>
-          <p:cNvPr id="193" name="TextBox 192"/>
+          <p:cNvPr id="194" name="TextBox 193"/>
           <p:cNvSpPr txBox="1"/>
           <p:nvPr/>
         </p:nvSpPr>
@@ -10943,7 +10987,7 @@
       </p:sp>
       <p:sp>
         <p:nvSpPr>
-          <p:cNvPr id="194" name="TextBox 193"/>
+          <p:cNvPr id="195" name="TextBox 194"/>
           <p:cNvSpPr txBox="1"/>
           <p:nvPr/>
         </p:nvSpPr>
@@ -10979,7 +11023,7 @@
       </p:sp>
       <p:sp>
         <p:nvSpPr>
-          <p:cNvPr id="195" name="Rectangle 194"/>
+          <p:cNvPr id="196" name="Rectangle 195"/>
           <p:cNvSpPr/>
           <p:nvPr/>
         </p:nvSpPr>
@@ -11025,7 +11069,7 @@
       </p:sp>
       <p:sp>
         <p:nvSpPr>
-          <p:cNvPr id="196" name="Rectangle 195"/>
+          <p:cNvPr id="197" name="Rectangle 196"/>
           <p:cNvSpPr/>
           <p:nvPr/>
         </p:nvSpPr>
@@ -11071,7 +11115,7 @@
       </p:sp>
       <p:sp>
         <p:nvSpPr>
-          <p:cNvPr id="197" name="TextBox 196"/>
+          <p:cNvPr id="198" name="TextBox 197"/>
           <p:cNvSpPr txBox="1"/>
           <p:nvPr/>
         </p:nvSpPr>
@@ -11107,7 +11151,7 @@
       </p:sp>
       <p:sp>
         <p:nvSpPr>
-          <p:cNvPr id="198" name="TextBox 197"/>
+          <p:cNvPr id="199" name="TextBox 198"/>
           <p:cNvSpPr txBox="1"/>
           <p:nvPr/>
         </p:nvSpPr>
@@ -11143,7 +11187,7 @@
       </p:sp>
       <p:sp>
         <p:nvSpPr>
-          <p:cNvPr id="199" name="Rectangle 198"/>
+          <p:cNvPr id="200" name="Rectangle 199"/>
           <p:cNvSpPr/>
           <p:nvPr/>
         </p:nvSpPr>
@@ -11189,7 +11233,7 @@
       </p:sp>
       <p:sp>
         <p:nvSpPr>
-          <p:cNvPr id="200" name="Rectangle 199"/>
+          <p:cNvPr id="201" name="Rectangle 200"/>
           <p:cNvSpPr/>
           <p:nvPr/>
         </p:nvSpPr>
@@ -11235,7 +11279,7 @@
       </p:sp>
       <p:sp>
         <p:nvSpPr>
-          <p:cNvPr id="201" name="TextBox 200"/>
+          <p:cNvPr id="202" name="TextBox 201"/>
           <p:cNvSpPr txBox="1"/>
           <p:nvPr/>
         </p:nvSpPr>
@@ -11271,7 +11315,7 @@
       </p:sp>
       <p:sp>
         <p:nvSpPr>
-          <p:cNvPr id="202" name="TextBox 201"/>
+          <p:cNvPr id="203" name="TextBox 202"/>
           <p:cNvSpPr txBox="1"/>
           <p:nvPr/>
         </p:nvSpPr>
@@ -11307,7 +11351,7 @@
       </p:sp>
       <p:sp>
         <p:nvSpPr>
-          <p:cNvPr id="203" name="Rectangle 202"/>
+          <p:cNvPr id="204" name="Rectangle 203"/>
           <p:cNvSpPr/>
           <p:nvPr/>
         </p:nvSpPr>
@@ -11353,7 +11397,7 @@
       </p:sp>
       <p:sp>
         <p:nvSpPr>
-          <p:cNvPr id="204" name="Rectangle 203"/>
+          <p:cNvPr id="205" name="Rectangle 204"/>
           <p:cNvSpPr/>
           <p:nvPr/>
         </p:nvSpPr>
@@ -11399,7 +11443,7 @@
       </p:sp>
       <p:sp>
         <p:nvSpPr>
-          <p:cNvPr id="205" name="TextBox 204"/>
+          <p:cNvPr id="206" name="TextBox 205"/>
           <p:cNvSpPr txBox="1"/>
           <p:nvPr/>
         </p:nvSpPr>
@@ -11435,7 +11479,7 @@
       </p:sp>
       <p:sp>
         <p:nvSpPr>
-          <p:cNvPr id="206" name="TextBox 205"/>
+          <p:cNvPr id="207" name="TextBox 206"/>
           <p:cNvSpPr txBox="1"/>
           <p:nvPr/>
         </p:nvSpPr>
@@ -11471,7 +11515,7 @@
       </p:sp>
       <p:sp>
         <p:nvSpPr>
-          <p:cNvPr id="207" name="Rectangle 206"/>
+          <p:cNvPr id="208" name="Rectangle 207"/>
           <p:cNvSpPr/>
           <p:nvPr/>
         </p:nvSpPr>
@@ -11517,7 +11561,7 @@
       </p:sp>
       <p:sp>
         <p:nvSpPr>
-          <p:cNvPr id="208" name="Rectangle 207"/>
+          <p:cNvPr id="209" name="Rectangle 208"/>
           <p:cNvSpPr/>
           <p:nvPr/>
         </p:nvSpPr>
@@ -11563,7 +11607,7 @@
       </p:sp>
       <p:sp>
         <p:nvSpPr>
-          <p:cNvPr id="209" name="TextBox 208"/>
+          <p:cNvPr id="210" name="TextBox 209"/>
           <p:cNvSpPr txBox="1"/>
           <p:nvPr/>
         </p:nvSpPr>
@@ -11599,7 +11643,7 @@
       </p:sp>
       <p:sp>
         <p:nvSpPr>
-          <p:cNvPr id="210" name="TextBox 209"/>
+          <p:cNvPr id="211" name="TextBox 210"/>
           <p:cNvSpPr txBox="1"/>
           <p:nvPr/>
         </p:nvSpPr>
@@ -11635,7 +11679,7 @@
       </p:sp>
       <p:sp>
         <p:nvSpPr>
-          <p:cNvPr id="211" name="Rectangle 210"/>
+          <p:cNvPr id="212" name="Rectangle 211"/>
           <p:cNvSpPr/>
           <p:nvPr/>
         </p:nvSpPr>
@@ -11681,7 +11725,7 @@
       </p:sp>
       <p:sp>
         <p:nvSpPr>
-          <p:cNvPr id="212" name="Rectangle 211"/>
+          <p:cNvPr id="213" name="Rectangle 212"/>
           <p:cNvSpPr/>
           <p:nvPr/>
         </p:nvSpPr>
@@ -11727,7 +11771,7 @@
       </p:sp>
       <p:sp>
         <p:nvSpPr>
-          <p:cNvPr id="213" name="TextBox 212"/>
+          <p:cNvPr id="214" name="TextBox 213"/>
           <p:cNvSpPr txBox="1"/>
           <p:nvPr/>
         </p:nvSpPr>
@@ -11763,7 +11807,7 @@
       </p:sp>
       <p:sp>
         <p:nvSpPr>
-          <p:cNvPr id="214" name="TextBox 213"/>
+          <p:cNvPr id="215" name="TextBox 214"/>
           <p:cNvSpPr txBox="1"/>
           <p:nvPr/>
         </p:nvSpPr>
@@ -11799,7 +11843,7 @@
       </p:sp>
       <p:sp>
         <p:nvSpPr>
-          <p:cNvPr id="215" name="Rectangle 214"/>
+          <p:cNvPr id="216" name="Rectangle 215"/>
           <p:cNvSpPr/>
           <p:nvPr/>
         </p:nvSpPr>
@@ -11845,7 +11889,7 @@
       </p:sp>
       <p:sp>
         <p:nvSpPr>
-          <p:cNvPr id="216" name="Rectangle 215"/>
+          <p:cNvPr id="217" name="Rectangle 216"/>
           <p:cNvSpPr/>
           <p:nvPr/>
         </p:nvSpPr>
@@ -11891,7 +11935,7 @@
       </p:sp>
       <p:sp>
         <p:nvSpPr>
-          <p:cNvPr id="217" name="TextBox 216"/>
+          <p:cNvPr id="218" name="TextBox 217"/>
           <p:cNvSpPr txBox="1"/>
           <p:nvPr/>
         </p:nvSpPr>
@@ -11927,7 +11971,7 @@
       </p:sp>
       <p:sp>
         <p:nvSpPr>
-          <p:cNvPr id="218" name="TextBox 217"/>
+          <p:cNvPr id="219" name="TextBox 218"/>
           <p:cNvSpPr txBox="1"/>
           <p:nvPr/>
         </p:nvSpPr>
@@ -11963,7 +12007,91 @@
       </p:sp>
       <p:sp>
         <p:nvSpPr>
-          <p:cNvPr id="219" name="TextBox 218"/>
+          <p:cNvPr id="220" name="Rectangle 219"/>
+          <p:cNvSpPr/>
+          <p:nvPr/>
+        </p:nvSpPr>
+        <p:spPr>
+          <a:xfrm>
+            <a:off x="10881360" y="1364699"/>
+            <a:ext cx="1188720" cy="365760"/>
+          </a:xfrm>
+          <a:prstGeom prst="rect">
+            <a:avLst/>
+          </a:prstGeom>
+          <a:solidFill>
+            <a:srgbClr val="D4A300"/>
+          </a:solidFill>
+          <a:ln w="10160">
+            <a:solidFill>
+              <a:srgbClr val="222222"/>
+            </a:solidFill>
+          </a:ln>
+          <a:effectLst/>
+        </p:spPr>
+        <p:style>
+          <a:lnRef idx="1">
+            <a:schemeClr val="accent1"/>
+          </a:lnRef>
+          <a:fillRef idx="3">
+            <a:schemeClr val="accent1"/>
+          </a:fillRef>
+          <a:effectRef idx="2">
+            <a:schemeClr val="accent1"/>
+          </a:effectRef>
+          <a:fontRef idx="minor">
+            <a:schemeClr val="lt1"/>
+          </a:fontRef>
+        </p:style>
+        <p:txBody>
+          <a:bodyPr rtlCol="0" anchor="ctr"/>
+          <a:lstStyle/>
+          <a:p>
+            <a:pPr algn="ctr"/>
+          </a:p>
+        </p:txBody>
+      </p:sp>
+      <p:sp>
+        <p:nvSpPr>
+          <p:cNvPr id="221" name="TextBox 220"/>
+          <p:cNvSpPr txBox="1"/>
+          <p:nvPr/>
+        </p:nvSpPr>
+        <p:spPr>
+          <a:xfrm>
+            <a:off x="10881360" y="1364699"/>
+            <a:ext cx="1188720" cy="365760"/>
+          </a:xfrm>
+          <a:prstGeom prst="rect">
+            <a:avLst/>
+          </a:prstGeom>
+          <a:noFill/>
+          <a:effectLst/>
+        </p:spPr>
+        <p:txBody>
+          <a:bodyPr wrap="square" lIns="0" rIns="0" tIns="0" bIns="0" anchor="ctr">
+            <a:spAutoFit/>
+          </a:bodyPr>
+          <a:lstStyle/>
+          <a:p>
+            <a:pPr algn="ctr"/>
+            <a:r>
+              <a:rPr sz="600" b="1" i="0">
+                <a:solidFill>
+                  <a:srgbClr val="222222"/>
+                </a:solidFill>
+                <a:latin typeface="Arial"/>
+              </a:rPr>
+              <a:t>polar-opposite
+bad 4/6 up ↔
+good 6/6 down</a:t>
+            </a:r>
+          </a:p>
+        </p:txBody>
+      </p:sp>
+      <p:sp>
+        <p:nvSpPr>
+          <p:cNvPr id="222" name="TextBox 221"/>
           <p:cNvSpPr txBox="1"/>
           <p:nvPr/>
         </p:nvSpPr>
@@ -11992,7 +12120,7 @@
                 </a:solidFill>
                 <a:latin typeface="Arial"/>
               </a:rPr>
-              <a:t>Focus V-genes (gold ★): IGHV6-1 (6/6 down good vs 4/2 up bad, Fisher P=0.061), IGHV3-7, IGHV3-74. Repertoire-level aggregate Wilcoxon P=0.035.</a:t>
+              <a:t>Sorted by coherence_gap descending. Gray band = |majority − 0.5| &lt; 3.3/6 (indistinguishable from chance). Aggregate Wilcoxon P = 0.035.</a:t>
             </a:r>
           </a:p>
         </p:txBody>
@@ -12082,155 +12210,187 @@
                 </a:solidFill>
                 <a:latin typeface="Arial"/>
               </a:rPr>
-              <a:t>Pattern-class scatter — good vs bad majority direction fraction (lookup for Panel A)</a:t>
-            </a:r>
-          </a:p>
-        </p:txBody>
-      </p:sp>
-      <p:cxnSp>
-        <p:nvCxnSpPr>
-          <p:cNvPr id="4" name="Connector 3"/>
-          <p:cNvCxnSpPr/>
-          <p:nvPr/>
-        </p:nvCxnSpPr>
-        <p:spPr>
-          <a:xfrm>
-            <a:off x="1828800" y="6126480"/>
-            <a:ext cx="5486400" cy="0"/>
-          </a:xfrm>
-          <a:prstGeom prst="line">
-            <a:avLst/>
-          </a:prstGeom>
-          <a:ln w="12700">
-            <a:solidFill>
-              <a:srgbClr val="222222"/>
-            </a:solidFill>
-          </a:ln>
-          <a:effectLst/>
-        </p:spPr>
-        <p:style>
-          <a:lnRef idx="2">
-            <a:schemeClr val="accent1"/>
-          </a:lnRef>
-          <a:fillRef idx="0">
-            <a:schemeClr val="accent1"/>
-          </a:fillRef>
-          <a:effectRef idx="1">
-            <a:schemeClr val="accent1"/>
-          </a:effectRef>
-          <a:fontRef idx="minor">
-            <a:schemeClr val="tx1"/>
-          </a:fontRef>
-        </p:style>
-      </p:cxnSp>
-      <p:cxnSp>
-        <p:nvCxnSpPr>
-          <p:cNvPr id="5" name="Connector 4"/>
-          <p:cNvCxnSpPr/>
-          <p:nvPr/>
-        </p:nvCxnSpPr>
-        <p:spPr>
-          <a:xfrm>
-            <a:off x="1828800" y="1097280"/>
-            <a:ext cx="0" cy="5029200"/>
-          </a:xfrm>
-          <a:prstGeom prst="line">
-            <a:avLst/>
-          </a:prstGeom>
-          <a:ln w="12700">
-            <a:solidFill>
-              <a:srgbClr val="222222"/>
-            </a:solidFill>
-          </a:ln>
-          <a:effectLst/>
-        </p:spPr>
-        <p:style>
-          <a:lnRef idx="2">
-            <a:schemeClr val="accent1"/>
-          </a:lnRef>
-          <a:fillRef idx="0">
-            <a:schemeClr val="accent1"/>
-          </a:fillRef>
-          <a:effectRef idx="1">
-            <a:schemeClr val="accent1"/>
-          </a:effectRef>
-          <a:fontRef idx="minor">
-            <a:schemeClr val="tx1"/>
-          </a:fontRef>
-        </p:style>
-      </p:cxnSp>
-      <p:cxnSp>
-        <p:nvCxnSpPr>
-          <p:cNvPr id="6" name="Connector 5"/>
-          <p:cNvCxnSpPr/>
-          <p:nvPr/>
-        </p:nvCxnSpPr>
-        <p:spPr>
-          <a:xfrm>
-            <a:off x="7315200" y="1097280"/>
-            <a:ext cx="0" cy="5029200"/>
-          </a:xfrm>
-          <a:prstGeom prst="line">
-            <a:avLst/>
-          </a:prstGeom>
-          <a:ln w="6350">
-            <a:solidFill>
-              <a:srgbClr val="DDDDDD"/>
-            </a:solidFill>
-          </a:ln>
-          <a:effectLst/>
-        </p:spPr>
-        <p:style>
-          <a:lnRef idx="2">
-            <a:schemeClr val="accent1"/>
-          </a:lnRef>
-          <a:fillRef idx="0">
-            <a:schemeClr val="accent1"/>
-          </a:fillRef>
-          <a:effectRef idx="1">
-            <a:schemeClr val="accent1"/>
-          </a:effectRef>
-          <a:fontRef idx="minor">
-            <a:schemeClr val="tx1"/>
-          </a:fontRef>
-        </p:style>
-      </p:cxnSp>
-      <p:cxnSp>
-        <p:nvCxnSpPr>
-          <p:cNvPr id="7" name="Connector 6"/>
-          <p:cNvCxnSpPr/>
-          <p:nvPr/>
-        </p:nvCxnSpPr>
-        <p:spPr>
-          <a:xfrm>
-            <a:off x="1828800" y="1097280"/>
-            <a:ext cx="5486400" cy="0"/>
-          </a:xfrm>
-          <a:prstGeom prst="line">
-            <a:avLst/>
-          </a:prstGeom>
-          <a:ln w="6350">
-            <a:solidFill>
-              <a:srgbClr val="DDDDDD"/>
-            </a:solidFill>
-          </a:ln>
-          <a:effectLst/>
-        </p:spPr>
-        <p:style>
-          <a:lnRef idx="2">
-            <a:schemeClr val="accent1"/>
-          </a:lnRef>
-          <a:fillRef idx="0">
-            <a:schemeClr val="accent1"/>
-          </a:fillRef>
-          <a:effectRef idx="1">
-            <a:schemeClr val="accent1"/>
-          </a:effectRef>
-          <a:fontRef idx="minor">
-            <a:schemeClr val="tx1"/>
-          </a:fontRef>
-        </p:style>
-      </p:cxnSp>
+              <a:t>Pattern-class scatter (good vs bad majority fraction) — 4 quadrant background shading</a:t>
+            </a:r>
+          </a:p>
+        </p:txBody>
+      </p:sp>
+      <p:sp>
+        <p:nvSpPr>
+          <p:cNvPr id="4" name="Rectangle 3"/>
+          <p:cNvSpPr/>
+          <p:nvPr/>
+        </p:nvSpPr>
+        <p:spPr>
+          <a:xfrm>
+            <a:off x="4800600" y="1097280"/>
+            <a:ext cx="2514600" cy="2514600"/>
+          </a:xfrm>
+          <a:prstGeom prst="rect">
+            <a:avLst/>
+          </a:prstGeom>
+          <a:solidFill>
+            <a:srgbClr val="EEF7F4"/>
+          </a:solidFill>
+          <a:ln>
+            <a:noFill/>
+          </a:ln>
+          <a:effectLst/>
+        </p:spPr>
+        <p:style>
+          <a:lnRef idx="1">
+            <a:schemeClr val="accent1"/>
+          </a:lnRef>
+          <a:fillRef idx="3">
+            <a:schemeClr val="accent1"/>
+          </a:fillRef>
+          <a:effectRef idx="2">
+            <a:schemeClr val="accent1"/>
+          </a:effectRef>
+          <a:fontRef idx="minor">
+            <a:schemeClr val="lt1"/>
+          </a:fontRef>
+        </p:style>
+        <p:txBody>
+          <a:bodyPr rtlCol="0" anchor="ctr"/>
+          <a:lstStyle/>
+          <a:p>
+            <a:pPr algn="ctr"/>
+          </a:p>
+        </p:txBody>
+      </p:sp>
+      <p:sp>
+        <p:nvSpPr>
+          <p:cNvPr id="5" name="Rectangle 4"/>
+          <p:cNvSpPr/>
+          <p:nvPr/>
+        </p:nvSpPr>
+        <p:spPr>
+          <a:xfrm>
+            <a:off x="4800600" y="3611880"/>
+            <a:ext cx="2514600" cy="2514600"/>
+          </a:xfrm>
+          <a:prstGeom prst="rect">
+            <a:avLst/>
+          </a:prstGeom>
+          <a:solidFill>
+            <a:srgbClr val="E5EFE8"/>
+          </a:solidFill>
+          <a:ln>
+            <a:noFill/>
+          </a:ln>
+          <a:effectLst/>
+        </p:spPr>
+        <p:style>
+          <a:lnRef idx="1">
+            <a:schemeClr val="accent1"/>
+          </a:lnRef>
+          <a:fillRef idx="3">
+            <a:schemeClr val="accent1"/>
+          </a:fillRef>
+          <a:effectRef idx="2">
+            <a:schemeClr val="accent1"/>
+          </a:effectRef>
+          <a:fontRef idx="minor">
+            <a:schemeClr val="lt1"/>
+          </a:fontRef>
+        </p:style>
+        <p:txBody>
+          <a:bodyPr rtlCol="0" anchor="ctr"/>
+          <a:lstStyle/>
+          <a:p>
+            <a:pPr algn="ctr"/>
+          </a:p>
+        </p:txBody>
+      </p:sp>
+      <p:sp>
+        <p:nvSpPr>
+          <p:cNvPr id="6" name="Rectangle 5"/>
+          <p:cNvSpPr/>
+          <p:nvPr/>
+        </p:nvSpPr>
+        <p:spPr>
+          <a:xfrm>
+            <a:off x="2286000" y="1097280"/>
+            <a:ext cx="2514600" cy="2514600"/>
+          </a:xfrm>
+          <a:prstGeom prst="rect">
+            <a:avLst/>
+          </a:prstGeom>
+          <a:solidFill>
+            <a:srgbClr val="FAF0EC"/>
+          </a:solidFill>
+          <a:ln>
+            <a:noFill/>
+          </a:ln>
+          <a:effectLst/>
+        </p:spPr>
+        <p:style>
+          <a:lnRef idx="1">
+            <a:schemeClr val="accent1"/>
+          </a:lnRef>
+          <a:fillRef idx="3">
+            <a:schemeClr val="accent1"/>
+          </a:fillRef>
+          <a:effectRef idx="2">
+            <a:schemeClr val="accent1"/>
+          </a:effectRef>
+          <a:fontRef idx="minor">
+            <a:schemeClr val="lt1"/>
+          </a:fontRef>
+        </p:style>
+        <p:txBody>
+          <a:bodyPr rtlCol="0" anchor="ctr"/>
+          <a:lstStyle/>
+          <a:p>
+            <a:pPr algn="ctr"/>
+          </a:p>
+        </p:txBody>
+      </p:sp>
+      <p:sp>
+        <p:nvSpPr>
+          <p:cNvPr id="7" name="Rectangle 6"/>
+          <p:cNvSpPr/>
+          <p:nvPr/>
+        </p:nvSpPr>
+        <p:spPr>
+          <a:xfrm>
+            <a:off x="2286000" y="3611880"/>
+            <a:ext cx="2514600" cy="2514600"/>
+          </a:xfrm>
+          <a:prstGeom prst="rect">
+            <a:avLst/>
+          </a:prstGeom>
+          <a:solidFill>
+            <a:srgbClr val="F5F5F5"/>
+          </a:solidFill>
+          <a:ln>
+            <a:noFill/>
+          </a:ln>
+          <a:effectLst/>
+        </p:spPr>
+        <p:style>
+          <a:lnRef idx="1">
+            <a:schemeClr val="accent1"/>
+          </a:lnRef>
+          <a:fillRef idx="3">
+            <a:schemeClr val="accent1"/>
+          </a:fillRef>
+          <a:effectRef idx="2">
+            <a:schemeClr val="accent1"/>
+          </a:effectRef>
+          <a:fontRef idx="minor">
+            <a:schemeClr val="lt1"/>
+          </a:fontRef>
+        </p:style>
+        <p:txBody>
+          <a:bodyPr rtlCol="0" anchor="ctr"/>
+          <a:lstStyle/>
+          <a:p>
+            <a:pPr algn="ctr"/>
+          </a:p>
+        </p:txBody>
+      </p:sp>
       <p:cxnSp>
         <p:nvCxnSpPr>
           <p:cNvPr id="8" name="Connector 7"/>
@@ -12239,7 +12399,151 @@
         </p:nvCxnSpPr>
         <p:spPr>
           <a:xfrm>
-            <a:off x="1764792" y="6126480"/>
+            <a:off x="2286000" y="6126480"/>
+            <a:ext cx="5029200" cy="0"/>
+          </a:xfrm>
+          <a:prstGeom prst="line">
+            <a:avLst/>
+          </a:prstGeom>
+          <a:ln w="12700">
+            <a:solidFill>
+              <a:srgbClr val="222222"/>
+            </a:solidFill>
+          </a:ln>
+          <a:effectLst/>
+        </p:spPr>
+        <p:style>
+          <a:lnRef idx="2">
+            <a:schemeClr val="accent1"/>
+          </a:lnRef>
+          <a:fillRef idx="0">
+            <a:schemeClr val="accent1"/>
+          </a:fillRef>
+          <a:effectRef idx="1">
+            <a:schemeClr val="accent1"/>
+          </a:effectRef>
+          <a:fontRef idx="minor">
+            <a:schemeClr val="tx1"/>
+          </a:fontRef>
+        </p:style>
+      </p:cxnSp>
+      <p:cxnSp>
+        <p:nvCxnSpPr>
+          <p:cNvPr id="9" name="Connector 8"/>
+          <p:cNvCxnSpPr/>
+          <p:nvPr/>
+        </p:nvCxnSpPr>
+        <p:spPr>
+          <a:xfrm>
+            <a:off x="2286000" y="1097280"/>
+            <a:ext cx="0" cy="5029200"/>
+          </a:xfrm>
+          <a:prstGeom prst="line">
+            <a:avLst/>
+          </a:prstGeom>
+          <a:ln w="12700">
+            <a:solidFill>
+              <a:srgbClr val="222222"/>
+            </a:solidFill>
+          </a:ln>
+          <a:effectLst/>
+        </p:spPr>
+        <p:style>
+          <a:lnRef idx="2">
+            <a:schemeClr val="accent1"/>
+          </a:lnRef>
+          <a:fillRef idx="0">
+            <a:schemeClr val="accent1"/>
+          </a:fillRef>
+          <a:effectRef idx="1">
+            <a:schemeClr val="accent1"/>
+          </a:effectRef>
+          <a:fontRef idx="minor">
+            <a:schemeClr val="tx1"/>
+          </a:fontRef>
+        </p:style>
+      </p:cxnSp>
+      <p:cxnSp>
+        <p:nvCxnSpPr>
+          <p:cNvPr id="10" name="Connector 9"/>
+          <p:cNvCxnSpPr/>
+          <p:nvPr/>
+        </p:nvCxnSpPr>
+        <p:spPr>
+          <a:xfrm>
+            <a:off x="7315200" y="1097280"/>
+            <a:ext cx="0" cy="5029200"/>
+          </a:xfrm>
+          <a:prstGeom prst="line">
+            <a:avLst/>
+          </a:prstGeom>
+          <a:ln w="6350">
+            <a:solidFill>
+              <a:srgbClr val="DDDDDD"/>
+            </a:solidFill>
+          </a:ln>
+          <a:effectLst/>
+        </p:spPr>
+        <p:style>
+          <a:lnRef idx="2">
+            <a:schemeClr val="accent1"/>
+          </a:lnRef>
+          <a:fillRef idx="0">
+            <a:schemeClr val="accent1"/>
+          </a:fillRef>
+          <a:effectRef idx="1">
+            <a:schemeClr val="accent1"/>
+          </a:effectRef>
+          <a:fontRef idx="minor">
+            <a:schemeClr val="tx1"/>
+          </a:fontRef>
+        </p:style>
+      </p:cxnSp>
+      <p:cxnSp>
+        <p:nvCxnSpPr>
+          <p:cNvPr id="11" name="Connector 10"/>
+          <p:cNvCxnSpPr/>
+          <p:nvPr/>
+        </p:nvCxnSpPr>
+        <p:spPr>
+          <a:xfrm>
+            <a:off x="2286000" y="1097280"/>
+            <a:ext cx="5029200" cy="0"/>
+          </a:xfrm>
+          <a:prstGeom prst="line">
+            <a:avLst/>
+          </a:prstGeom>
+          <a:ln w="6350">
+            <a:solidFill>
+              <a:srgbClr val="DDDDDD"/>
+            </a:solidFill>
+          </a:ln>
+          <a:effectLst/>
+        </p:spPr>
+        <p:style>
+          <a:lnRef idx="2">
+            <a:schemeClr val="accent1"/>
+          </a:lnRef>
+          <a:fillRef idx="0">
+            <a:schemeClr val="accent1"/>
+          </a:fillRef>
+          <a:effectRef idx="1">
+            <a:schemeClr val="accent1"/>
+          </a:effectRef>
+          <a:fontRef idx="minor">
+            <a:schemeClr val="tx1"/>
+          </a:fontRef>
+        </p:style>
+      </p:cxnSp>
+      <p:cxnSp>
+        <p:nvCxnSpPr>
+          <p:cNvPr id="12" name="Connector 11"/>
+          <p:cNvCxnSpPr/>
+          <p:nvPr/>
+        </p:nvCxnSpPr>
+        <p:spPr>
+          <a:xfrm>
+            <a:off x="2221992" y="6126480"/>
             <a:ext cx="64008" cy="0"/>
           </a:xfrm>
           <a:prstGeom prst="line">
@@ -12269,13 +12573,13 @@
       </p:cxnSp>
       <p:sp>
         <p:nvSpPr>
-          <p:cNvPr id="9" name="TextBox 8"/>
+          <p:cNvPr id="13" name="TextBox 12"/>
           <p:cNvSpPr txBox="1"/>
           <p:nvPr/>
         </p:nvSpPr>
         <p:spPr>
           <a:xfrm>
-            <a:off x="1325880" y="6044184"/>
+            <a:off x="1783080" y="6044184"/>
             <a:ext cx="438912" cy="164592"/>
           </a:xfrm>
           <a:prstGeom prst="rect">
@@ -12305,13 +12609,13 @@
       </p:sp>
       <p:cxnSp>
         <p:nvCxnSpPr>
-          <p:cNvPr id="10" name="Connector 9"/>
+          <p:cNvPr id="14" name="Connector 13"/>
           <p:cNvCxnSpPr/>
           <p:nvPr/>
         </p:nvCxnSpPr>
         <p:spPr>
           <a:xfrm>
-            <a:off x="1764792" y="4869180"/>
+            <a:off x="2221992" y="4869180"/>
             <a:ext cx="64008" cy="0"/>
           </a:xfrm>
           <a:prstGeom prst="line">
@@ -12341,13 +12645,13 @@
       </p:cxnSp>
       <p:sp>
         <p:nvSpPr>
-          <p:cNvPr id="11" name="TextBox 10"/>
+          <p:cNvPr id="15" name="TextBox 14"/>
           <p:cNvSpPr txBox="1"/>
           <p:nvPr/>
         </p:nvSpPr>
         <p:spPr>
           <a:xfrm>
-            <a:off x="1325880" y="4786884"/>
+            <a:off x="1783080" y="4786884"/>
             <a:ext cx="438912" cy="164592"/>
           </a:xfrm>
           <a:prstGeom prst="rect">
@@ -12377,13 +12681,13 @@
       </p:sp>
       <p:cxnSp>
         <p:nvCxnSpPr>
-          <p:cNvPr id="12" name="Connector 11"/>
+          <p:cNvPr id="16" name="Connector 15"/>
           <p:cNvCxnSpPr/>
           <p:nvPr/>
         </p:nvCxnSpPr>
         <p:spPr>
           <a:xfrm>
-            <a:off x="1764792" y="3611880"/>
+            <a:off x="2221992" y="3611880"/>
             <a:ext cx="64008" cy="0"/>
           </a:xfrm>
           <a:prstGeom prst="line">
@@ -12413,13 +12717,13 @@
       </p:cxnSp>
       <p:sp>
         <p:nvSpPr>
-          <p:cNvPr id="13" name="TextBox 12"/>
+          <p:cNvPr id="17" name="TextBox 16"/>
           <p:cNvSpPr txBox="1"/>
           <p:nvPr/>
         </p:nvSpPr>
         <p:spPr>
           <a:xfrm>
-            <a:off x="1325880" y="3529584"/>
+            <a:off x="1783080" y="3529584"/>
             <a:ext cx="438912" cy="164592"/>
           </a:xfrm>
           <a:prstGeom prst="rect">
@@ -12449,13 +12753,13 @@
       </p:sp>
       <p:cxnSp>
         <p:nvCxnSpPr>
-          <p:cNvPr id="14" name="Connector 13"/>
+          <p:cNvPr id="18" name="Connector 17"/>
           <p:cNvCxnSpPr/>
           <p:nvPr/>
         </p:nvCxnSpPr>
         <p:spPr>
           <a:xfrm>
-            <a:off x="1764792" y="2354580"/>
+            <a:off x="2221992" y="2354580"/>
             <a:ext cx="64008" cy="0"/>
           </a:xfrm>
           <a:prstGeom prst="line">
@@ -12485,13 +12789,13 @@
       </p:cxnSp>
       <p:sp>
         <p:nvSpPr>
-          <p:cNvPr id="15" name="TextBox 14"/>
+          <p:cNvPr id="19" name="TextBox 18"/>
           <p:cNvSpPr txBox="1"/>
           <p:nvPr/>
         </p:nvSpPr>
         <p:spPr>
           <a:xfrm>
-            <a:off x="1325880" y="2272284"/>
+            <a:off x="1783080" y="2272284"/>
             <a:ext cx="438912" cy="164592"/>
           </a:xfrm>
           <a:prstGeom prst="rect">
@@ -12521,13 +12825,13 @@
       </p:sp>
       <p:cxnSp>
         <p:nvCxnSpPr>
-          <p:cNvPr id="16" name="Connector 15"/>
+          <p:cNvPr id="20" name="Connector 19"/>
           <p:cNvCxnSpPr/>
           <p:nvPr/>
         </p:nvCxnSpPr>
         <p:spPr>
           <a:xfrm>
-            <a:off x="1764792" y="1097280"/>
+            <a:off x="2221992" y="1097280"/>
             <a:ext cx="64008" cy="0"/>
           </a:xfrm>
           <a:prstGeom prst="line">
@@ -12557,13 +12861,13 @@
       </p:cxnSp>
       <p:sp>
         <p:nvSpPr>
-          <p:cNvPr id="17" name="TextBox 16"/>
+          <p:cNvPr id="21" name="TextBox 20"/>
           <p:cNvSpPr txBox="1"/>
           <p:nvPr/>
         </p:nvSpPr>
         <p:spPr>
           <a:xfrm>
-            <a:off x="1325880" y="1014984"/>
+            <a:off x="1783080" y="1014984"/>
             <a:ext cx="438912" cy="164592"/>
           </a:xfrm>
           <a:prstGeom prst="rect">
@@ -12593,13 +12897,13 @@
       </p:sp>
       <p:cxnSp>
         <p:nvCxnSpPr>
-          <p:cNvPr id="18" name="Connector 17"/>
+          <p:cNvPr id="22" name="Connector 21"/>
           <p:cNvCxnSpPr/>
           <p:nvPr/>
         </p:nvCxnSpPr>
         <p:spPr>
           <a:xfrm>
-            <a:off x="1828800" y="6126480"/>
+            <a:off x="2286000" y="6126480"/>
             <a:ext cx="0" cy="64008"/>
           </a:xfrm>
           <a:prstGeom prst="line">
@@ -12629,13 +12933,13 @@
       </p:cxnSp>
       <p:sp>
         <p:nvSpPr>
-          <p:cNvPr id="19" name="TextBox 18"/>
+          <p:cNvPr id="23" name="TextBox 22"/>
           <p:cNvSpPr txBox="1"/>
           <p:nvPr/>
         </p:nvSpPr>
         <p:spPr>
           <a:xfrm>
-            <a:off x="1463040" y="6181344"/>
+            <a:off x="1920240" y="6181344"/>
             <a:ext cx="731520" cy="164592"/>
           </a:xfrm>
           <a:prstGeom prst="rect">
@@ -12665,13 +12969,13 @@
       </p:sp>
       <p:cxnSp>
         <p:nvCxnSpPr>
-          <p:cNvPr id="20" name="Connector 19"/>
+          <p:cNvPr id="24" name="Connector 23"/>
           <p:cNvCxnSpPr/>
           <p:nvPr/>
         </p:nvCxnSpPr>
         <p:spPr>
           <a:xfrm>
-            <a:off x="3200400" y="6126480"/>
+            <a:off x="3543300" y="6126480"/>
             <a:ext cx="0" cy="64008"/>
           </a:xfrm>
           <a:prstGeom prst="line">
@@ -12701,13 +13005,13 @@
       </p:cxnSp>
       <p:sp>
         <p:nvSpPr>
-          <p:cNvPr id="21" name="TextBox 20"/>
+          <p:cNvPr id="25" name="TextBox 24"/>
           <p:cNvSpPr txBox="1"/>
           <p:nvPr/>
         </p:nvSpPr>
         <p:spPr>
           <a:xfrm>
-            <a:off x="2834640" y="6181344"/>
+            <a:off x="3177540" y="6181344"/>
             <a:ext cx="731520" cy="164592"/>
           </a:xfrm>
           <a:prstGeom prst="rect">
@@ -12737,13 +13041,13 @@
       </p:sp>
       <p:cxnSp>
         <p:nvCxnSpPr>
-          <p:cNvPr id="22" name="Connector 21"/>
+          <p:cNvPr id="26" name="Connector 25"/>
           <p:cNvCxnSpPr/>
           <p:nvPr/>
         </p:nvCxnSpPr>
         <p:spPr>
           <a:xfrm>
-            <a:off x="4572000" y="6126480"/>
+            <a:off x="4800600" y="6126480"/>
             <a:ext cx="0" cy="64008"/>
           </a:xfrm>
           <a:prstGeom prst="line">
@@ -12773,13 +13077,13 @@
       </p:cxnSp>
       <p:sp>
         <p:nvSpPr>
-          <p:cNvPr id="23" name="TextBox 22"/>
+          <p:cNvPr id="27" name="TextBox 26"/>
           <p:cNvSpPr txBox="1"/>
           <p:nvPr/>
         </p:nvSpPr>
         <p:spPr>
           <a:xfrm>
-            <a:off x="4206240" y="6181344"/>
+            <a:off x="4434840" y="6181344"/>
             <a:ext cx="731520" cy="164592"/>
           </a:xfrm>
           <a:prstGeom prst="rect">
@@ -12809,13 +13113,13 @@
       </p:sp>
       <p:cxnSp>
         <p:nvCxnSpPr>
-          <p:cNvPr id="24" name="Connector 23"/>
+          <p:cNvPr id="28" name="Connector 27"/>
           <p:cNvCxnSpPr/>
           <p:nvPr/>
         </p:nvCxnSpPr>
         <p:spPr>
           <a:xfrm>
-            <a:off x="5943600" y="6126480"/>
+            <a:off x="6057900" y="6126480"/>
             <a:ext cx="0" cy="64008"/>
           </a:xfrm>
           <a:prstGeom prst="line">
@@ -12845,13 +13149,13 @@
       </p:cxnSp>
       <p:sp>
         <p:nvSpPr>
-          <p:cNvPr id="25" name="TextBox 24"/>
+          <p:cNvPr id="29" name="TextBox 28"/>
           <p:cNvSpPr txBox="1"/>
           <p:nvPr/>
         </p:nvSpPr>
         <p:spPr>
           <a:xfrm>
-            <a:off x="5577840" y="6181344"/>
+            <a:off x="5692140" y="6181344"/>
             <a:ext cx="731520" cy="164592"/>
           </a:xfrm>
           <a:prstGeom prst="rect">
@@ -12881,7 +13185,7 @@
       </p:sp>
       <p:cxnSp>
         <p:nvCxnSpPr>
-          <p:cNvPr id="26" name="Connector 25"/>
+          <p:cNvPr id="30" name="Connector 29"/>
           <p:cNvCxnSpPr/>
           <p:nvPr/>
         </p:nvCxnSpPr>
@@ -12917,7 +13221,7 @@
       </p:cxnSp>
       <p:sp>
         <p:nvSpPr>
-          <p:cNvPr id="27" name="TextBox 26"/>
+          <p:cNvPr id="31" name="TextBox 30"/>
           <p:cNvSpPr txBox="1"/>
           <p:nvPr/>
         </p:nvSpPr>
@@ -12953,14 +13257,14 @@
       </p:sp>
       <p:sp>
         <p:nvSpPr>
-          <p:cNvPr id="28" name="TextBox 27"/>
+          <p:cNvPr id="32" name="TextBox 31"/>
           <p:cNvSpPr txBox="1"/>
           <p:nvPr/>
         </p:nvSpPr>
         <p:spPr>
           <a:xfrm>
-            <a:off x="1828800" y="6473952"/>
-            <a:ext cx="5486400" cy="228600"/>
+            <a:off x="2286000" y="6473952"/>
+            <a:ext cx="5029200" cy="228600"/>
           </a:xfrm>
           <a:prstGeom prst="rect">
             <a:avLst/>
@@ -12989,13 +13293,13 @@
       </p:sp>
       <p:sp>
         <p:nvSpPr>
-          <p:cNvPr id="29" name="TextBox 28"/>
+          <p:cNvPr id="33" name="TextBox 32"/>
           <p:cNvSpPr txBox="1"/>
           <p:nvPr/>
         </p:nvSpPr>
         <p:spPr>
           <a:xfrm>
-            <a:off x="960120" y="2606040"/>
+            <a:off x="1417320" y="2606040"/>
             <a:ext cx="365760" cy="2011680"/>
           </a:xfrm>
           <a:prstGeom prst="rect">
@@ -13025,19 +13329,19 @@
       </p:sp>
       <p:cxnSp>
         <p:nvCxnSpPr>
-          <p:cNvPr id="30" name="Connector 29"/>
+          <p:cNvPr id="34" name="Connector 33"/>
           <p:cNvCxnSpPr/>
           <p:nvPr/>
         </p:nvCxnSpPr>
         <p:spPr>
-          <a:xfrm flipV="1">
-            <a:off x="1828800" y="1097280"/>
-            <a:ext cx="5486400" cy="5029200"/>
+          <a:xfrm>
+            <a:off x="4800600" y="1097280"/>
+            <a:ext cx="0" cy="5029200"/>
           </a:xfrm>
           <a:prstGeom prst="line">
             <a:avLst/>
           </a:prstGeom>
-          <a:ln w="6350">
+          <a:ln w="7620">
             <a:solidFill>
               <a:srgbClr val="BBBBBB"/>
             </a:solidFill>
@@ -13060,9 +13364,46 @@
           </a:fontRef>
         </p:style>
       </p:cxnSp>
-      <p:sp>
-        <p:nvSpPr>
-          <p:cNvPr id="31" name="Oval 30"/>
+      <p:cxnSp>
+        <p:nvCxnSpPr>
+          <p:cNvPr id="35" name="Connector 34"/>
+          <p:cNvCxnSpPr/>
+          <p:nvPr/>
+        </p:nvCxnSpPr>
+        <p:spPr>
+          <a:xfrm>
+            <a:off x="2286000" y="3611880"/>
+            <a:ext cx="5029200" cy="0"/>
+          </a:xfrm>
+          <a:prstGeom prst="line">
+            <a:avLst/>
+          </a:prstGeom>
+          <a:ln w="7620">
+            <a:solidFill>
+              <a:srgbClr val="BBBBBB"/>
+            </a:solidFill>
+            <a:prstDash val="dash"/>
+          </a:ln>
+          <a:effectLst/>
+        </p:spPr>
+        <p:style>
+          <a:lnRef idx="2">
+            <a:schemeClr val="accent1"/>
+          </a:lnRef>
+          <a:fillRef idx="0">
+            <a:schemeClr val="accent1"/>
+          </a:fillRef>
+          <a:effectRef idx="1">
+            <a:schemeClr val="accent1"/>
+          </a:effectRef>
+          <a:fontRef idx="minor">
+            <a:schemeClr val="tx1"/>
+          </a:fontRef>
+        </p:style>
+      </p:cxnSp>
+      <p:sp>
+        <p:nvSpPr>
+          <p:cNvPr id="36" name="Oval 35"/>
           <p:cNvSpPr/>
           <p:nvPr/>
         </p:nvSpPr>
@@ -13108,14 +13449,196 @@
       </p:sp>
       <p:sp>
         <p:nvSpPr>
-          <p:cNvPr id="32" name="TextBox 31"/>
+          <p:cNvPr id="37" name="Oval 36"/>
+          <p:cNvSpPr/>
+          <p:nvPr/>
+        </p:nvSpPr>
+        <p:spPr>
+          <a:xfrm>
+            <a:off x="7278624" y="5084064"/>
+            <a:ext cx="73152" cy="73152"/>
+          </a:xfrm>
+          <a:prstGeom prst="ellipse">
+            <a:avLst/>
+          </a:prstGeom>
+          <a:solidFill>
+            <a:srgbClr val="222222"/>
+          </a:solidFill>
+          <a:ln w="3810">
+            <a:solidFill>
+              <a:srgbClr val="222222"/>
+            </a:solidFill>
+          </a:ln>
+          <a:effectLst/>
+        </p:spPr>
+        <p:style>
+          <a:lnRef idx="1">
+            <a:schemeClr val="accent1"/>
+          </a:lnRef>
+          <a:fillRef idx="3">
+            <a:schemeClr val="accent1"/>
+          </a:fillRef>
+          <a:effectRef idx="2">
+            <a:schemeClr val="accent1"/>
+          </a:effectRef>
+          <a:fontRef idx="minor">
+            <a:schemeClr val="lt1"/>
+          </a:fontRef>
+        </p:style>
+        <p:txBody>
+          <a:bodyPr rtlCol="0" anchor="ctr"/>
+          <a:lstStyle/>
+          <a:p>
+            <a:pPr algn="ctr"/>
+          </a:p>
+        </p:txBody>
+      </p:sp>
+      <p:sp>
+        <p:nvSpPr>
+          <p:cNvPr id="38" name="Oval 37"/>
+          <p:cNvSpPr/>
+          <p:nvPr/>
+        </p:nvSpPr>
+        <p:spPr>
+          <a:xfrm>
+            <a:off x="5602224" y="6089904"/>
+            <a:ext cx="73152" cy="73152"/>
+          </a:xfrm>
+          <a:prstGeom prst="ellipse">
+            <a:avLst/>
+          </a:prstGeom>
+          <a:solidFill>
+            <a:srgbClr val="222222"/>
+          </a:solidFill>
+          <a:ln w="3810">
+            <a:solidFill>
+              <a:srgbClr val="222222"/>
+            </a:solidFill>
+          </a:ln>
+          <a:effectLst/>
+        </p:spPr>
+        <p:style>
+          <a:lnRef idx="1">
+            <a:schemeClr val="accent1"/>
+          </a:lnRef>
+          <a:fillRef idx="3">
+            <a:schemeClr val="accent1"/>
+          </a:fillRef>
+          <a:effectRef idx="2">
+            <a:schemeClr val="accent1"/>
+          </a:effectRef>
+          <a:fontRef idx="minor">
+            <a:schemeClr val="lt1"/>
+          </a:fontRef>
+        </p:style>
+        <p:txBody>
+          <a:bodyPr rtlCol="0" anchor="ctr"/>
+          <a:lstStyle/>
+          <a:p>
+            <a:pPr algn="ctr"/>
+          </a:p>
+        </p:txBody>
+      </p:sp>
+      <p:sp>
+        <p:nvSpPr>
+          <p:cNvPr id="39" name="Oval 38"/>
+          <p:cNvSpPr/>
+          <p:nvPr/>
+        </p:nvSpPr>
+        <p:spPr>
+          <a:xfrm>
+            <a:off x="5602224" y="6089904"/>
+            <a:ext cx="73152" cy="73152"/>
+          </a:xfrm>
+          <a:prstGeom prst="ellipse">
+            <a:avLst/>
+          </a:prstGeom>
+          <a:solidFill>
+            <a:srgbClr val="222222"/>
+          </a:solidFill>
+          <a:ln w="3810">
+            <a:solidFill>
+              <a:srgbClr val="222222"/>
+            </a:solidFill>
+          </a:ln>
+          <a:effectLst/>
+        </p:spPr>
+        <p:style>
+          <a:lnRef idx="1">
+            <a:schemeClr val="accent1"/>
+          </a:lnRef>
+          <a:fillRef idx="3">
+            <a:schemeClr val="accent1"/>
+          </a:fillRef>
+          <a:effectRef idx="2">
+            <a:schemeClr val="accent1"/>
+          </a:effectRef>
+          <a:fontRef idx="minor">
+            <a:schemeClr val="lt1"/>
+          </a:fontRef>
+        </p:style>
+        <p:txBody>
+          <a:bodyPr rtlCol="0" anchor="ctr"/>
+          <a:lstStyle/>
+          <a:p>
+            <a:pPr algn="ctr"/>
+          </a:p>
+        </p:txBody>
+      </p:sp>
+      <p:sp>
+        <p:nvSpPr>
+          <p:cNvPr id="40" name="5-Point Star 39"/>
+          <p:cNvSpPr/>
+          <p:nvPr/>
+        </p:nvSpPr>
+        <p:spPr>
+          <a:xfrm>
+            <a:off x="7232904" y="4367784"/>
+            <a:ext cx="164592" cy="164592"/>
+          </a:xfrm>
+          <a:prstGeom prst="star5">
+            <a:avLst/>
+          </a:prstGeom>
+          <a:solidFill>
+            <a:srgbClr val="D4A300"/>
+          </a:solidFill>
+          <a:ln>
+            <a:noFill/>
+          </a:ln>
+          <a:effectLst/>
+        </p:spPr>
+        <p:style>
+          <a:lnRef idx="1">
+            <a:schemeClr val="accent1"/>
+          </a:lnRef>
+          <a:fillRef idx="3">
+            <a:schemeClr val="accent1"/>
+          </a:fillRef>
+          <a:effectRef idx="2">
+            <a:schemeClr val="accent1"/>
+          </a:effectRef>
+          <a:fontRef idx="minor">
+            <a:schemeClr val="lt1"/>
+          </a:fontRef>
+        </p:style>
+        <p:txBody>
+          <a:bodyPr rtlCol="0" anchor="ctr"/>
+          <a:lstStyle/>
+          <a:p>
+            <a:pPr algn="ctr"/>
+          </a:p>
+        </p:txBody>
+      </p:sp>
+      <p:sp>
+        <p:nvSpPr>
+          <p:cNvPr id="41" name="TextBox 40"/>
           <p:cNvSpPr txBox="1"/>
           <p:nvPr/>
         </p:nvSpPr>
         <p:spPr>
           <a:xfrm>
-            <a:off x="7379208" y="6062472"/>
-            <a:ext cx="731520" cy="128016"/>
+            <a:off x="7388352" y="4386072"/>
+            <a:ext cx="914400" cy="164592"/>
           </a:xfrm>
           <a:prstGeom prst="rect">
             <a:avLst/>
@@ -13131,335 +13654,7 @@
           <a:p>
             <a:pPr algn="l"/>
             <a:r>
-              <a:rPr sz="600" b="0" i="0">
-                <a:solidFill>
-                  <a:srgbClr val="BBBBBB"/>
-                </a:solidFill>
-                <a:latin typeface="Arial"/>
-              </a:rPr>
-              <a:t>IGHV3-38-3</a:t>
-            </a:r>
-          </a:p>
-        </p:txBody>
-      </p:sp>
-      <p:sp>
-        <p:nvSpPr>
-          <p:cNvPr id="33" name="Oval 32"/>
-          <p:cNvSpPr/>
-          <p:nvPr/>
-        </p:nvSpPr>
-        <p:spPr>
-          <a:xfrm>
-            <a:off x="7278624" y="5084064"/>
-            <a:ext cx="73152" cy="73152"/>
-          </a:xfrm>
-          <a:prstGeom prst="ellipse">
-            <a:avLst/>
-          </a:prstGeom>
-          <a:solidFill>
-            <a:srgbClr val="222222"/>
-          </a:solidFill>
-          <a:ln w="3810">
-            <a:solidFill>
-              <a:srgbClr val="222222"/>
-            </a:solidFill>
-          </a:ln>
-          <a:effectLst/>
-        </p:spPr>
-        <p:style>
-          <a:lnRef idx="1">
-            <a:schemeClr val="accent1"/>
-          </a:lnRef>
-          <a:fillRef idx="3">
-            <a:schemeClr val="accent1"/>
-          </a:fillRef>
-          <a:effectRef idx="2">
-            <a:schemeClr val="accent1"/>
-          </a:effectRef>
-          <a:fontRef idx="minor">
-            <a:schemeClr val="lt1"/>
-          </a:fontRef>
-        </p:style>
-        <p:txBody>
-          <a:bodyPr rtlCol="0" anchor="ctr"/>
-          <a:lstStyle/>
-          <a:p>
-            <a:pPr algn="ctr"/>
-          </a:p>
-        </p:txBody>
-      </p:sp>
-      <p:sp>
-        <p:nvSpPr>
-          <p:cNvPr id="34" name="TextBox 33"/>
-          <p:cNvSpPr txBox="1"/>
-          <p:nvPr/>
-        </p:nvSpPr>
-        <p:spPr>
-          <a:xfrm>
-            <a:off x="7379208" y="5056632"/>
-            <a:ext cx="731520" cy="128016"/>
-          </a:xfrm>
-          <a:prstGeom prst="rect">
-            <a:avLst/>
-          </a:prstGeom>
-          <a:noFill/>
-          <a:effectLst/>
-        </p:spPr>
-        <p:txBody>
-          <a:bodyPr wrap="square" lIns="0" rIns="0" tIns="0" bIns="0" anchor="ctr">
-            <a:spAutoFit/>
-          </a:bodyPr>
-          <a:lstStyle/>
-          <a:p>
-            <a:pPr algn="l"/>
-            <a:r>
-              <a:rPr sz="600" b="0" i="0">
-                <a:solidFill>
-                  <a:srgbClr val="BBBBBB"/>
-                </a:solidFill>
-                <a:latin typeface="Arial"/>
-              </a:rPr>
-              <a:t>IGHV1-45</a:t>
-            </a:r>
-          </a:p>
-        </p:txBody>
-      </p:sp>
-      <p:sp>
-        <p:nvSpPr>
-          <p:cNvPr id="35" name="Oval 34"/>
-          <p:cNvSpPr/>
-          <p:nvPr/>
-        </p:nvSpPr>
-        <p:spPr>
-          <a:xfrm>
-            <a:off x="5449824" y="6089904"/>
-            <a:ext cx="73152" cy="73152"/>
-          </a:xfrm>
-          <a:prstGeom prst="ellipse">
-            <a:avLst/>
-          </a:prstGeom>
-          <a:solidFill>
-            <a:srgbClr val="222222"/>
-          </a:solidFill>
-          <a:ln w="3810">
-            <a:solidFill>
-              <a:srgbClr val="222222"/>
-            </a:solidFill>
-          </a:ln>
-          <a:effectLst/>
-        </p:spPr>
-        <p:style>
-          <a:lnRef idx="1">
-            <a:schemeClr val="accent1"/>
-          </a:lnRef>
-          <a:fillRef idx="3">
-            <a:schemeClr val="accent1"/>
-          </a:fillRef>
-          <a:effectRef idx="2">
-            <a:schemeClr val="accent1"/>
-          </a:effectRef>
-          <a:fontRef idx="minor">
-            <a:schemeClr val="lt1"/>
-          </a:fontRef>
-        </p:style>
-        <p:txBody>
-          <a:bodyPr rtlCol="0" anchor="ctr"/>
-          <a:lstStyle/>
-          <a:p>
-            <a:pPr algn="ctr"/>
-          </a:p>
-        </p:txBody>
-      </p:sp>
-      <p:sp>
-        <p:nvSpPr>
-          <p:cNvPr id="36" name="TextBox 35"/>
-          <p:cNvSpPr txBox="1"/>
-          <p:nvPr/>
-        </p:nvSpPr>
-        <p:spPr>
-          <a:xfrm>
-            <a:off x="5550408" y="6062472"/>
-            <a:ext cx="731520" cy="128016"/>
-          </a:xfrm>
-          <a:prstGeom prst="rect">
-            <a:avLst/>
-          </a:prstGeom>
-          <a:noFill/>
-          <a:effectLst/>
-        </p:spPr>
-        <p:txBody>
-          <a:bodyPr wrap="square" lIns="0" rIns="0" tIns="0" bIns="0" anchor="ctr">
-            <a:spAutoFit/>
-          </a:bodyPr>
-          <a:lstStyle/>
-          <a:p>
-            <a:pPr algn="l"/>
-            <a:r>
-              <a:rPr sz="600" b="0" i="0">
-                <a:solidFill>
-                  <a:srgbClr val="BBBBBB"/>
-                </a:solidFill>
-                <a:latin typeface="Arial"/>
-              </a:rPr>
-              <a:t>IGHV2-26</a:t>
-            </a:r>
-          </a:p>
-        </p:txBody>
-      </p:sp>
-      <p:sp>
-        <p:nvSpPr>
-          <p:cNvPr id="37" name="Oval 36"/>
-          <p:cNvSpPr/>
-          <p:nvPr/>
-        </p:nvSpPr>
-        <p:spPr>
-          <a:xfrm>
-            <a:off x="5449824" y="6089904"/>
-            <a:ext cx="73152" cy="73152"/>
-          </a:xfrm>
-          <a:prstGeom prst="ellipse">
-            <a:avLst/>
-          </a:prstGeom>
-          <a:solidFill>
-            <a:srgbClr val="222222"/>
-          </a:solidFill>
-          <a:ln w="3810">
-            <a:solidFill>
-              <a:srgbClr val="222222"/>
-            </a:solidFill>
-          </a:ln>
-          <a:effectLst/>
-        </p:spPr>
-        <p:style>
-          <a:lnRef idx="1">
-            <a:schemeClr val="accent1"/>
-          </a:lnRef>
-          <a:fillRef idx="3">
-            <a:schemeClr val="accent1"/>
-          </a:fillRef>
-          <a:effectRef idx="2">
-            <a:schemeClr val="accent1"/>
-          </a:effectRef>
-          <a:fontRef idx="minor">
-            <a:schemeClr val="lt1"/>
-          </a:fontRef>
-        </p:style>
-        <p:txBody>
-          <a:bodyPr rtlCol="0" anchor="ctr"/>
-          <a:lstStyle/>
-          <a:p>
-            <a:pPr algn="ctr"/>
-          </a:p>
-        </p:txBody>
-      </p:sp>
-      <p:sp>
-        <p:nvSpPr>
-          <p:cNvPr id="38" name="TextBox 37"/>
-          <p:cNvSpPr txBox="1"/>
-          <p:nvPr/>
-        </p:nvSpPr>
-        <p:spPr>
-          <a:xfrm>
-            <a:off x="5550408" y="6062472"/>
-            <a:ext cx="731520" cy="128016"/>
-          </a:xfrm>
-          <a:prstGeom prst="rect">
-            <a:avLst/>
-          </a:prstGeom>
-          <a:noFill/>
-          <a:effectLst/>
-        </p:spPr>
-        <p:txBody>
-          <a:bodyPr wrap="square" lIns="0" rIns="0" tIns="0" bIns="0" anchor="ctr">
-            <a:spAutoFit/>
-          </a:bodyPr>
-          <a:lstStyle/>
-          <a:p>
-            <a:pPr algn="l"/>
-            <a:r>
-              <a:rPr sz="600" b="0" i="0">
-                <a:solidFill>
-                  <a:srgbClr val="BBBBBB"/>
-                </a:solidFill>
-                <a:latin typeface="Arial"/>
-              </a:rPr>
-              <a:t>IGHV4-30-4</a:t>
-            </a:r>
-          </a:p>
-        </p:txBody>
-      </p:sp>
-      <p:sp>
-        <p:nvSpPr>
-          <p:cNvPr id="39" name="Oval 38"/>
-          <p:cNvSpPr/>
-          <p:nvPr/>
-        </p:nvSpPr>
-        <p:spPr>
-          <a:xfrm>
-            <a:off x="7260336" y="4395216"/>
-            <a:ext cx="109728" cy="109728"/>
-          </a:xfrm>
-          <a:prstGeom prst="ellipse">
-            <a:avLst/>
-          </a:prstGeom>
-          <a:solidFill>
-            <a:srgbClr val="D4A300"/>
-          </a:solidFill>
-          <a:ln w="3810">
-            <a:solidFill>
-              <a:srgbClr val="222222"/>
-            </a:solidFill>
-          </a:ln>
-          <a:effectLst/>
-        </p:spPr>
-        <p:style>
-          <a:lnRef idx="1">
-            <a:schemeClr val="accent1"/>
-          </a:lnRef>
-          <a:fillRef idx="3">
-            <a:schemeClr val="accent1"/>
-          </a:fillRef>
-          <a:effectRef idx="2">
-            <a:schemeClr val="accent1"/>
-          </a:effectRef>
-          <a:fontRef idx="minor">
-            <a:schemeClr val="lt1"/>
-          </a:fontRef>
-        </p:style>
-        <p:txBody>
-          <a:bodyPr rtlCol="0" anchor="ctr"/>
-          <a:lstStyle/>
-          <a:p>
-            <a:pPr algn="ctr"/>
-          </a:p>
-        </p:txBody>
-      </p:sp>
-      <p:sp>
-        <p:nvSpPr>
-          <p:cNvPr id="40" name="TextBox 39"/>
-          <p:cNvSpPr txBox="1"/>
-          <p:nvPr/>
-        </p:nvSpPr>
-        <p:spPr>
-          <a:xfrm>
-            <a:off x="7379208" y="4386072"/>
-            <a:ext cx="731520" cy="128016"/>
-          </a:xfrm>
-          <a:prstGeom prst="rect">
-            <a:avLst/>
-          </a:prstGeom>
-          <a:noFill/>
-          <a:effectLst/>
-        </p:spPr>
-        <p:txBody>
-          <a:bodyPr wrap="square" lIns="0" rIns="0" tIns="0" bIns="0" anchor="ctr">
-            <a:spAutoFit/>
-          </a:bodyPr>
-          <a:lstStyle/>
-          <a:p>
-            <a:pPr algn="l"/>
-            <a:r>
-              <a:rPr sz="600" b="1" i="0">
+              <a:rPr sz="800" b="1" i="0">
                 <a:solidFill>
                   <a:srgbClr val="D4A300"/>
                 </a:solidFill>
@@ -13472,13 +13667,13 @@
       </p:sp>
       <p:sp>
         <p:nvSpPr>
-          <p:cNvPr id="41" name="Oval 40"/>
-          <p:cNvSpPr/>
-          <p:nvPr/>
-        </p:nvSpPr>
-        <p:spPr>
-          <a:xfrm>
-            <a:off x="5449824" y="4413504"/>
+          <p:cNvPr id="42" name="Oval 41"/>
+          <p:cNvSpPr/>
+          <p:nvPr/>
+        </p:nvSpPr>
+        <p:spPr>
+          <a:xfrm>
+            <a:off x="5602224" y="4413504"/>
             <a:ext cx="73152" cy="73152"/>
           </a:xfrm>
           <a:prstGeom prst="ellipse">
@@ -13518,14 +13713,334 @@
       </p:sp>
       <p:sp>
         <p:nvSpPr>
-          <p:cNvPr id="42" name="TextBox 41"/>
+          <p:cNvPr id="43" name="Oval 42"/>
+          <p:cNvSpPr/>
+          <p:nvPr/>
+        </p:nvSpPr>
+        <p:spPr>
+          <a:xfrm>
+            <a:off x="5602224" y="4413504"/>
+            <a:ext cx="73152" cy="73152"/>
+          </a:xfrm>
+          <a:prstGeom prst="ellipse">
+            <a:avLst/>
+          </a:prstGeom>
+          <a:solidFill>
+            <a:srgbClr val="222222"/>
+          </a:solidFill>
+          <a:ln w="3810">
+            <a:solidFill>
+              <a:srgbClr val="222222"/>
+            </a:solidFill>
+          </a:ln>
+          <a:effectLst/>
+        </p:spPr>
+        <p:style>
+          <a:lnRef idx="1">
+            <a:schemeClr val="accent1"/>
+          </a:lnRef>
+          <a:fillRef idx="3">
+            <a:schemeClr val="accent1"/>
+          </a:fillRef>
+          <a:effectRef idx="2">
+            <a:schemeClr val="accent1"/>
+          </a:effectRef>
+          <a:fontRef idx="minor">
+            <a:schemeClr val="lt1"/>
+          </a:fontRef>
+        </p:style>
+        <p:txBody>
+          <a:bodyPr rtlCol="0" anchor="ctr"/>
+          <a:lstStyle/>
+          <a:p>
+            <a:pPr algn="ctr"/>
+          </a:p>
+        </p:txBody>
+      </p:sp>
+      <p:sp>
+        <p:nvSpPr>
+          <p:cNvPr id="44" name="Oval 43"/>
+          <p:cNvSpPr/>
+          <p:nvPr/>
+        </p:nvSpPr>
+        <p:spPr>
+          <a:xfrm>
+            <a:off x="5602224" y="4413504"/>
+            <a:ext cx="73152" cy="73152"/>
+          </a:xfrm>
+          <a:prstGeom prst="ellipse">
+            <a:avLst/>
+          </a:prstGeom>
+          <a:solidFill>
+            <a:srgbClr val="222222"/>
+          </a:solidFill>
+          <a:ln w="3810">
+            <a:solidFill>
+              <a:srgbClr val="222222"/>
+            </a:solidFill>
+          </a:ln>
+          <a:effectLst/>
+        </p:spPr>
+        <p:style>
+          <a:lnRef idx="1">
+            <a:schemeClr val="accent1"/>
+          </a:lnRef>
+          <a:fillRef idx="3">
+            <a:schemeClr val="accent1"/>
+          </a:fillRef>
+          <a:effectRef idx="2">
+            <a:schemeClr val="accent1"/>
+          </a:effectRef>
+          <a:fontRef idx="minor">
+            <a:schemeClr val="lt1"/>
+          </a:fontRef>
+        </p:style>
+        <p:txBody>
+          <a:bodyPr rtlCol="0" anchor="ctr"/>
+          <a:lstStyle/>
+          <a:p>
+            <a:pPr algn="ctr"/>
+          </a:p>
+        </p:txBody>
+      </p:sp>
+      <p:sp>
+        <p:nvSpPr>
+          <p:cNvPr id="45" name="Oval 44"/>
+          <p:cNvSpPr/>
+          <p:nvPr/>
+        </p:nvSpPr>
+        <p:spPr>
+          <a:xfrm>
+            <a:off x="5602224" y="4413504"/>
+            <a:ext cx="73152" cy="73152"/>
+          </a:xfrm>
+          <a:prstGeom prst="ellipse">
+            <a:avLst/>
+          </a:prstGeom>
+          <a:solidFill>
+            <a:srgbClr val="222222"/>
+          </a:solidFill>
+          <a:ln w="3810">
+            <a:solidFill>
+              <a:srgbClr val="222222"/>
+            </a:solidFill>
+          </a:ln>
+          <a:effectLst/>
+        </p:spPr>
+        <p:style>
+          <a:lnRef idx="1">
+            <a:schemeClr val="accent1"/>
+          </a:lnRef>
+          <a:fillRef idx="3">
+            <a:schemeClr val="accent1"/>
+          </a:fillRef>
+          <a:effectRef idx="2">
+            <a:schemeClr val="accent1"/>
+          </a:effectRef>
+          <a:fontRef idx="minor">
+            <a:schemeClr val="lt1"/>
+          </a:fontRef>
+        </p:style>
+        <p:txBody>
+          <a:bodyPr rtlCol="0" anchor="ctr"/>
+          <a:lstStyle/>
+          <a:p>
+            <a:pPr algn="ctr"/>
+          </a:p>
+        </p:txBody>
+      </p:sp>
+      <p:sp>
+        <p:nvSpPr>
+          <p:cNvPr id="46" name="Oval 45"/>
+          <p:cNvSpPr/>
+          <p:nvPr/>
+        </p:nvSpPr>
+        <p:spPr>
+          <a:xfrm>
+            <a:off x="5602224" y="4413504"/>
+            <a:ext cx="73152" cy="73152"/>
+          </a:xfrm>
+          <a:prstGeom prst="ellipse">
+            <a:avLst/>
+          </a:prstGeom>
+          <a:solidFill>
+            <a:srgbClr val="222222"/>
+          </a:solidFill>
+          <a:ln w="3810">
+            <a:solidFill>
+              <a:srgbClr val="222222"/>
+            </a:solidFill>
+          </a:ln>
+          <a:effectLst/>
+        </p:spPr>
+        <p:style>
+          <a:lnRef idx="1">
+            <a:schemeClr val="accent1"/>
+          </a:lnRef>
+          <a:fillRef idx="3">
+            <a:schemeClr val="accent1"/>
+          </a:fillRef>
+          <a:effectRef idx="2">
+            <a:schemeClr val="accent1"/>
+          </a:effectRef>
+          <a:fontRef idx="minor">
+            <a:schemeClr val="lt1"/>
+          </a:fontRef>
+        </p:style>
+        <p:txBody>
+          <a:bodyPr rtlCol="0" anchor="ctr"/>
+          <a:lstStyle/>
+          <a:p>
+            <a:pPr algn="ctr"/>
+          </a:p>
+        </p:txBody>
+      </p:sp>
+      <p:sp>
+        <p:nvSpPr>
+          <p:cNvPr id="47" name="Oval 46"/>
+          <p:cNvSpPr/>
+          <p:nvPr/>
+        </p:nvSpPr>
+        <p:spPr>
+          <a:xfrm>
+            <a:off x="5602224" y="4413504"/>
+            <a:ext cx="73152" cy="73152"/>
+          </a:xfrm>
+          <a:prstGeom prst="ellipse">
+            <a:avLst/>
+          </a:prstGeom>
+          <a:solidFill>
+            <a:srgbClr val="222222"/>
+          </a:solidFill>
+          <a:ln w="3810">
+            <a:solidFill>
+              <a:srgbClr val="222222"/>
+            </a:solidFill>
+          </a:ln>
+          <a:effectLst/>
+        </p:spPr>
+        <p:style>
+          <a:lnRef idx="1">
+            <a:schemeClr val="accent1"/>
+          </a:lnRef>
+          <a:fillRef idx="3">
+            <a:schemeClr val="accent1"/>
+          </a:fillRef>
+          <a:effectRef idx="2">
+            <a:schemeClr val="accent1"/>
+          </a:effectRef>
+          <a:fontRef idx="minor">
+            <a:schemeClr val="lt1"/>
+          </a:fontRef>
+        </p:style>
+        <p:txBody>
+          <a:bodyPr rtlCol="0" anchor="ctr"/>
+          <a:lstStyle/>
+          <a:p>
+            <a:pPr algn="ctr"/>
+          </a:p>
+        </p:txBody>
+      </p:sp>
+      <p:sp>
+        <p:nvSpPr>
+          <p:cNvPr id="48" name="Oval 47"/>
+          <p:cNvSpPr/>
+          <p:nvPr/>
+        </p:nvSpPr>
+        <p:spPr>
+          <a:xfrm>
+            <a:off x="5602224" y="4413504"/>
+            <a:ext cx="73152" cy="73152"/>
+          </a:xfrm>
+          <a:prstGeom prst="ellipse">
+            <a:avLst/>
+          </a:prstGeom>
+          <a:solidFill>
+            <a:srgbClr val="222222"/>
+          </a:solidFill>
+          <a:ln w="3810">
+            <a:solidFill>
+              <a:srgbClr val="222222"/>
+            </a:solidFill>
+          </a:ln>
+          <a:effectLst/>
+        </p:spPr>
+        <p:style>
+          <a:lnRef idx="1">
+            <a:schemeClr val="accent1"/>
+          </a:lnRef>
+          <a:fillRef idx="3">
+            <a:schemeClr val="accent1"/>
+          </a:fillRef>
+          <a:effectRef idx="2">
+            <a:schemeClr val="accent1"/>
+          </a:effectRef>
+          <a:fontRef idx="minor">
+            <a:schemeClr val="lt1"/>
+          </a:fontRef>
+        </p:style>
+        <p:txBody>
+          <a:bodyPr rtlCol="0" anchor="ctr"/>
+          <a:lstStyle/>
+          <a:p>
+            <a:pPr algn="ctr"/>
+          </a:p>
+        </p:txBody>
+      </p:sp>
+      <p:sp>
+        <p:nvSpPr>
+          <p:cNvPr id="49" name="5-Point Star 48"/>
+          <p:cNvSpPr/>
+          <p:nvPr/>
+        </p:nvSpPr>
+        <p:spPr>
+          <a:xfrm>
+            <a:off x="5556504" y="4367784"/>
+            <a:ext cx="164592" cy="164592"/>
+          </a:xfrm>
+          <a:prstGeom prst="star5">
+            <a:avLst/>
+          </a:prstGeom>
+          <a:solidFill>
+            <a:srgbClr val="D4A300"/>
+          </a:solidFill>
+          <a:ln>
+            <a:noFill/>
+          </a:ln>
+          <a:effectLst/>
+        </p:spPr>
+        <p:style>
+          <a:lnRef idx="1">
+            <a:schemeClr val="accent1"/>
+          </a:lnRef>
+          <a:fillRef idx="3">
+            <a:schemeClr val="accent1"/>
+          </a:fillRef>
+          <a:effectRef idx="2">
+            <a:schemeClr val="accent1"/>
+          </a:effectRef>
+          <a:fontRef idx="minor">
+            <a:schemeClr val="lt1"/>
+          </a:fontRef>
+        </p:style>
+        <p:txBody>
+          <a:bodyPr rtlCol="0" anchor="ctr"/>
+          <a:lstStyle/>
+          <a:p>
+            <a:pPr algn="ctr"/>
+          </a:p>
+        </p:txBody>
+      </p:sp>
+      <p:sp>
+        <p:nvSpPr>
+          <p:cNvPr id="50" name="TextBox 49"/>
           <p:cNvSpPr txBox="1"/>
           <p:nvPr/>
         </p:nvSpPr>
         <p:spPr>
           <a:xfrm>
-            <a:off x="5550408" y="4386072"/>
-            <a:ext cx="731520" cy="128016"/>
+            <a:off x="5711952" y="4386072"/>
+            <a:ext cx="914400" cy="164592"/>
           </a:xfrm>
           <a:prstGeom prst="rect">
             <a:avLst/>
@@ -13541,581 +14056,7 @@
           <a:p>
             <a:pPr algn="l"/>
             <a:r>
-              <a:rPr sz="600" b="0" i="0">
-                <a:solidFill>
-                  <a:srgbClr val="BBBBBB"/>
-                </a:solidFill>
-                <a:latin typeface="Arial"/>
-              </a:rPr>
-              <a:t>IGHV3-48</a:t>
-            </a:r>
-          </a:p>
-        </p:txBody>
-      </p:sp>
-      <p:sp>
-        <p:nvSpPr>
-          <p:cNvPr id="43" name="Oval 42"/>
-          <p:cNvSpPr/>
-          <p:nvPr/>
-        </p:nvSpPr>
-        <p:spPr>
-          <a:xfrm>
-            <a:off x="5449824" y="4413504"/>
-            <a:ext cx="73152" cy="73152"/>
-          </a:xfrm>
-          <a:prstGeom prst="ellipse">
-            <a:avLst/>
-          </a:prstGeom>
-          <a:solidFill>
-            <a:srgbClr val="222222"/>
-          </a:solidFill>
-          <a:ln w="3810">
-            <a:solidFill>
-              <a:srgbClr val="222222"/>
-            </a:solidFill>
-          </a:ln>
-          <a:effectLst/>
-        </p:spPr>
-        <p:style>
-          <a:lnRef idx="1">
-            <a:schemeClr val="accent1"/>
-          </a:lnRef>
-          <a:fillRef idx="3">
-            <a:schemeClr val="accent1"/>
-          </a:fillRef>
-          <a:effectRef idx="2">
-            <a:schemeClr val="accent1"/>
-          </a:effectRef>
-          <a:fontRef idx="minor">
-            <a:schemeClr val="lt1"/>
-          </a:fontRef>
-        </p:style>
-        <p:txBody>
-          <a:bodyPr rtlCol="0" anchor="ctr"/>
-          <a:lstStyle/>
-          <a:p>
-            <a:pPr algn="ctr"/>
-          </a:p>
-        </p:txBody>
-      </p:sp>
-      <p:sp>
-        <p:nvSpPr>
-          <p:cNvPr id="44" name="TextBox 43"/>
-          <p:cNvSpPr txBox="1"/>
-          <p:nvPr/>
-        </p:nvSpPr>
-        <p:spPr>
-          <a:xfrm>
-            <a:off x="5550408" y="4386072"/>
-            <a:ext cx="731520" cy="128016"/>
-          </a:xfrm>
-          <a:prstGeom prst="rect">
-            <a:avLst/>
-          </a:prstGeom>
-          <a:noFill/>
-          <a:effectLst/>
-        </p:spPr>
-        <p:txBody>
-          <a:bodyPr wrap="square" lIns="0" rIns="0" tIns="0" bIns="0" anchor="ctr">
-            <a:spAutoFit/>
-          </a:bodyPr>
-          <a:lstStyle/>
-          <a:p>
-            <a:pPr algn="l"/>
-            <a:r>
-              <a:rPr sz="600" b="0" i="0">
-                <a:solidFill>
-                  <a:srgbClr val="BBBBBB"/>
-                </a:solidFill>
-                <a:latin typeface="Arial"/>
-              </a:rPr>
-              <a:t>IGHV3-49</a:t>
-            </a:r>
-          </a:p>
-        </p:txBody>
-      </p:sp>
-      <p:sp>
-        <p:nvSpPr>
-          <p:cNvPr id="45" name="Oval 44"/>
-          <p:cNvSpPr/>
-          <p:nvPr/>
-        </p:nvSpPr>
-        <p:spPr>
-          <a:xfrm>
-            <a:off x="5449824" y="4413504"/>
-            <a:ext cx="73152" cy="73152"/>
-          </a:xfrm>
-          <a:prstGeom prst="ellipse">
-            <a:avLst/>
-          </a:prstGeom>
-          <a:solidFill>
-            <a:srgbClr val="222222"/>
-          </a:solidFill>
-          <a:ln w="3810">
-            <a:solidFill>
-              <a:srgbClr val="222222"/>
-            </a:solidFill>
-          </a:ln>
-          <a:effectLst/>
-        </p:spPr>
-        <p:style>
-          <a:lnRef idx="1">
-            <a:schemeClr val="accent1"/>
-          </a:lnRef>
-          <a:fillRef idx="3">
-            <a:schemeClr val="accent1"/>
-          </a:fillRef>
-          <a:effectRef idx="2">
-            <a:schemeClr val="accent1"/>
-          </a:effectRef>
-          <a:fontRef idx="minor">
-            <a:schemeClr val="lt1"/>
-          </a:fontRef>
-        </p:style>
-        <p:txBody>
-          <a:bodyPr rtlCol="0" anchor="ctr"/>
-          <a:lstStyle/>
-          <a:p>
-            <a:pPr algn="ctr"/>
-          </a:p>
-        </p:txBody>
-      </p:sp>
-      <p:sp>
-        <p:nvSpPr>
-          <p:cNvPr id="46" name="TextBox 45"/>
-          <p:cNvSpPr txBox="1"/>
-          <p:nvPr/>
-        </p:nvSpPr>
-        <p:spPr>
-          <a:xfrm>
-            <a:off x="5550408" y="4386072"/>
-            <a:ext cx="731520" cy="128016"/>
-          </a:xfrm>
-          <a:prstGeom prst="rect">
-            <a:avLst/>
-          </a:prstGeom>
-          <a:noFill/>
-          <a:effectLst/>
-        </p:spPr>
-        <p:txBody>
-          <a:bodyPr wrap="square" lIns="0" rIns="0" tIns="0" bIns="0" anchor="ctr">
-            <a:spAutoFit/>
-          </a:bodyPr>
-          <a:lstStyle/>
-          <a:p>
-            <a:pPr algn="l"/>
-            <a:r>
-              <a:rPr sz="600" b="0" i="0">
-                <a:solidFill>
-                  <a:srgbClr val="BBBBBB"/>
-                </a:solidFill>
-                <a:latin typeface="Arial"/>
-              </a:rPr>
-              <a:t>IGHV3-9</a:t>
-            </a:r>
-          </a:p>
-        </p:txBody>
-      </p:sp>
-      <p:sp>
-        <p:nvSpPr>
-          <p:cNvPr id="47" name="Oval 46"/>
-          <p:cNvSpPr/>
-          <p:nvPr/>
-        </p:nvSpPr>
-        <p:spPr>
-          <a:xfrm>
-            <a:off x="5449824" y="4413504"/>
-            <a:ext cx="73152" cy="73152"/>
-          </a:xfrm>
-          <a:prstGeom prst="ellipse">
-            <a:avLst/>
-          </a:prstGeom>
-          <a:solidFill>
-            <a:srgbClr val="222222"/>
-          </a:solidFill>
-          <a:ln w="3810">
-            <a:solidFill>
-              <a:srgbClr val="222222"/>
-            </a:solidFill>
-          </a:ln>
-          <a:effectLst/>
-        </p:spPr>
-        <p:style>
-          <a:lnRef idx="1">
-            <a:schemeClr val="accent1"/>
-          </a:lnRef>
-          <a:fillRef idx="3">
-            <a:schemeClr val="accent1"/>
-          </a:fillRef>
-          <a:effectRef idx="2">
-            <a:schemeClr val="accent1"/>
-          </a:effectRef>
-          <a:fontRef idx="minor">
-            <a:schemeClr val="lt1"/>
-          </a:fontRef>
-        </p:style>
-        <p:txBody>
-          <a:bodyPr rtlCol="0" anchor="ctr"/>
-          <a:lstStyle/>
-          <a:p>
-            <a:pPr algn="ctr"/>
-          </a:p>
-        </p:txBody>
-      </p:sp>
-      <p:sp>
-        <p:nvSpPr>
-          <p:cNvPr id="48" name="TextBox 47"/>
-          <p:cNvSpPr txBox="1"/>
-          <p:nvPr/>
-        </p:nvSpPr>
-        <p:spPr>
-          <a:xfrm>
-            <a:off x="5550408" y="4386072"/>
-            <a:ext cx="731520" cy="128016"/>
-          </a:xfrm>
-          <a:prstGeom prst="rect">
-            <a:avLst/>
-          </a:prstGeom>
-          <a:noFill/>
-          <a:effectLst/>
-        </p:spPr>
-        <p:txBody>
-          <a:bodyPr wrap="square" lIns="0" rIns="0" tIns="0" bIns="0" anchor="ctr">
-            <a:spAutoFit/>
-          </a:bodyPr>
-          <a:lstStyle/>
-          <a:p>
-            <a:pPr algn="l"/>
-            <a:r>
-              <a:rPr sz="600" b="0" i="0">
-                <a:solidFill>
-                  <a:srgbClr val="BBBBBB"/>
-                </a:solidFill>
-                <a:latin typeface="Arial"/>
-              </a:rPr>
-              <a:t>IGHV3-69-1</a:t>
-            </a:r>
-          </a:p>
-        </p:txBody>
-      </p:sp>
-      <p:sp>
-        <p:nvSpPr>
-          <p:cNvPr id="49" name="Oval 48"/>
-          <p:cNvSpPr/>
-          <p:nvPr/>
-        </p:nvSpPr>
-        <p:spPr>
-          <a:xfrm>
-            <a:off x="5449824" y="4413504"/>
-            <a:ext cx="73152" cy="73152"/>
-          </a:xfrm>
-          <a:prstGeom prst="ellipse">
-            <a:avLst/>
-          </a:prstGeom>
-          <a:solidFill>
-            <a:srgbClr val="222222"/>
-          </a:solidFill>
-          <a:ln w="3810">
-            <a:solidFill>
-              <a:srgbClr val="222222"/>
-            </a:solidFill>
-          </a:ln>
-          <a:effectLst/>
-        </p:spPr>
-        <p:style>
-          <a:lnRef idx="1">
-            <a:schemeClr val="accent1"/>
-          </a:lnRef>
-          <a:fillRef idx="3">
-            <a:schemeClr val="accent1"/>
-          </a:fillRef>
-          <a:effectRef idx="2">
-            <a:schemeClr val="accent1"/>
-          </a:effectRef>
-          <a:fontRef idx="minor">
-            <a:schemeClr val="lt1"/>
-          </a:fontRef>
-        </p:style>
-        <p:txBody>
-          <a:bodyPr rtlCol="0" anchor="ctr"/>
-          <a:lstStyle/>
-          <a:p>
-            <a:pPr algn="ctr"/>
-          </a:p>
-        </p:txBody>
-      </p:sp>
-      <p:sp>
-        <p:nvSpPr>
-          <p:cNvPr id="50" name="TextBox 49"/>
-          <p:cNvSpPr txBox="1"/>
-          <p:nvPr/>
-        </p:nvSpPr>
-        <p:spPr>
-          <a:xfrm>
-            <a:off x="5550408" y="4386072"/>
-            <a:ext cx="731520" cy="128016"/>
-          </a:xfrm>
-          <a:prstGeom prst="rect">
-            <a:avLst/>
-          </a:prstGeom>
-          <a:noFill/>
-          <a:effectLst/>
-        </p:spPr>
-        <p:txBody>
-          <a:bodyPr wrap="square" lIns="0" rIns="0" tIns="0" bIns="0" anchor="ctr">
-            <a:spAutoFit/>
-          </a:bodyPr>
-          <a:lstStyle/>
-          <a:p>
-            <a:pPr algn="l"/>
-            <a:r>
-              <a:rPr sz="600" b="0" i="0">
-                <a:solidFill>
-                  <a:srgbClr val="BBBBBB"/>
-                </a:solidFill>
-                <a:latin typeface="Arial"/>
-              </a:rPr>
-              <a:t>IGHV3-53</a:t>
-            </a:r>
-          </a:p>
-        </p:txBody>
-      </p:sp>
-      <p:sp>
-        <p:nvSpPr>
-          <p:cNvPr id="51" name="Oval 50"/>
-          <p:cNvSpPr/>
-          <p:nvPr/>
-        </p:nvSpPr>
-        <p:spPr>
-          <a:xfrm>
-            <a:off x="5449824" y="4413504"/>
-            <a:ext cx="73152" cy="73152"/>
-          </a:xfrm>
-          <a:prstGeom prst="ellipse">
-            <a:avLst/>
-          </a:prstGeom>
-          <a:solidFill>
-            <a:srgbClr val="222222"/>
-          </a:solidFill>
-          <a:ln w="3810">
-            <a:solidFill>
-              <a:srgbClr val="222222"/>
-            </a:solidFill>
-          </a:ln>
-          <a:effectLst/>
-        </p:spPr>
-        <p:style>
-          <a:lnRef idx="1">
-            <a:schemeClr val="accent1"/>
-          </a:lnRef>
-          <a:fillRef idx="3">
-            <a:schemeClr val="accent1"/>
-          </a:fillRef>
-          <a:effectRef idx="2">
-            <a:schemeClr val="accent1"/>
-          </a:effectRef>
-          <a:fontRef idx="minor">
-            <a:schemeClr val="lt1"/>
-          </a:fontRef>
-        </p:style>
-        <p:txBody>
-          <a:bodyPr rtlCol="0" anchor="ctr"/>
-          <a:lstStyle/>
-          <a:p>
-            <a:pPr algn="ctr"/>
-          </a:p>
-        </p:txBody>
-      </p:sp>
-      <p:sp>
-        <p:nvSpPr>
-          <p:cNvPr id="52" name="TextBox 51"/>
-          <p:cNvSpPr txBox="1"/>
-          <p:nvPr/>
-        </p:nvSpPr>
-        <p:spPr>
-          <a:xfrm>
-            <a:off x="5550408" y="4386072"/>
-            <a:ext cx="731520" cy="128016"/>
-          </a:xfrm>
-          <a:prstGeom prst="rect">
-            <a:avLst/>
-          </a:prstGeom>
-          <a:noFill/>
-          <a:effectLst/>
-        </p:spPr>
-        <p:txBody>
-          <a:bodyPr wrap="square" lIns="0" rIns="0" tIns="0" bIns="0" anchor="ctr">
-            <a:spAutoFit/>
-          </a:bodyPr>
-          <a:lstStyle/>
-          <a:p>
-            <a:pPr algn="l"/>
-            <a:r>
-              <a:rPr sz="600" b="0" i="0">
-                <a:solidFill>
-                  <a:srgbClr val="BBBBBB"/>
-                </a:solidFill>
-                <a:latin typeface="Arial"/>
-              </a:rPr>
-              <a:t>IGHV5-51</a:t>
-            </a:r>
-          </a:p>
-        </p:txBody>
-      </p:sp>
-      <p:sp>
-        <p:nvSpPr>
-          <p:cNvPr id="53" name="Oval 52"/>
-          <p:cNvSpPr/>
-          <p:nvPr/>
-        </p:nvSpPr>
-        <p:spPr>
-          <a:xfrm>
-            <a:off x="5449824" y="4413504"/>
-            <a:ext cx="73152" cy="73152"/>
-          </a:xfrm>
-          <a:prstGeom prst="ellipse">
-            <a:avLst/>
-          </a:prstGeom>
-          <a:solidFill>
-            <a:srgbClr val="222222"/>
-          </a:solidFill>
-          <a:ln w="3810">
-            <a:solidFill>
-              <a:srgbClr val="222222"/>
-            </a:solidFill>
-          </a:ln>
-          <a:effectLst/>
-        </p:spPr>
-        <p:style>
-          <a:lnRef idx="1">
-            <a:schemeClr val="accent1"/>
-          </a:lnRef>
-          <a:fillRef idx="3">
-            <a:schemeClr val="accent1"/>
-          </a:fillRef>
-          <a:effectRef idx="2">
-            <a:schemeClr val="accent1"/>
-          </a:effectRef>
-          <a:fontRef idx="minor">
-            <a:schemeClr val="lt1"/>
-          </a:fontRef>
-        </p:style>
-        <p:txBody>
-          <a:bodyPr rtlCol="0" anchor="ctr"/>
-          <a:lstStyle/>
-          <a:p>
-            <a:pPr algn="ctr"/>
-          </a:p>
-        </p:txBody>
-      </p:sp>
-      <p:sp>
-        <p:nvSpPr>
-          <p:cNvPr id="54" name="TextBox 53"/>
-          <p:cNvSpPr txBox="1"/>
-          <p:nvPr/>
-        </p:nvSpPr>
-        <p:spPr>
-          <a:xfrm>
-            <a:off x="5550408" y="4386072"/>
-            <a:ext cx="731520" cy="128016"/>
-          </a:xfrm>
-          <a:prstGeom prst="rect">
-            <a:avLst/>
-          </a:prstGeom>
-          <a:noFill/>
-          <a:effectLst/>
-        </p:spPr>
-        <p:txBody>
-          <a:bodyPr wrap="square" lIns="0" rIns="0" tIns="0" bIns="0" anchor="ctr">
-            <a:spAutoFit/>
-          </a:bodyPr>
-          <a:lstStyle/>
-          <a:p>
-            <a:pPr algn="l"/>
-            <a:r>
-              <a:rPr sz="600" b="0" i="0">
-                <a:solidFill>
-                  <a:srgbClr val="BBBBBB"/>
-                </a:solidFill>
-                <a:latin typeface="Arial"/>
-              </a:rPr>
-              <a:t>IGHV4-59</a:t>
-            </a:r>
-          </a:p>
-        </p:txBody>
-      </p:sp>
-      <p:sp>
-        <p:nvSpPr>
-          <p:cNvPr id="55" name="Oval 54"/>
-          <p:cNvSpPr/>
-          <p:nvPr/>
-        </p:nvSpPr>
-        <p:spPr>
-          <a:xfrm>
-            <a:off x="5431536" y="4395216"/>
-            <a:ext cx="109728" cy="109728"/>
-          </a:xfrm>
-          <a:prstGeom prst="ellipse">
-            <a:avLst/>
-          </a:prstGeom>
-          <a:solidFill>
-            <a:srgbClr val="D4A300"/>
-          </a:solidFill>
-          <a:ln w="3810">
-            <a:solidFill>
-              <a:srgbClr val="222222"/>
-            </a:solidFill>
-          </a:ln>
-          <a:effectLst/>
-        </p:spPr>
-        <p:style>
-          <a:lnRef idx="1">
-            <a:schemeClr val="accent1"/>
-          </a:lnRef>
-          <a:fillRef idx="3">
-            <a:schemeClr val="accent1"/>
-          </a:fillRef>
-          <a:effectRef idx="2">
-            <a:schemeClr val="accent1"/>
-          </a:effectRef>
-          <a:fontRef idx="minor">
-            <a:schemeClr val="lt1"/>
-          </a:fontRef>
-        </p:style>
-        <p:txBody>
-          <a:bodyPr rtlCol="0" anchor="ctr"/>
-          <a:lstStyle/>
-          <a:p>
-            <a:pPr algn="ctr"/>
-          </a:p>
-        </p:txBody>
-      </p:sp>
-      <p:sp>
-        <p:nvSpPr>
-          <p:cNvPr id="56" name="TextBox 55"/>
-          <p:cNvSpPr txBox="1"/>
-          <p:nvPr/>
-        </p:nvSpPr>
-        <p:spPr>
-          <a:xfrm>
-            <a:off x="5550408" y="4386072"/>
-            <a:ext cx="731520" cy="128016"/>
-          </a:xfrm>
-          <a:prstGeom prst="rect">
-            <a:avLst/>
-          </a:prstGeom>
-          <a:noFill/>
-          <a:effectLst/>
-        </p:spPr>
-        <p:txBody>
-          <a:bodyPr wrap="square" lIns="0" rIns="0" tIns="0" bIns="0" anchor="ctr">
-            <a:spAutoFit/>
-          </a:bodyPr>
-          <a:lstStyle/>
-          <a:p>
-            <a:pPr algn="l"/>
-            <a:r>
-              <a:rPr sz="600" b="1" i="0">
+              <a:rPr sz="800" b="1" i="0">
                 <a:solidFill>
                   <a:srgbClr val="D4A300"/>
                 </a:solidFill>
@@ -14128,13 +14069,289 @@
       </p:sp>
       <p:sp>
         <p:nvSpPr>
+          <p:cNvPr id="51" name="Oval 50"/>
+          <p:cNvSpPr/>
+          <p:nvPr/>
+        </p:nvSpPr>
+        <p:spPr>
+          <a:xfrm>
+            <a:off x="5602224" y="4413504"/>
+            <a:ext cx="73152" cy="73152"/>
+          </a:xfrm>
+          <a:prstGeom prst="ellipse">
+            <a:avLst/>
+          </a:prstGeom>
+          <a:solidFill>
+            <a:srgbClr val="222222"/>
+          </a:solidFill>
+          <a:ln w="3810">
+            <a:solidFill>
+              <a:srgbClr val="222222"/>
+            </a:solidFill>
+          </a:ln>
+          <a:effectLst/>
+        </p:spPr>
+        <p:style>
+          <a:lnRef idx="1">
+            <a:schemeClr val="accent1"/>
+          </a:lnRef>
+          <a:fillRef idx="3">
+            <a:schemeClr val="accent1"/>
+          </a:fillRef>
+          <a:effectRef idx="2">
+            <a:schemeClr val="accent1"/>
+          </a:effectRef>
+          <a:fontRef idx="minor">
+            <a:schemeClr val="lt1"/>
+          </a:fontRef>
+        </p:style>
+        <p:txBody>
+          <a:bodyPr rtlCol="0" anchor="ctr"/>
+          <a:lstStyle/>
+          <a:p>
+            <a:pPr algn="ctr"/>
+          </a:p>
+        </p:txBody>
+      </p:sp>
+      <p:sp>
+        <p:nvSpPr>
+          <p:cNvPr id="52" name="Oval 51"/>
+          <p:cNvSpPr/>
+          <p:nvPr/>
+        </p:nvSpPr>
+        <p:spPr>
+          <a:xfrm>
+            <a:off x="3925824" y="6089904"/>
+            <a:ext cx="73152" cy="73152"/>
+          </a:xfrm>
+          <a:prstGeom prst="ellipse">
+            <a:avLst/>
+          </a:prstGeom>
+          <a:solidFill>
+            <a:srgbClr val="222222"/>
+          </a:solidFill>
+          <a:ln w="3810">
+            <a:solidFill>
+              <a:srgbClr val="222222"/>
+            </a:solidFill>
+          </a:ln>
+          <a:effectLst/>
+        </p:spPr>
+        <p:style>
+          <a:lnRef idx="1">
+            <a:schemeClr val="accent1"/>
+          </a:lnRef>
+          <a:fillRef idx="3">
+            <a:schemeClr val="accent1"/>
+          </a:fillRef>
+          <a:effectRef idx="2">
+            <a:schemeClr val="accent1"/>
+          </a:effectRef>
+          <a:fontRef idx="minor">
+            <a:schemeClr val="lt1"/>
+          </a:fontRef>
+        </p:style>
+        <p:txBody>
+          <a:bodyPr rtlCol="0" anchor="ctr"/>
+          <a:lstStyle/>
+          <a:p>
+            <a:pPr algn="ctr"/>
+          </a:p>
+        </p:txBody>
+      </p:sp>
+      <p:sp>
+        <p:nvSpPr>
+          <p:cNvPr id="53" name="Oval 52"/>
+          <p:cNvSpPr/>
+          <p:nvPr/>
+        </p:nvSpPr>
+        <p:spPr>
+          <a:xfrm>
+            <a:off x="3925824" y="6089904"/>
+            <a:ext cx="73152" cy="73152"/>
+          </a:xfrm>
+          <a:prstGeom prst="ellipse">
+            <a:avLst/>
+          </a:prstGeom>
+          <a:solidFill>
+            <a:srgbClr val="222222"/>
+          </a:solidFill>
+          <a:ln w="3810">
+            <a:solidFill>
+              <a:srgbClr val="222222"/>
+            </a:solidFill>
+          </a:ln>
+          <a:effectLst/>
+        </p:spPr>
+        <p:style>
+          <a:lnRef idx="1">
+            <a:schemeClr val="accent1"/>
+          </a:lnRef>
+          <a:fillRef idx="3">
+            <a:schemeClr val="accent1"/>
+          </a:fillRef>
+          <a:effectRef idx="2">
+            <a:schemeClr val="accent1"/>
+          </a:effectRef>
+          <a:fontRef idx="minor">
+            <a:schemeClr val="lt1"/>
+          </a:fontRef>
+        </p:style>
+        <p:txBody>
+          <a:bodyPr rtlCol="0" anchor="ctr"/>
+          <a:lstStyle/>
+          <a:p>
+            <a:pPr algn="ctr"/>
+          </a:p>
+        </p:txBody>
+      </p:sp>
+      <p:sp>
+        <p:nvSpPr>
+          <p:cNvPr id="54" name="Oval 53"/>
+          <p:cNvSpPr/>
+          <p:nvPr/>
+        </p:nvSpPr>
+        <p:spPr>
+          <a:xfrm>
+            <a:off x="3925824" y="6089904"/>
+            <a:ext cx="73152" cy="73152"/>
+          </a:xfrm>
+          <a:prstGeom prst="ellipse">
+            <a:avLst/>
+          </a:prstGeom>
+          <a:solidFill>
+            <a:srgbClr val="222222"/>
+          </a:solidFill>
+          <a:ln w="3810">
+            <a:solidFill>
+              <a:srgbClr val="222222"/>
+            </a:solidFill>
+          </a:ln>
+          <a:effectLst/>
+        </p:spPr>
+        <p:style>
+          <a:lnRef idx="1">
+            <a:schemeClr val="accent1"/>
+          </a:lnRef>
+          <a:fillRef idx="3">
+            <a:schemeClr val="accent1"/>
+          </a:fillRef>
+          <a:effectRef idx="2">
+            <a:schemeClr val="accent1"/>
+          </a:effectRef>
+          <a:fontRef idx="minor">
+            <a:schemeClr val="lt1"/>
+          </a:fontRef>
+        </p:style>
+        <p:txBody>
+          <a:bodyPr rtlCol="0" anchor="ctr"/>
+          <a:lstStyle/>
+          <a:p>
+            <a:pPr algn="ctr"/>
+          </a:p>
+        </p:txBody>
+      </p:sp>
+      <p:sp>
+        <p:nvSpPr>
+          <p:cNvPr id="55" name="Oval 54"/>
+          <p:cNvSpPr/>
+          <p:nvPr/>
+        </p:nvSpPr>
+        <p:spPr>
+          <a:xfrm>
+            <a:off x="3925824" y="6089904"/>
+            <a:ext cx="73152" cy="73152"/>
+          </a:xfrm>
+          <a:prstGeom prst="ellipse">
+            <a:avLst/>
+          </a:prstGeom>
+          <a:solidFill>
+            <a:srgbClr val="222222"/>
+          </a:solidFill>
+          <a:ln w="3810">
+            <a:solidFill>
+              <a:srgbClr val="222222"/>
+            </a:solidFill>
+          </a:ln>
+          <a:effectLst/>
+        </p:spPr>
+        <p:style>
+          <a:lnRef idx="1">
+            <a:schemeClr val="accent1"/>
+          </a:lnRef>
+          <a:fillRef idx="3">
+            <a:schemeClr val="accent1"/>
+          </a:fillRef>
+          <a:effectRef idx="2">
+            <a:schemeClr val="accent1"/>
+          </a:effectRef>
+          <a:fontRef idx="minor">
+            <a:schemeClr val="lt1"/>
+          </a:fontRef>
+        </p:style>
+        <p:txBody>
+          <a:bodyPr rtlCol="0" anchor="ctr"/>
+          <a:lstStyle/>
+          <a:p>
+            <a:pPr algn="ctr"/>
+          </a:p>
+        </p:txBody>
+      </p:sp>
+      <p:sp>
+        <p:nvSpPr>
+          <p:cNvPr id="56" name="Oval 55"/>
+          <p:cNvSpPr/>
+          <p:nvPr/>
+        </p:nvSpPr>
+        <p:spPr>
+          <a:xfrm>
+            <a:off x="3925824" y="6089904"/>
+            <a:ext cx="73152" cy="73152"/>
+          </a:xfrm>
+          <a:prstGeom prst="ellipse">
+            <a:avLst/>
+          </a:prstGeom>
+          <a:solidFill>
+            <a:srgbClr val="222222"/>
+          </a:solidFill>
+          <a:ln w="3810">
+            <a:solidFill>
+              <a:srgbClr val="222222"/>
+            </a:solidFill>
+          </a:ln>
+          <a:effectLst/>
+        </p:spPr>
+        <p:style>
+          <a:lnRef idx="1">
+            <a:schemeClr val="accent1"/>
+          </a:lnRef>
+          <a:fillRef idx="3">
+            <a:schemeClr val="accent1"/>
+          </a:fillRef>
+          <a:effectRef idx="2">
+            <a:schemeClr val="accent1"/>
+          </a:effectRef>
+          <a:fontRef idx="minor">
+            <a:schemeClr val="lt1"/>
+          </a:fontRef>
+        </p:style>
+        <p:txBody>
+          <a:bodyPr rtlCol="0" anchor="ctr"/>
+          <a:lstStyle/>
+          <a:p>
+            <a:pPr algn="ctr"/>
+          </a:p>
+        </p:txBody>
+      </p:sp>
+      <p:sp>
+        <p:nvSpPr>
           <p:cNvPr id="57" name="Oval 56"/>
           <p:cNvSpPr/>
           <p:nvPr/>
         </p:nvSpPr>
         <p:spPr>
           <a:xfrm>
-            <a:off x="5449824" y="4413504"/>
+            <a:off x="3925824" y="6089904"/>
             <a:ext cx="73152" cy="73152"/>
           </a:xfrm>
           <a:prstGeom prst="ellipse">
@@ -14174,14 +14391,748 @@
       </p:sp>
       <p:sp>
         <p:nvSpPr>
-          <p:cNvPr id="58" name="TextBox 57"/>
+          <p:cNvPr id="58" name="Oval 57"/>
+          <p:cNvSpPr/>
+          <p:nvPr/>
+        </p:nvSpPr>
+        <p:spPr>
+          <a:xfrm>
+            <a:off x="5266944" y="4413504"/>
+            <a:ext cx="73152" cy="73152"/>
+          </a:xfrm>
+          <a:prstGeom prst="ellipse">
+            <a:avLst/>
+          </a:prstGeom>
+          <a:solidFill>
+            <a:srgbClr val="222222"/>
+          </a:solidFill>
+          <a:ln w="3810">
+            <a:solidFill>
+              <a:srgbClr val="222222"/>
+            </a:solidFill>
+          </a:ln>
+          <a:effectLst/>
+        </p:spPr>
+        <p:style>
+          <a:lnRef idx="1">
+            <a:schemeClr val="accent1"/>
+          </a:lnRef>
+          <a:fillRef idx="3">
+            <a:schemeClr val="accent1"/>
+          </a:fillRef>
+          <a:effectRef idx="2">
+            <a:schemeClr val="accent1"/>
+          </a:effectRef>
+          <a:fontRef idx="minor">
+            <a:schemeClr val="lt1"/>
+          </a:fontRef>
+        </p:style>
+        <p:txBody>
+          <a:bodyPr rtlCol="0" anchor="ctr"/>
+          <a:lstStyle/>
+          <a:p>
+            <a:pPr algn="ctr"/>
+          </a:p>
+        </p:txBody>
+      </p:sp>
+      <p:sp>
+        <p:nvSpPr>
+          <p:cNvPr id="59" name="Oval 58"/>
+          <p:cNvSpPr/>
+          <p:nvPr/>
+        </p:nvSpPr>
+        <p:spPr>
+          <a:xfrm>
+            <a:off x="5266944" y="4413504"/>
+            <a:ext cx="73152" cy="73152"/>
+          </a:xfrm>
+          <a:prstGeom prst="ellipse">
+            <a:avLst/>
+          </a:prstGeom>
+          <a:solidFill>
+            <a:srgbClr val="222222"/>
+          </a:solidFill>
+          <a:ln w="3810">
+            <a:solidFill>
+              <a:srgbClr val="222222"/>
+            </a:solidFill>
+          </a:ln>
+          <a:effectLst/>
+        </p:spPr>
+        <p:style>
+          <a:lnRef idx="1">
+            <a:schemeClr val="accent1"/>
+          </a:lnRef>
+          <a:fillRef idx="3">
+            <a:schemeClr val="accent1"/>
+          </a:fillRef>
+          <a:effectRef idx="2">
+            <a:schemeClr val="accent1"/>
+          </a:effectRef>
+          <a:fontRef idx="minor">
+            <a:schemeClr val="lt1"/>
+          </a:fontRef>
+        </p:style>
+        <p:txBody>
+          <a:bodyPr rtlCol="0" anchor="ctr"/>
+          <a:lstStyle/>
+          <a:p>
+            <a:pPr algn="ctr"/>
+          </a:p>
+        </p:txBody>
+      </p:sp>
+      <p:sp>
+        <p:nvSpPr>
+          <p:cNvPr id="60" name="Oval 59"/>
+          <p:cNvSpPr/>
+          <p:nvPr/>
+        </p:nvSpPr>
+        <p:spPr>
+          <a:xfrm>
+            <a:off x="3255264" y="6089904"/>
+            <a:ext cx="73152" cy="73152"/>
+          </a:xfrm>
+          <a:prstGeom prst="ellipse">
+            <a:avLst/>
+          </a:prstGeom>
+          <a:solidFill>
+            <a:srgbClr val="222222"/>
+          </a:solidFill>
+          <a:ln w="3810">
+            <a:solidFill>
+              <a:srgbClr val="222222"/>
+            </a:solidFill>
+          </a:ln>
+          <a:effectLst/>
+        </p:spPr>
+        <p:style>
+          <a:lnRef idx="1">
+            <a:schemeClr val="accent1"/>
+          </a:lnRef>
+          <a:fillRef idx="3">
+            <a:schemeClr val="accent1"/>
+          </a:fillRef>
+          <a:effectRef idx="2">
+            <a:schemeClr val="accent1"/>
+          </a:effectRef>
+          <a:fontRef idx="minor">
+            <a:schemeClr val="lt1"/>
+          </a:fontRef>
+        </p:style>
+        <p:txBody>
+          <a:bodyPr rtlCol="0" anchor="ctr"/>
+          <a:lstStyle/>
+          <a:p>
+            <a:pPr algn="ctr"/>
+          </a:p>
+        </p:txBody>
+      </p:sp>
+      <p:sp>
+        <p:nvSpPr>
+          <p:cNvPr id="61" name="Oval 60"/>
+          <p:cNvSpPr/>
+          <p:nvPr/>
+        </p:nvSpPr>
+        <p:spPr>
+          <a:xfrm>
+            <a:off x="3925824" y="5084064"/>
+            <a:ext cx="73152" cy="73152"/>
+          </a:xfrm>
+          <a:prstGeom prst="ellipse">
+            <a:avLst/>
+          </a:prstGeom>
+          <a:solidFill>
+            <a:srgbClr val="222222"/>
+          </a:solidFill>
+          <a:ln w="3810">
+            <a:solidFill>
+              <a:srgbClr val="222222"/>
+            </a:solidFill>
+          </a:ln>
+          <a:effectLst/>
+        </p:spPr>
+        <p:style>
+          <a:lnRef idx="1">
+            <a:schemeClr val="accent1"/>
+          </a:lnRef>
+          <a:fillRef idx="3">
+            <a:schemeClr val="accent1"/>
+          </a:fillRef>
+          <a:effectRef idx="2">
+            <a:schemeClr val="accent1"/>
+          </a:effectRef>
+          <a:fontRef idx="minor">
+            <a:schemeClr val="lt1"/>
+          </a:fontRef>
+        </p:style>
+        <p:txBody>
+          <a:bodyPr rtlCol="0" anchor="ctr"/>
+          <a:lstStyle/>
+          <a:p>
+            <a:pPr algn="ctr"/>
+          </a:p>
+        </p:txBody>
+      </p:sp>
+      <p:sp>
+        <p:nvSpPr>
+          <p:cNvPr id="62" name="Oval 61"/>
+          <p:cNvSpPr/>
+          <p:nvPr/>
+        </p:nvSpPr>
+        <p:spPr>
+          <a:xfrm>
+            <a:off x="3925824" y="4413504"/>
+            <a:ext cx="73152" cy="73152"/>
+          </a:xfrm>
+          <a:prstGeom prst="ellipse">
+            <a:avLst/>
+          </a:prstGeom>
+          <a:solidFill>
+            <a:srgbClr val="222222"/>
+          </a:solidFill>
+          <a:ln w="3810">
+            <a:solidFill>
+              <a:srgbClr val="222222"/>
+            </a:solidFill>
+          </a:ln>
+          <a:effectLst/>
+        </p:spPr>
+        <p:style>
+          <a:lnRef idx="1">
+            <a:schemeClr val="accent1"/>
+          </a:lnRef>
+          <a:fillRef idx="3">
+            <a:schemeClr val="accent1"/>
+          </a:fillRef>
+          <a:effectRef idx="2">
+            <a:schemeClr val="accent1"/>
+          </a:effectRef>
+          <a:fontRef idx="minor">
+            <a:schemeClr val="lt1"/>
+          </a:fontRef>
+        </p:style>
+        <p:txBody>
+          <a:bodyPr rtlCol="0" anchor="ctr"/>
+          <a:lstStyle/>
+          <a:p>
+            <a:pPr algn="ctr"/>
+          </a:p>
+        </p:txBody>
+      </p:sp>
+      <p:sp>
+        <p:nvSpPr>
+          <p:cNvPr id="63" name="Oval 62"/>
+          <p:cNvSpPr/>
+          <p:nvPr/>
+        </p:nvSpPr>
+        <p:spPr>
+          <a:xfrm>
+            <a:off x="3925824" y="4413504"/>
+            <a:ext cx="73152" cy="73152"/>
+          </a:xfrm>
+          <a:prstGeom prst="ellipse">
+            <a:avLst/>
+          </a:prstGeom>
+          <a:solidFill>
+            <a:srgbClr val="222222"/>
+          </a:solidFill>
+          <a:ln w="3810">
+            <a:solidFill>
+              <a:srgbClr val="222222"/>
+            </a:solidFill>
+          </a:ln>
+          <a:effectLst/>
+        </p:spPr>
+        <p:style>
+          <a:lnRef idx="1">
+            <a:schemeClr val="accent1"/>
+          </a:lnRef>
+          <a:fillRef idx="3">
+            <a:schemeClr val="accent1"/>
+          </a:fillRef>
+          <a:effectRef idx="2">
+            <a:schemeClr val="accent1"/>
+          </a:effectRef>
+          <a:fontRef idx="minor">
+            <a:schemeClr val="lt1"/>
+          </a:fontRef>
+        </p:style>
+        <p:txBody>
+          <a:bodyPr rtlCol="0" anchor="ctr"/>
+          <a:lstStyle/>
+          <a:p>
+            <a:pPr algn="ctr"/>
+          </a:p>
+        </p:txBody>
+      </p:sp>
+      <p:sp>
+        <p:nvSpPr>
+          <p:cNvPr id="64" name="Oval 63"/>
+          <p:cNvSpPr/>
+          <p:nvPr/>
+        </p:nvSpPr>
+        <p:spPr>
+          <a:xfrm>
+            <a:off x="3925824" y="4413504"/>
+            <a:ext cx="73152" cy="73152"/>
+          </a:xfrm>
+          <a:prstGeom prst="ellipse">
+            <a:avLst/>
+          </a:prstGeom>
+          <a:solidFill>
+            <a:srgbClr val="222222"/>
+          </a:solidFill>
+          <a:ln w="3810">
+            <a:solidFill>
+              <a:srgbClr val="222222"/>
+            </a:solidFill>
+          </a:ln>
+          <a:effectLst/>
+        </p:spPr>
+        <p:style>
+          <a:lnRef idx="1">
+            <a:schemeClr val="accent1"/>
+          </a:lnRef>
+          <a:fillRef idx="3">
+            <a:schemeClr val="accent1"/>
+          </a:fillRef>
+          <a:effectRef idx="2">
+            <a:schemeClr val="accent1"/>
+          </a:effectRef>
+          <a:fontRef idx="minor">
+            <a:schemeClr val="lt1"/>
+          </a:fontRef>
+        </p:style>
+        <p:txBody>
+          <a:bodyPr rtlCol="0" anchor="ctr"/>
+          <a:lstStyle/>
+          <a:p>
+            <a:pPr algn="ctr"/>
+          </a:p>
+        </p:txBody>
+      </p:sp>
+      <p:sp>
+        <p:nvSpPr>
+          <p:cNvPr id="65" name="Oval 64"/>
+          <p:cNvSpPr/>
+          <p:nvPr/>
+        </p:nvSpPr>
+        <p:spPr>
+          <a:xfrm>
+            <a:off x="3925824" y="4413504"/>
+            <a:ext cx="73152" cy="73152"/>
+          </a:xfrm>
+          <a:prstGeom prst="ellipse">
+            <a:avLst/>
+          </a:prstGeom>
+          <a:solidFill>
+            <a:srgbClr val="222222"/>
+          </a:solidFill>
+          <a:ln w="3810">
+            <a:solidFill>
+              <a:srgbClr val="222222"/>
+            </a:solidFill>
+          </a:ln>
+          <a:effectLst/>
+        </p:spPr>
+        <p:style>
+          <a:lnRef idx="1">
+            <a:schemeClr val="accent1"/>
+          </a:lnRef>
+          <a:fillRef idx="3">
+            <a:schemeClr val="accent1"/>
+          </a:fillRef>
+          <a:effectRef idx="2">
+            <a:schemeClr val="accent1"/>
+          </a:effectRef>
+          <a:fontRef idx="minor">
+            <a:schemeClr val="lt1"/>
+          </a:fontRef>
+        </p:style>
+        <p:txBody>
+          <a:bodyPr rtlCol="0" anchor="ctr"/>
+          <a:lstStyle/>
+          <a:p>
+            <a:pPr algn="ctr"/>
+          </a:p>
+        </p:txBody>
+      </p:sp>
+      <p:sp>
+        <p:nvSpPr>
+          <p:cNvPr id="66" name="Oval 65"/>
+          <p:cNvSpPr/>
+          <p:nvPr/>
+        </p:nvSpPr>
+        <p:spPr>
+          <a:xfrm>
+            <a:off x="3925824" y="4413504"/>
+            <a:ext cx="73152" cy="73152"/>
+          </a:xfrm>
+          <a:prstGeom prst="ellipse">
+            <a:avLst/>
+          </a:prstGeom>
+          <a:solidFill>
+            <a:srgbClr val="222222"/>
+          </a:solidFill>
+          <a:ln w="3810">
+            <a:solidFill>
+              <a:srgbClr val="222222"/>
+            </a:solidFill>
+          </a:ln>
+          <a:effectLst/>
+        </p:spPr>
+        <p:style>
+          <a:lnRef idx="1">
+            <a:schemeClr val="accent1"/>
+          </a:lnRef>
+          <a:fillRef idx="3">
+            <a:schemeClr val="accent1"/>
+          </a:fillRef>
+          <a:effectRef idx="2">
+            <a:schemeClr val="accent1"/>
+          </a:effectRef>
+          <a:fontRef idx="minor">
+            <a:schemeClr val="lt1"/>
+          </a:fontRef>
+        </p:style>
+        <p:txBody>
+          <a:bodyPr rtlCol="0" anchor="ctr"/>
+          <a:lstStyle/>
+          <a:p>
+            <a:pPr algn="ctr"/>
+          </a:p>
+        </p:txBody>
+      </p:sp>
+      <p:sp>
+        <p:nvSpPr>
+          <p:cNvPr id="67" name="Oval 66"/>
+          <p:cNvSpPr/>
+          <p:nvPr/>
+        </p:nvSpPr>
+        <p:spPr>
+          <a:xfrm>
+            <a:off x="5266944" y="3072384"/>
+            <a:ext cx="73152" cy="73152"/>
+          </a:xfrm>
+          <a:prstGeom prst="ellipse">
+            <a:avLst/>
+          </a:prstGeom>
+          <a:solidFill>
+            <a:srgbClr val="222222"/>
+          </a:solidFill>
+          <a:ln w="3810">
+            <a:solidFill>
+              <a:srgbClr val="222222"/>
+            </a:solidFill>
+          </a:ln>
+          <a:effectLst/>
+        </p:spPr>
+        <p:style>
+          <a:lnRef idx="1">
+            <a:schemeClr val="accent1"/>
+          </a:lnRef>
+          <a:fillRef idx="3">
+            <a:schemeClr val="accent1"/>
+          </a:fillRef>
+          <a:effectRef idx="2">
+            <a:schemeClr val="accent1"/>
+          </a:effectRef>
+          <a:fontRef idx="minor">
+            <a:schemeClr val="lt1"/>
+          </a:fontRef>
+        </p:style>
+        <p:txBody>
+          <a:bodyPr rtlCol="0" anchor="ctr"/>
+          <a:lstStyle/>
+          <a:p>
+            <a:pPr algn="ctr"/>
+          </a:p>
+        </p:txBody>
+      </p:sp>
+      <p:sp>
+        <p:nvSpPr>
+          <p:cNvPr id="68" name="Oval 67"/>
+          <p:cNvSpPr/>
+          <p:nvPr/>
+        </p:nvSpPr>
+        <p:spPr>
+          <a:xfrm>
+            <a:off x="3925824" y="4413504"/>
+            <a:ext cx="73152" cy="73152"/>
+          </a:xfrm>
+          <a:prstGeom prst="ellipse">
+            <a:avLst/>
+          </a:prstGeom>
+          <a:solidFill>
+            <a:srgbClr val="222222"/>
+          </a:solidFill>
+          <a:ln w="3810">
+            <a:solidFill>
+              <a:srgbClr val="222222"/>
+            </a:solidFill>
+          </a:ln>
+          <a:effectLst/>
+        </p:spPr>
+        <p:style>
+          <a:lnRef idx="1">
+            <a:schemeClr val="accent1"/>
+          </a:lnRef>
+          <a:fillRef idx="3">
+            <a:schemeClr val="accent1"/>
+          </a:fillRef>
+          <a:effectRef idx="2">
+            <a:schemeClr val="accent1"/>
+          </a:effectRef>
+          <a:fontRef idx="minor">
+            <a:schemeClr val="lt1"/>
+          </a:fontRef>
+        </p:style>
+        <p:txBody>
+          <a:bodyPr rtlCol="0" anchor="ctr"/>
+          <a:lstStyle/>
+          <a:p>
+            <a:pPr algn="ctr"/>
+          </a:p>
+        </p:txBody>
+      </p:sp>
+      <p:sp>
+        <p:nvSpPr>
+          <p:cNvPr id="69" name="Oval 68"/>
+          <p:cNvSpPr/>
+          <p:nvPr/>
+        </p:nvSpPr>
+        <p:spPr>
+          <a:xfrm>
+            <a:off x="3925824" y="4413504"/>
+            <a:ext cx="73152" cy="73152"/>
+          </a:xfrm>
+          <a:prstGeom prst="ellipse">
+            <a:avLst/>
+          </a:prstGeom>
+          <a:solidFill>
+            <a:srgbClr val="222222"/>
+          </a:solidFill>
+          <a:ln w="3810">
+            <a:solidFill>
+              <a:srgbClr val="222222"/>
+            </a:solidFill>
+          </a:ln>
+          <a:effectLst/>
+        </p:spPr>
+        <p:style>
+          <a:lnRef idx="1">
+            <a:schemeClr val="accent1"/>
+          </a:lnRef>
+          <a:fillRef idx="3">
+            <a:schemeClr val="accent1"/>
+          </a:fillRef>
+          <a:effectRef idx="2">
+            <a:schemeClr val="accent1"/>
+          </a:effectRef>
+          <a:fontRef idx="minor">
+            <a:schemeClr val="lt1"/>
+          </a:fontRef>
+        </p:style>
+        <p:txBody>
+          <a:bodyPr rtlCol="0" anchor="ctr"/>
+          <a:lstStyle/>
+          <a:p>
+            <a:pPr algn="ctr"/>
+          </a:p>
+        </p:txBody>
+      </p:sp>
+      <p:sp>
+        <p:nvSpPr>
+          <p:cNvPr id="70" name="Oval 69"/>
+          <p:cNvSpPr/>
+          <p:nvPr/>
+        </p:nvSpPr>
+        <p:spPr>
+          <a:xfrm>
+            <a:off x="5602224" y="2737104"/>
+            <a:ext cx="73152" cy="73152"/>
+          </a:xfrm>
+          <a:prstGeom prst="ellipse">
+            <a:avLst/>
+          </a:prstGeom>
+          <a:solidFill>
+            <a:srgbClr val="222222"/>
+          </a:solidFill>
+          <a:ln w="3810">
+            <a:solidFill>
+              <a:srgbClr val="222222"/>
+            </a:solidFill>
+          </a:ln>
+          <a:effectLst/>
+        </p:spPr>
+        <p:style>
+          <a:lnRef idx="1">
+            <a:schemeClr val="accent1"/>
+          </a:lnRef>
+          <a:fillRef idx="3">
+            <a:schemeClr val="accent1"/>
+          </a:fillRef>
+          <a:effectRef idx="2">
+            <a:schemeClr val="accent1"/>
+          </a:effectRef>
+          <a:fontRef idx="minor">
+            <a:schemeClr val="lt1"/>
+          </a:fontRef>
+        </p:style>
+        <p:txBody>
+          <a:bodyPr rtlCol="0" anchor="ctr"/>
+          <a:lstStyle/>
+          <a:p>
+            <a:pPr algn="ctr"/>
+          </a:p>
+        </p:txBody>
+      </p:sp>
+      <p:sp>
+        <p:nvSpPr>
+          <p:cNvPr id="71" name="Oval 70"/>
+          <p:cNvSpPr/>
+          <p:nvPr/>
+        </p:nvSpPr>
+        <p:spPr>
+          <a:xfrm>
+            <a:off x="3925824" y="4413504"/>
+            <a:ext cx="73152" cy="73152"/>
+          </a:xfrm>
+          <a:prstGeom prst="ellipse">
+            <a:avLst/>
+          </a:prstGeom>
+          <a:solidFill>
+            <a:srgbClr val="222222"/>
+          </a:solidFill>
+          <a:ln w="3810">
+            <a:solidFill>
+              <a:srgbClr val="222222"/>
+            </a:solidFill>
+          </a:ln>
+          <a:effectLst/>
+        </p:spPr>
+        <p:style>
+          <a:lnRef idx="1">
+            <a:schemeClr val="accent1"/>
+          </a:lnRef>
+          <a:fillRef idx="3">
+            <a:schemeClr val="accent1"/>
+          </a:fillRef>
+          <a:effectRef idx="2">
+            <a:schemeClr val="accent1"/>
+          </a:effectRef>
+          <a:fontRef idx="minor">
+            <a:schemeClr val="lt1"/>
+          </a:fontRef>
+        </p:style>
+        <p:txBody>
+          <a:bodyPr rtlCol="0" anchor="ctr"/>
+          <a:lstStyle/>
+          <a:p>
+            <a:pPr algn="ctr"/>
+          </a:p>
+        </p:txBody>
+      </p:sp>
+      <p:sp>
+        <p:nvSpPr>
+          <p:cNvPr id="72" name="Oval 71"/>
+          <p:cNvSpPr/>
+          <p:nvPr/>
+        </p:nvSpPr>
+        <p:spPr>
+          <a:xfrm>
+            <a:off x="3255264" y="5084064"/>
+            <a:ext cx="73152" cy="73152"/>
+          </a:xfrm>
+          <a:prstGeom prst="ellipse">
+            <a:avLst/>
+          </a:prstGeom>
+          <a:solidFill>
+            <a:srgbClr val="222222"/>
+          </a:solidFill>
+          <a:ln w="3810">
+            <a:solidFill>
+              <a:srgbClr val="222222"/>
+            </a:solidFill>
+          </a:ln>
+          <a:effectLst/>
+        </p:spPr>
+        <p:style>
+          <a:lnRef idx="1">
+            <a:schemeClr val="accent1"/>
+          </a:lnRef>
+          <a:fillRef idx="3">
+            <a:schemeClr val="accent1"/>
+          </a:fillRef>
+          <a:effectRef idx="2">
+            <a:schemeClr val="accent1"/>
+          </a:effectRef>
+          <a:fontRef idx="minor">
+            <a:schemeClr val="lt1"/>
+          </a:fontRef>
+        </p:style>
+        <p:txBody>
+          <a:bodyPr rtlCol="0" anchor="ctr"/>
+          <a:lstStyle/>
+          <a:p>
+            <a:pPr algn="ctr"/>
+          </a:p>
+        </p:txBody>
+      </p:sp>
+      <p:sp>
+        <p:nvSpPr>
+          <p:cNvPr id="73" name="5-Point Star 72"/>
+          <p:cNvSpPr/>
+          <p:nvPr/>
+        </p:nvSpPr>
+        <p:spPr>
+          <a:xfrm>
+            <a:off x="3880104" y="4367784"/>
+            <a:ext cx="164592" cy="164592"/>
+          </a:xfrm>
+          <a:prstGeom prst="star5">
+            <a:avLst/>
+          </a:prstGeom>
+          <a:solidFill>
+            <a:srgbClr val="D4A300"/>
+          </a:solidFill>
+          <a:ln>
+            <a:noFill/>
+          </a:ln>
+          <a:effectLst/>
+        </p:spPr>
+        <p:style>
+          <a:lnRef idx="1">
+            <a:schemeClr val="accent1"/>
+          </a:lnRef>
+          <a:fillRef idx="3">
+            <a:schemeClr val="accent1"/>
+          </a:fillRef>
+          <a:effectRef idx="2">
+            <a:schemeClr val="accent1"/>
+          </a:effectRef>
+          <a:fontRef idx="minor">
+            <a:schemeClr val="lt1"/>
+          </a:fontRef>
+        </p:style>
+        <p:txBody>
+          <a:bodyPr rtlCol="0" anchor="ctr"/>
+          <a:lstStyle/>
+          <a:p>
+            <a:pPr algn="ctr"/>
+          </a:p>
+        </p:txBody>
+      </p:sp>
+      <p:sp>
+        <p:nvSpPr>
+          <p:cNvPr id="74" name="TextBox 73"/>
           <p:cNvSpPr txBox="1"/>
           <p:nvPr/>
         </p:nvSpPr>
         <p:spPr>
           <a:xfrm>
-            <a:off x="5550408" y="4386072"/>
-            <a:ext cx="731520" cy="128016"/>
+            <a:off x="4035552" y="4386072"/>
+            <a:ext cx="914400" cy="164592"/>
           </a:xfrm>
           <a:prstGeom prst="rect">
             <a:avLst/>
@@ -14197,1811 +15148,7 @@
           <a:p>
             <a:pPr algn="l"/>
             <a:r>
-              <a:rPr sz="600" b="0" i="0">
-                <a:solidFill>
-                  <a:srgbClr val="BBBBBB"/>
-                </a:solidFill>
-                <a:latin typeface="Arial"/>
-              </a:rPr>
-              <a:t>IGHV3-13</a:t>
-            </a:r>
-          </a:p>
-        </p:txBody>
-      </p:sp>
-      <p:sp>
-        <p:nvSpPr>
-          <p:cNvPr id="59" name="Oval 58"/>
-          <p:cNvSpPr/>
-          <p:nvPr/>
-        </p:nvSpPr>
-        <p:spPr>
-          <a:xfrm>
-            <a:off x="3621024" y="6089904"/>
-            <a:ext cx="73152" cy="73152"/>
-          </a:xfrm>
-          <a:prstGeom prst="ellipse">
-            <a:avLst/>
-          </a:prstGeom>
-          <a:solidFill>
-            <a:srgbClr val="222222"/>
-          </a:solidFill>
-          <a:ln w="3810">
-            <a:solidFill>
-              <a:srgbClr val="222222"/>
-            </a:solidFill>
-          </a:ln>
-          <a:effectLst/>
-        </p:spPr>
-        <p:style>
-          <a:lnRef idx="1">
-            <a:schemeClr val="accent1"/>
-          </a:lnRef>
-          <a:fillRef idx="3">
-            <a:schemeClr val="accent1"/>
-          </a:fillRef>
-          <a:effectRef idx="2">
-            <a:schemeClr val="accent1"/>
-          </a:effectRef>
-          <a:fontRef idx="minor">
-            <a:schemeClr val="lt1"/>
-          </a:fontRef>
-        </p:style>
-        <p:txBody>
-          <a:bodyPr rtlCol="0" anchor="ctr"/>
-          <a:lstStyle/>
-          <a:p>
-            <a:pPr algn="ctr"/>
-          </a:p>
-        </p:txBody>
-      </p:sp>
-      <p:sp>
-        <p:nvSpPr>
-          <p:cNvPr id="60" name="TextBox 59"/>
-          <p:cNvSpPr txBox="1"/>
-          <p:nvPr/>
-        </p:nvSpPr>
-        <p:spPr>
-          <a:xfrm>
-            <a:off x="3721608" y="6062472"/>
-            <a:ext cx="731520" cy="128016"/>
-          </a:xfrm>
-          <a:prstGeom prst="rect">
-            <a:avLst/>
-          </a:prstGeom>
-          <a:noFill/>
-          <a:effectLst/>
-        </p:spPr>
-        <p:txBody>
-          <a:bodyPr wrap="square" lIns="0" rIns="0" tIns="0" bIns="0" anchor="ctr">
-            <a:spAutoFit/>
-          </a:bodyPr>
-          <a:lstStyle/>
-          <a:p>
-            <a:pPr algn="l"/>
-            <a:r>
-              <a:rPr sz="600" b="0" i="0">
-                <a:solidFill>
-                  <a:srgbClr val="BBBBBB"/>
-                </a:solidFill>
-                <a:latin typeface="Arial"/>
-              </a:rPr>
-              <a:t>IGHV3-15</a:t>
-            </a:r>
-          </a:p>
-        </p:txBody>
-      </p:sp>
-      <p:sp>
-        <p:nvSpPr>
-          <p:cNvPr id="61" name="Oval 60"/>
-          <p:cNvSpPr/>
-          <p:nvPr/>
-        </p:nvSpPr>
-        <p:spPr>
-          <a:xfrm>
-            <a:off x="3621024" y="6089904"/>
-            <a:ext cx="73152" cy="73152"/>
-          </a:xfrm>
-          <a:prstGeom prst="ellipse">
-            <a:avLst/>
-          </a:prstGeom>
-          <a:solidFill>
-            <a:srgbClr val="222222"/>
-          </a:solidFill>
-          <a:ln w="3810">
-            <a:solidFill>
-              <a:srgbClr val="222222"/>
-            </a:solidFill>
-          </a:ln>
-          <a:effectLst/>
-        </p:spPr>
-        <p:style>
-          <a:lnRef idx="1">
-            <a:schemeClr val="accent1"/>
-          </a:lnRef>
-          <a:fillRef idx="3">
-            <a:schemeClr val="accent1"/>
-          </a:fillRef>
-          <a:effectRef idx="2">
-            <a:schemeClr val="accent1"/>
-          </a:effectRef>
-          <a:fontRef idx="minor">
-            <a:schemeClr val="lt1"/>
-          </a:fontRef>
-        </p:style>
-        <p:txBody>
-          <a:bodyPr rtlCol="0" anchor="ctr"/>
-          <a:lstStyle/>
-          <a:p>
-            <a:pPr algn="ctr"/>
-          </a:p>
-        </p:txBody>
-      </p:sp>
-      <p:sp>
-        <p:nvSpPr>
-          <p:cNvPr id="62" name="TextBox 61"/>
-          <p:cNvSpPr txBox="1"/>
-          <p:nvPr/>
-        </p:nvSpPr>
-        <p:spPr>
-          <a:xfrm>
-            <a:off x="3721608" y="6062472"/>
-            <a:ext cx="731520" cy="128016"/>
-          </a:xfrm>
-          <a:prstGeom prst="rect">
-            <a:avLst/>
-          </a:prstGeom>
-          <a:noFill/>
-          <a:effectLst/>
-        </p:spPr>
-        <p:txBody>
-          <a:bodyPr wrap="square" lIns="0" rIns="0" tIns="0" bIns="0" anchor="ctr">
-            <a:spAutoFit/>
-          </a:bodyPr>
-          <a:lstStyle/>
-          <a:p>
-            <a:pPr algn="l"/>
-            <a:r>
-              <a:rPr sz="600" b="0" i="0">
-                <a:solidFill>
-                  <a:srgbClr val="BBBBBB"/>
-                </a:solidFill>
-                <a:latin typeface="Arial"/>
-              </a:rPr>
-              <a:t>IGHV1-3</a:t>
-            </a:r>
-          </a:p>
-        </p:txBody>
-      </p:sp>
-      <p:sp>
-        <p:nvSpPr>
-          <p:cNvPr id="63" name="Oval 62"/>
-          <p:cNvSpPr/>
-          <p:nvPr/>
-        </p:nvSpPr>
-        <p:spPr>
-          <a:xfrm>
-            <a:off x="3621024" y="6089904"/>
-            <a:ext cx="73152" cy="73152"/>
-          </a:xfrm>
-          <a:prstGeom prst="ellipse">
-            <a:avLst/>
-          </a:prstGeom>
-          <a:solidFill>
-            <a:srgbClr val="222222"/>
-          </a:solidFill>
-          <a:ln w="3810">
-            <a:solidFill>
-              <a:srgbClr val="222222"/>
-            </a:solidFill>
-          </a:ln>
-          <a:effectLst/>
-        </p:spPr>
-        <p:style>
-          <a:lnRef idx="1">
-            <a:schemeClr val="accent1"/>
-          </a:lnRef>
-          <a:fillRef idx="3">
-            <a:schemeClr val="accent1"/>
-          </a:fillRef>
-          <a:effectRef idx="2">
-            <a:schemeClr val="accent1"/>
-          </a:effectRef>
-          <a:fontRef idx="minor">
-            <a:schemeClr val="lt1"/>
-          </a:fontRef>
-        </p:style>
-        <p:txBody>
-          <a:bodyPr rtlCol="0" anchor="ctr"/>
-          <a:lstStyle/>
-          <a:p>
-            <a:pPr algn="ctr"/>
-          </a:p>
-        </p:txBody>
-      </p:sp>
-      <p:sp>
-        <p:nvSpPr>
-          <p:cNvPr id="64" name="TextBox 63"/>
-          <p:cNvSpPr txBox="1"/>
-          <p:nvPr/>
-        </p:nvSpPr>
-        <p:spPr>
-          <a:xfrm>
-            <a:off x="3721608" y="6062472"/>
-            <a:ext cx="731520" cy="128016"/>
-          </a:xfrm>
-          <a:prstGeom prst="rect">
-            <a:avLst/>
-          </a:prstGeom>
-          <a:noFill/>
-          <a:effectLst/>
-        </p:spPr>
-        <p:txBody>
-          <a:bodyPr wrap="square" lIns="0" rIns="0" tIns="0" bIns="0" anchor="ctr">
-            <a:spAutoFit/>
-          </a:bodyPr>
-          <a:lstStyle/>
-          <a:p>
-            <a:pPr algn="l"/>
-            <a:r>
-              <a:rPr sz="600" b="0" i="0">
-                <a:solidFill>
-                  <a:srgbClr val="BBBBBB"/>
-                </a:solidFill>
-                <a:latin typeface="Arial"/>
-              </a:rPr>
-              <a:t>IGHV3-62</a:t>
-            </a:r>
-          </a:p>
-        </p:txBody>
-      </p:sp>
-      <p:sp>
-        <p:nvSpPr>
-          <p:cNvPr id="65" name="Oval 64"/>
-          <p:cNvSpPr/>
-          <p:nvPr/>
-        </p:nvSpPr>
-        <p:spPr>
-          <a:xfrm>
-            <a:off x="3621024" y="6089904"/>
-            <a:ext cx="73152" cy="73152"/>
-          </a:xfrm>
-          <a:prstGeom prst="ellipse">
-            <a:avLst/>
-          </a:prstGeom>
-          <a:solidFill>
-            <a:srgbClr val="222222"/>
-          </a:solidFill>
-          <a:ln w="3810">
-            <a:solidFill>
-              <a:srgbClr val="222222"/>
-            </a:solidFill>
-          </a:ln>
-          <a:effectLst/>
-        </p:spPr>
-        <p:style>
-          <a:lnRef idx="1">
-            <a:schemeClr val="accent1"/>
-          </a:lnRef>
-          <a:fillRef idx="3">
-            <a:schemeClr val="accent1"/>
-          </a:fillRef>
-          <a:effectRef idx="2">
-            <a:schemeClr val="accent1"/>
-          </a:effectRef>
-          <a:fontRef idx="minor">
-            <a:schemeClr val="lt1"/>
-          </a:fontRef>
-        </p:style>
-        <p:txBody>
-          <a:bodyPr rtlCol="0" anchor="ctr"/>
-          <a:lstStyle/>
-          <a:p>
-            <a:pPr algn="ctr"/>
-          </a:p>
-        </p:txBody>
-      </p:sp>
-      <p:sp>
-        <p:nvSpPr>
-          <p:cNvPr id="66" name="TextBox 65"/>
-          <p:cNvSpPr txBox="1"/>
-          <p:nvPr/>
-        </p:nvSpPr>
-        <p:spPr>
-          <a:xfrm>
-            <a:off x="3721608" y="6062472"/>
-            <a:ext cx="731520" cy="128016"/>
-          </a:xfrm>
-          <a:prstGeom prst="rect">
-            <a:avLst/>
-          </a:prstGeom>
-          <a:noFill/>
-          <a:effectLst/>
-        </p:spPr>
-        <p:txBody>
-          <a:bodyPr wrap="square" lIns="0" rIns="0" tIns="0" bIns="0" anchor="ctr">
-            <a:spAutoFit/>
-          </a:bodyPr>
-          <a:lstStyle/>
-          <a:p>
-            <a:pPr algn="l"/>
-            <a:r>
-              <a:rPr sz="600" b="0" i="0">
-                <a:solidFill>
-                  <a:srgbClr val="BBBBBB"/>
-                </a:solidFill>
-                <a:latin typeface="Arial"/>
-              </a:rPr>
-              <a:t>IGHV4-61</a:t>
-            </a:r>
-          </a:p>
-        </p:txBody>
-      </p:sp>
-      <p:sp>
-        <p:nvSpPr>
-          <p:cNvPr id="67" name="Oval 66"/>
-          <p:cNvSpPr/>
-          <p:nvPr/>
-        </p:nvSpPr>
-        <p:spPr>
-          <a:xfrm>
-            <a:off x="3621024" y="6089904"/>
-            <a:ext cx="73152" cy="73152"/>
-          </a:xfrm>
-          <a:prstGeom prst="ellipse">
-            <a:avLst/>
-          </a:prstGeom>
-          <a:solidFill>
-            <a:srgbClr val="222222"/>
-          </a:solidFill>
-          <a:ln w="3810">
-            <a:solidFill>
-              <a:srgbClr val="222222"/>
-            </a:solidFill>
-          </a:ln>
-          <a:effectLst/>
-        </p:spPr>
-        <p:style>
-          <a:lnRef idx="1">
-            <a:schemeClr val="accent1"/>
-          </a:lnRef>
-          <a:fillRef idx="3">
-            <a:schemeClr val="accent1"/>
-          </a:fillRef>
-          <a:effectRef idx="2">
-            <a:schemeClr val="accent1"/>
-          </a:effectRef>
-          <a:fontRef idx="minor">
-            <a:schemeClr val="lt1"/>
-          </a:fontRef>
-        </p:style>
-        <p:txBody>
-          <a:bodyPr rtlCol="0" anchor="ctr"/>
-          <a:lstStyle/>
-          <a:p>
-            <a:pPr algn="ctr"/>
-          </a:p>
-        </p:txBody>
-      </p:sp>
-      <p:sp>
-        <p:nvSpPr>
-          <p:cNvPr id="68" name="TextBox 67"/>
-          <p:cNvSpPr txBox="1"/>
-          <p:nvPr/>
-        </p:nvSpPr>
-        <p:spPr>
-          <a:xfrm>
-            <a:off x="3721608" y="6062472"/>
-            <a:ext cx="731520" cy="128016"/>
-          </a:xfrm>
-          <a:prstGeom prst="rect">
-            <a:avLst/>
-          </a:prstGeom>
-          <a:noFill/>
-          <a:effectLst/>
-        </p:spPr>
-        <p:txBody>
-          <a:bodyPr wrap="square" lIns="0" rIns="0" tIns="0" bIns="0" anchor="ctr">
-            <a:spAutoFit/>
-          </a:bodyPr>
-          <a:lstStyle/>
-          <a:p>
-            <a:pPr algn="l"/>
-            <a:r>
-              <a:rPr sz="600" b="0" i="0">
-                <a:solidFill>
-                  <a:srgbClr val="BBBBBB"/>
-                </a:solidFill>
-                <a:latin typeface="Arial"/>
-              </a:rPr>
-              <a:t>IGHV3-20</a:t>
-            </a:r>
-          </a:p>
-        </p:txBody>
-      </p:sp>
-      <p:sp>
-        <p:nvSpPr>
-          <p:cNvPr id="69" name="Oval 68"/>
-          <p:cNvSpPr/>
-          <p:nvPr/>
-        </p:nvSpPr>
-        <p:spPr>
-          <a:xfrm>
-            <a:off x="3621024" y="6089904"/>
-            <a:ext cx="73152" cy="73152"/>
-          </a:xfrm>
-          <a:prstGeom prst="ellipse">
-            <a:avLst/>
-          </a:prstGeom>
-          <a:solidFill>
-            <a:srgbClr val="222222"/>
-          </a:solidFill>
-          <a:ln w="3810">
-            <a:solidFill>
-              <a:srgbClr val="222222"/>
-            </a:solidFill>
-          </a:ln>
-          <a:effectLst/>
-        </p:spPr>
-        <p:style>
-          <a:lnRef idx="1">
-            <a:schemeClr val="accent1"/>
-          </a:lnRef>
-          <a:fillRef idx="3">
-            <a:schemeClr val="accent1"/>
-          </a:fillRef>
-          <a:effectRef idx="2">
-            <a:schemeClr val="accent1"/>
-          </a:effectRef>
-          <a:fontRef idx="minor">
-            <a:schemeClr val="lt1"/>
-          </a:fontRef>
-        </p:style>
-        <p:txBody>
-          <a:bodyPr rtlCol="0" anchor="ctr"/>
-          <a:lstStyle/>
-          <a:p>
-            <a:pPr algn="ctr"/>
-          </a:p>
-        </p:txBody>
-      </p:sp>
-      <p:sp>
-        <p:nvSpPr>
-          <p:cNvPr id="70" name="TextBox 69"/>
-          <p:cNvSpPr txBox="1"/>
-          <p:nvPr/>
-        </p:nvSpPr>
-        <p:spPr>
-          <a:xfrm>
-            <a:off x="3721608" y="6062472"/>
-            <a:ext cx="731520" cy="128016"/>
-          </a:xfrm>
-          <a:prstGeom prst="rect">
-            <a:avLst/>
-          </a:prstGeom>
-          <a:noFill/>
-          <a:effectLst/>
-        </p:spPr>
-        <p:txBody>
-          <a:bodyPr wrap="square" lIns="0" rIns="0" tIns="0" bIns="0" anchor="ctr">
-            <a:spAutoFit/>
-          </a:bodyPr>
-          <a:lstStyle/>
-          <a:p>
-            <a:pPr algn="l"/>
-            <a:r>
-              <a:rPr sz="600" b="0" i="0">
-                <a:solidFill>
-                  <a:srgbClr val="BBBBBB"/>
-                </a:solidFill>
-                <a:latin typeface="Arial"/>
-              </a:rPr>
-              <a:t>IGHV1-24</a:t>
-            </a:r>
-          </a:p>
-        </p:txBody>
-      </p:sp>
-      <p:sp>
-        <p:nvSpPr>
-          <p:cNvPr id="71" name="Oval 70"/>
-          <p:cNvSpPr/>
-          <p:nvPr/>
-        </p:nvSpPr>
-        <p:spPr>
-          <a:xfrm>
-            <a:off x="5084064" y="4413504"/>
-            <a:ext cx="73152" cy="73152"/>
-          </a:xfrm>
-          <a:prstGeom prst="ellipse">
-            <a:avLst/>
-          </a:prstGeom>
-          <a:solidFill>
-            <a:srgbClr val="222222"/>
-          </a:solidFill>
-          <a:ln w="3810">
-            <a:solidFill>
-              <a:srgbClr val="222222"/>
-            </a:solidFill>
-          </a:ln>
-          <a:effectLst/>
-        </p:spPr>
-        <p:style>
-          <a:lnRef idx="1">
-            <a:schemeClr val="accent1"/>
-          </a:lnRef>
-          <a:fillRef idx="3">
-            <a:schemeClr val="accent1"/>
-          </a:fillRef>
-          <a:effectRef idx="2">
-            <a:schemeClr val="accent1"/>
-          </a:effectRef>
-          <a:fontRef idx="minor">
-            <a:schemeClr val="lt1"/>
-          </a:fontRef>
-        </p:style>
-        <p:txBody>
-          <a:bodyPr rtlCol="0" anchor="ctr"/>
-          <a:lstStyle/>
-          <a:p>
-            <a:pPr algn="ctr"/>
-          </a:p>
-        </p:txBody>
-      </p:sp>
-      <p:sp>
-        <p:nvSpPr>
-          <p:cNvPr id="72" name="TextBox 71"/>
-          <p:cNvSpPr txBox="1"/>
-          <p:nvPr/>
-        </p:nvSpPr>
-        <p:spPr>
-          <a:xfrm>
-            <a:off x="5184648" y="4386072"/>
-            <a:ext cx="731520" cy="128016"/>
-          </a:xfrm>
-          <a:prstGeom prst="rect">
-            <a:avLst/>
-          </a:prstGeom>
-          <a:noFill/>
-          <a:effectLst/>
-        </p:spPr>
-        <p:txBody>
-          <a:bodyPr wrap="square" lIns="0" rIns="0" tIns="0" bIns="0" anchor="ctr">
-            <a:spAutoFit/>
-          </a:bodyPr>
-          <a:lstStyle/>
-          <a:p>
-            <a:pPr algn="l"/>
-            <a:r>
-              <a:rPr sz="600" b="0" i="0">
-                <a:solidFill>
-                  <a:srgbClr val="BBBBBB"/>
-                </a:solidFill>
-                <a:latin typeface="Arial"/>
-              </a:rPr>
-              <a:t>IGHV1-46</a:t>
-            </a:r>
-          </a:p>
-        </p:txBody>
-      </p:sp>
-      <p:sp>
-        <p:nvSpPr>
-          <p:cNvPr id="73" name="Oval 72"/>
-          <p:cNvSpPr/>
-          <p:nvPr/>
-        </p:nvSpPr>
-        <p:spPr>
-          <a:xfrm>
-            <a:off x="5084064" y="4413504"/>
-            <a:ext cx="73152" cy="73152"/>
-          </a:xfrm>
-          <a:prstGeom prst="ellipse">
-            <a:avLst/>
-          </a:prstGeom>
-          <a:solidFill>
-            <a:srgbClr val="222222"/>
-          </a:solidFill>
-          <a:ln w="3810">
-            <a:solidFill>
-              <a:srgbClr val="222222"/>
-            </a:solidFill>
-          </a:ln>
-          <a:effectLst/>
-        </p:spPr>
-        <p:style>
-          <a:lnRef idx="1">
-            <a:schemeClr val="accent1"/>
-          </a:lnRef>
-          <a:fillRef idx="3">
-            <a:schemeClr val="accent1"/>
-          </a:fillRef>
-          <a:effectRef idx="2">
-            <a:schemeClr val="accent1"/>
-          </a:effectRef>
-          <a:fontRef idx="minor">
-            <a:schemeClr val="lt1"/>
-          </a:fontRef>
-        </p:style>
-        <p:txBody>
-          <a:bodyPr rtlCol="0" anchor="ctr"/>
-          <a:lstStyle/>
-          <a:p>
-            <a:pPr algn="ctr"/>
-          </a:p>
-        </p:txBody>
-      </p:sp>
-      <p:sp>
-        <p:nvSpPr>
-          <p:cNvPr id="74" name="TextBox 73"/>
-          <p:cNvSpPr txBox="1"/>
-          <p:nvPr/>
-        </p:nvSpPr>
-        <p:spPr>
-          <a:xfrm>
-            <a:off x="5184648" y="4386072"/>
-            <a:ext cx="731520" cy="128016"/>
-          </a:xfrm>
-          <a:prstGeom prst="rect">
-            <a:avLst/>
-          </a:prstGeom>
-          <a:noFill/>
-          <a:effectLst/>
-        </p:spPr>
-        <p:txBody>
-          <a:bodyPr wrap="square" lIns="0" rIns="0" tIns="0" bIns="0" anchor="ctr">
-            <a:spAutoFit/>
-          </a:bodyPr>
-          <a:lstStyle/>
-          <a:p>
-            <a:pPr algn="l"/>
-            <a:r>
-              <a:rPr sz="600" b="0" i="0">
-                <a:solidFill>
-                  <a:srgbClr val="BBBBBB"/>
-                </a:solidFill>
-                <a:latin typeface="Arial"/>
-              </a:rPr>
-              <a:t>IGHV1-18</a:t>
-            </a:r>
-          </a:p>
-        </p:txBody>
-      </p:sp>
-      <p:sp>
-        <p:nvSpPr>
-          <p:cNvPr id="75" name="Oval 74"/>
-          <p:cNvSpPr/>
-          <p:nvPr/>
-        </p:nvSpPr>
-        <p:spPr>
-          <a:xfrm>
-            <a:off x="2889504" y="6089904"/>
-            <a:ext cx="73152" cy="73152"/>
-          </a:xfrm>
-          <a:prstGeom prst="ellipse">
-            <a:avLst/>
-          </a:prstGeom>
-          <a:solidFill>
-            <a:srgbClr val="222222"/>
-          </a:solidFill>
-          <a:ln w="3810">
-            <a:solidFill>
-              <a:srgbClr val="222222"/>
-            </a:solidFill>
-          </a:ln>
-          <a:effectLst/>
-        </p:spPr>
-        <p:style>
-          <a:lnRef idx="1">
-            <a:schemeClr val="accent1"/>
-          </a:lnRef>
-          <a:fillRef idx="3">
-            <a:schemeClr val="accent1"/>
-          </a:fillRef>
-          <a:effectRef idx="2">
-            <a:schemeClr val="accent1"/>
-          </a:effectRef>
-          <a:fontRef idx="minor">
-            <a:schemeClr val="lt1"/>
-          </a:fontRef>
-        </p:style>
-        <p:txBody>
-          <a:bodyPr rtlCol="0" anchor="ctr"/>
-          <a:lstStyle/>
-          <a:p>
-            <a:pPr algn="ctr"/>
-          </a:p>
-        </p:txBody>
-      </p:sp>
-      <p:sp>
-        <p:nvSpPr>
-          <p:cNvPr id="76" name="TextBox 75"/>
-          <p:cNvSpPr txBox="1"/>
-          <p:nvPr/>
-        </p:nvSpPr>
-        <p:spPr>
-          <a:xfrm>
-            <a:off x="2990088" y="6062472"/>
-            <a:ext cx="731520" cy="128016"/>
-          </a:xfrm>
-          <a:prstGeom prst="rect">
-            <a:avLst/>
-          </a:prstGeom>
-          <a:noFill/>
-          <a:effectLst/>
-        </p:spPr>
-        <p:txBody>
-          <a:bodyPr wrap="square" lIns="0" rIns="0" tIns="0" bIns="0" anchor="ctr">
-            <a:spAutoFit/>
-          </a:bodyPr>
-          <a:lstStyle/>
-          <a:p>
-            <a:pPr algn="l"/>
-            <a:r>
-              <a:rPr sz="600" b="0" i="0">
-                <a:solidFill>
-                  <a:srgbClr val="BBBBBB"/>
-                </a:solidFill>
-                <a:latin typeface="Arial"/>
-              </a:rPr>
-              <a:t>IGHV4-30-2</a:t>
-            </a:r>
-          </a:p>
-        </p:txBody>
-      </p:sp>
-      <p:sp>
-        <p:nvSpPr>
-          <p:cNvPr id="77" name="Oval 76"/>
-          <p:cNvSpPr/>
-          <p:nvPr/>
-        </p:nvSpPr>
-        <p:spPr>
-          <a:xfrm>
-            <a:off x="3621024" y="5084064"/>
-            <a:ext cx="73152" cy="73152"/>
-          </a:xfrm>
-          <a:prstGeom prst="ellipse">
-            <a:avLst/>
-          </a:prstGeom>
-          <a:solidFill>
-            <a:srgbClr val="222222"/>
-          </a:solidFill>
-          <a:ln w="3810">
-            <a:solidFill>
-              <a:srgbClr val="222222"/>
-            </a:solidFill>
-          </a:ln>
-          <a:effectLst/>
-        </p:spPr>
-        <p:style>
-          <a:lnRef idx="1">
-            <a:schemeClr val="accent1"/>
-          </a:lnRef>
-          <a:fillRef idx="3">
-            <a:schemeClr val="accent1"/>
-          </a:fillRef>
-          <a:effectRef idx="2">
-            <a:schemeClr val="accent1"/>
-          </a:effectRef>
-          <a:fontRef idx="minor">
-            <a:schemeClr val="lt1"/>
-          </a:fontRef>
-        </p:style>
-        <p:txBody>
-          <a:bodyPr rtlCol="0" anchor="ctr"/>
-          <a:lstStyle/>
-          <a:p>
-            <a:pPr algn="ctr"/>
-          </a:p>
-        </p:txBody>
-      </p:sp>
-      <p:sp>
-        <p:nvSpPr>
-          <p:cNvPr id="78" name="TextBox 77"/>
-          <p:cNvSpPr txBox="1"/>
-          <p:nvPr/>
-        </p:nvSpPr>
-        <p:spPr>
-          <a:xfrm>
-            <a:off x="3721608" y="5056632"/>
-            <a:ext cx="731520" cy="128016"/>
-          </a:xfrm>
-          <a:prstGeom prst="rect">
-            <a:avLst/>
-          </a:prstGeom>
-          <a:noFill/>
-          <a:effectLst/>
-        </p:spPr>
-        <p:txBody>
-          <a:bodyPr wrap="square" lIns="0" rIns="0" tIns="0" bIns="0" anchor="ctr">
-            <a:spAutoFit/>
-          </a:bodyPr>
-          <a:lstStyle/>
-          <a:p>
-            <a:pPr algn="l"/>
-            <a:r>
-              <a:rPr sz="600" b="0" i="0">
-                <a:solidFill>
-                  <a:srgbClr val="BBBBBB"/>
-                </a:solidFill>
-                <a:latin typeface="Arial"/>
-              </a:rPr>
-              <a:t>IGHV4-31</a:t>
-            </a:r>
-          </a:p>
-        </p:txBody>
-      </p:sp>
-      <p:sp>
-        <p:nvSpPr>
-          <p:cNvPr id="79" name="Oval 78"/>
-          <p:cNvSpPr/>
-          <p:nvPr/>
-        </p:nvSpPr>
-        <p:spPr>
-          <a:xfrm>
-            <a:off x="3621024" y="4413504"/>
-            <a:ext cx="73152" cy="73152"/>
-          </a:xfrm>
-          <a:prstGeom prst="ellipse">
-            <a:avLst/>
-          </a:prstGeom>
-          <a:solidFill>
-            <a:srgbClr val="222222"/>
-          </a:solidFill>
-          <a:ln w="3810">
-            <a:solidFill>
-              <a:srgbClr val="222222"/>
-            </a:solidFill>
-          </a:ln>
-          <a:effectLst/>
-        </p:spPr>
-        <p:style>
-          <a:lnRef idx="1">
-            <a:schemeClr val="accent1"/>
-          </a:lnRef>
-          <a:fillRef idx="3">
-            <a:schemeClr val="accent1"/>
-          </a:fillRef>
-          <a:effectRef idx="2">
-            <a:schemeClr val="accent1"/>
-          </a:effectRef>
-          <a:fontRef idx="minor">
-            <a:schemeClr val="lt1"/>
-          </a:fontRef>
-        </p:style>
-        <p:txBody>
-          <a:bodyPr rtlCol="0" anchor="ctr"/>
-          <a:lstStyle/>
-          <a:p>
-            <a:pPr algn="ctr"/>
-          </a:p>
-        </p:txBody>
-      </p:sp>
-      <p:sp>
-        <p:nvSpPr>
-          <p:cNvPr id="80" name="TextBox 79"/>
-          <p:cNvSpPr txBox="1"/>
-          <p:nvPr/>
-        </p:nvSpPr>
-        <p:spPr>
-          <a:xfrm>
-            <a:off x="3721608" y="4386072"/>
-            <a:ext cx="731520" cy="128016"/>
-          </a:xfrm>
-          <a:prstGeom prst="rect">
-            <a:avLst/>
-          </a:prstGeom>
-          <a:noFill/>
-          <a:effectLst/>
-        </p:spPr>
-        <p:txBody>
-          <a:bodyPr wrap="square" lIns="0" rIns="0" tIns="0" bIns="0" anchor="ctr">
-            <a:spAutoFit/>
-          </a:bodyPr>
-          <a:lstStyle/>
-          <a:p>
-            <a:pPr algn="l"/>
-            <a:r>
-              <a:rPr sz="600" b="0" i="0">
-                <a:solidFill>
-                  <a:srgbClr val="BBBBBB"/>
-                </a:solidFill>
-                <a:latin typeface="Arial"/>
-              </a:rPr>
-              <a:t>IGHV3-73</a:t>
-            </a:r>
-          </a:p>
-        </p:txBody>
-      </p:sp>
-      <p:sp>
-        <p:nvSpPr>
-          <p:cNvPr id="81" name="Oval 80"/>
-          <p:cNvSpPr/>
-          <p:nvPr/>
-        </p:nvSpPr>
-        <p:spPr>
-          <a:xfrm>
-            <a:off x="3621024" y="4413504"/>
-            <a:ext cx="73152" cy="73152"/>
-          </a:xfrm>
-          <a:prstGeom prst="ellipse">
-            <a:avLst/>
-          </a:prstGeom>
-          <a:solidFill>
-            <a:srgbClr val="222222"/>
-          </a:solidFill>
-          <a:ln w="3810">
-            <a:solidFill>
-              <a:srgbClr val="222222"/>
-            </a:solidFill>
-          </a:ln>
-          <a:effectLst/>
-        </p:spPr>
-        <p:style>
-          <a:lnRef idx="1">
-            <a:schemeClr val="accent1"/>
-          </a:lnRef>
-          <a:fillRef idx="3">
-            <a:schemeClr val="accent1"/>
-          </a:fillRef>
-          <a:effectRef idx="2">
-            <a:schemeClr val="accent1"/>
-          </a:effectRef>
-          <a:fontRef idx="minor">
-            <a:schemeClr val="lt1"/>
-          </a:fontRef>
-        </p:style>
-        <p:txBody>
-          <a:bodyPr rtlCol="0" anchor="ctr"/>
-          <a:lstStyle/>
-          <a:p>
-            <a:pPr algn="ctr"/>
-          </a:p>
-        </p:txBody>
-      </p:sp>
-      <p:sp>
-        <p:nvSpPr>
-          <p:cNvPr id="82" name="TextBox 81"/>
-          <p:cNvSpPr txBox="1"/>
-          <p:nvPr/>
-        </p:nvSpPr>
-        <p:spPr>
-          <a:xfrm>
-            <a:off x="3721608" y="4386072"/>
-            <a:ext cx="731520" cy="128016"/>
-          </a:xfrm>
-          <a:prstGeom prst="rect">
-            <a:avLst/>
-          </a:prstGeom>
-          <a:noFill/>
-          <a:effectLst/>
-        </p:spPr>
-        <p:txBody>
-          <a:bodyPr wrap="square" lIns="0" rIns="0" tIns="0" bIns="0" anchor="ctr">
-            <a:spAutoFit/>
-          </a:bodyPr>
-          <a:lstStyle/>
-          <a:p>
-            <a:pPr algn="l"/>
-            <a:r>
-              <a:rPr sz="600" b="0" i="0">
-                <a:solidFill>
-                  <a:srgbClr val="BBBBBB"/>
-                </a:solidFill>
-                <a:latin typeface="Arial"/>
-              </a:rPr>
-              <a:t>IGHV3-35</a:t>
-            </a:r>
-          </a:p>
-        </p:txBody>
-      </p:sp>
-      <p:sp>
-        <p:nvSpPr>
-          <p:cNvPr id="83" name="Oval 82"/>
-          <p:cNvSpPr/>
-          <p:nvPr/>
-        </p:nvSpPr>
-        <p:spPr>
-          <a:xfrm>
-            <a:off x="3621024" y="4413504"/>
-            <a:ext cx="73152" cy="73152"/>
-          </a:xfrm>
-          <a:prstGeom prst="ellipse">
-            <a:avLst/>
-          </a:prstGeom>
-          <a:solidFill>
-            <a:srgbClr val="222222"/>
-          </a:solidFill>
-          <a:ln w="3810">
-            <a:solidFill>
-              <a:srgbClr val="222222"/>
-            </a:solidFill>
-          </a:ln>
-          <a:effectLst/>
-        </p:spPr>
-        <p:style>
-          <a:lnRef idx="1">
-            <a:schemeClr val="accent1"/>
-          </a:lnRef>
-          <a:fillRef idx="3">
-            <a:schemeClr val="accent1"/>
-          </a:fillRef>
-          <a:effectRef idx="2">
-            <a:schemeClr val="accent1"/>
-          </a:effectRef>
-          <a:fontRef idx="minor">
-            <a:schemeClr val="lt1"/>
-          </a:fontRef>
-        </p:style>
-        <p:txBody>
-          <a:bodyPr rtlCol="0" anchor="ctr"/>
-          <a:lstStyle/>
-          <a:p>
-            <a:pPr algn="ctr"/>
-          </a:p>
-        </p:txBody>
-      </p:sp>
-      <p:sp>
-        <p:nvSpPr>
-          <p:cNvPr id="84" name="TextBox 83"/>
-          <p:cNvSpPr txBox="1"/>
-          <p:nvPr/>
-        </p:nvSpPr>
-        <p:spPr>
-          <a:xfrm>
-            <a:off x="3721608" y="4386072"/>
-            <a:ext cx="731520" cy="128016"/>
-          </a:xfrm>
-          <a:prstGeom prst="rect">
-            <a:avLst/>
-          </a:prstGeom>
-          <a:noFill/>
-          <a:effectLst/>
-        </p:spPr>
-        <p:txBody>
-          <a:bodyPr wrap="square" lIns="0" rIns="0" tIns="0" bIns="0" anchor="ctr">
-            <a:spAutoFit/>
-          </a:bodyPr>
-          <a:lstStyle/>
-          <a:p>
-            <a:pPr algn="l"/>
-            <a:r>
-              <a:rPr sz="600" b="0" i="0">
-                <a:solidFill>
-                  <a:srgbClr val="BBBBBB"/>
-                </a:solidFill>
-                <a:latin typeface="Arial"/>
-              </a:rPr>
-              <a:t>IGHV4-39</a:t>
-            </a:r>
-          </a:p>
-        </p:txBody>
-      </p:sp>
-      <p:sp>
-        <p:nvSpPr>
-          <p:cNvPr id="85" name="Oval 84"/>
-          <p:cNvSpPr/>
-          <p:nvPr/>
-        </p:nvSpPr>
-        <p:spPr>
-          <a:xfrm>
-            <a:off x="3621024" y="4413504"/>
-            <a:ext cx="73152" cy="73152"/>
-          </a:xfrm>
-          <a:prstGeom prst="ellipse">
-            <a:avLst/>
-          </a:prstGeom>
-          <a:solidFill>
-            <a:srgbClr val="222222"/>
-          </a:solidFill>
-          <a:ln w="3810">
-            <a:solidFill>
-              <a:srgbClr val="222222"/>
-            </a:solidFill>
-          </a:ln>
-          <a:effectLst/>
-        </p:spPr>
-        <p:style>
-          <a:lnRef idx="1">
-            <a:schemeClr val="accent1"/>
-          </a:lnRef>
-          <a:fillRef idx="3">
-            <a:schemeClr val="accent1"/>
-          </a:fillRef>
-          <a:effectRef idx="2">
-            <a:schemeClr val="accent1"/>
-          </a:effectRef>
-          <a:fontRef idx="minor">
-            <a:schemeClr val="lt1"/>
-          </a:fontRef>
-        </p:style>
-        <p:txBody>
-          <a:bodyPr rtlCol="0" anchor="ctr"/>
-          <a:lstStyle/>
-          <a:p>
-            <a:pPr algn="ctr"/>
-          </a:p>
-        </p:txBody>
-      </p:sp>
-      <p:sp>
-        <p:nvSpPr>
-          <p:cNvPr id="86" name="TextBox 85"/>
-          <p:cNvSpPr txBox="1"/>
-          <p:nvPr/>
-        </p:nvSpPr>
-        <p:spPr>
-          <a:xfrm>
-            <a:off x="3721608" y="4386072"/>
-            <a:ext cx="731520" cy="128016"/>
-          </a:xfrm>
-          <a:prstGeom prst="rect">
-            <a:avLst/>
-          </a:prstGeom>
-          <a:noFill/>
-          <a:effectLst/>
-        </p:spPr>
-        <p:txBody>
-          <a:bodyPr wrap="square" lIns="0" rIns="0" tIns="0" bIns="0" anchor="ctr">
-            <a:spAutoFit/>
-          </a:bodyPr>
-          <a:lstStyle/>
-          <a:p>
-            <a:pPr algn="l"/>
-            <a:r>
-              <a:rPr sz="600" b="0" i="0">
-                <a:solidFill>
-                  <a:srgbClr val="BBBBBB"/>
-                </a:solidFill>
-                <a:latin typeface="Arial"/>
-              </a:rPr>
-              <a:t>IGHV4-28</a:t>
-            </a:r>
-          </a:p>
-        </p:txBody>
-      </p:sp>
-      <p:sp>
-        <p:nvSpPr>
-          <p:cNvPr id="87" name="Oval 86"/>
-          <p:cNvSpPr/>
-          <p:nvPr/>
-        </p:nvSpPr>
-        <p:spPr>
-          <a:xfrm>
-            <a:off x="3621024" y="4413504"/>
-            <a:ext cx="73152" cy="73152"/>
-          </a:xfrm>
-          <a:prstGeom prst="ellipse">
-            <a:avLst/>
-          </a:prstGeom>
-          <a:solidFill>
-            <a:srgbClr val="222222"/>
-          </a:solidFill>
-          <a:ln w="3810">
-            <a:solidFill>
-              <a:srgbClr val="222222"/>
-            </a:solidFill>
-          </a:ln>
-          <a:effectLst/>
-        </p:spPr>
-        <p:style>
-          <a:lnRef idx="1">
-            <a:schemeClr val="accent1"/>
-          </a:lnRef>
-          <a:fillRef idx="3">
-            <a:schemeClr val="accent1"/>
-          </a:fillRef>
-          <a:effectRef idx="2">
-            <a:schemeClr val="accent1"/>
-          </a:effectRef>
-          <a:fontRef idx="minor">
-            <a:schemeClr val="lt1"/>
-          </a:fontRef>
-        </p:style>
-        <p:txBody>
-          <a:bodyPr rtlCol="0" anchor="ctr"/>
-          <a:lstStyle/>
-          <a:p>
-            <a:pPr algn="ctr"/>
-          </a:p>
-        </p:txBody>
-      </p:sp>
-      <p:sp>
-        <p:nvSpPr>
-          <p:cNvPr id="88" name="TextBox 87"/>
-          <p:cNvSpPr txBox="1"/>
-          <p:nvPr/>
-        </p:nvSpPr>
-        <p:spPr>
-          <a:xfrm>
-            <a:off x="3721608" y="4386072"/>
-            <a:ext cx="731520" cy="128016"/>
-          </a:xfrm>
-          <a:prstGeom prst="rect">
-            <a:avLst/>
-          </a:prstGeom>
-          <a:noFill/>
-          <a:effectLst/>
-        </p:spPr>
-        <p:txBody>
-          <a:bodyPr wrap="square" lIns="0" rIns="0" tIns="0" bIns="0" anchor="ctr">
-            <a:spAutoFit/>
-          </a:bodyPr>
-          <a:lstStyle/>
-          <a:p>
-            <a:pPr algn="l"/>
-            <a:r>
-              <a:rPr sz="600" b="0" i="0">
-                <a:solidFill>
-                  <a:srgbClr val="BBBBBB"/>
-                </a:solidFill>
-                <a:latin typeface="Arial"/>
-              </a:rPr>
-              <a:t>IGHV3-72</a:t>
-            </a:r>
-          </a:p>
-        </p:txBody>
-      </p:sp>
-      <p:sp>
-        <p:nvSpPr>
-          <p:cNvPr id="89" name="Oval 88"/>
-          <p:cNvSpPr/>
-          <p:nvPr/>
-        </p:nvSpPr>
-        <p:spPr>
-          <a:xfrm>
-            <a:off x="5084064" y="3072384"/>
-            <a:ext cx="73152" cy="73152"/>
-          </a:xfrm>
-          <a:prstGeom prst="ellipse">
-            <a:avLst/>
-          </a:prstGeom>
-          <a:solidFill>
-            <a:srgbClr val="222222"/>
-          </a:solidFill>
-          <a:ln w="3810">
-            <a:solidFill>
-              <a:srgbClr val="222222"/>
-            </a:solidFill>
-          </a:ln>
-          <a:effectLst/>
-        </p:spPr>
-        <p:style>
-          <a:lnRef idx="1">
-            <a:schemeClr val="accent1"/>
-          </a:lnRef>
-          <a:fillRef idx="3">
-            <a:schemeClr val="accent1"/>
-          </a:fillRef>
-          <a:effectRef idx="2">
-            <a:schemeClr val="accent1"/>
-          </a:effectRef>
-          <a:fontRef idx="minor">
-            <a:schemeClr val="lt1"/>
-          </a:fontRef>
-        </p:style>
-        <p:txBody>
-          <a:bodyPr rtlCol="0" anchor="ctr"/>
-          <a:lstStyle/>
-          <a:p>
-            <a:pPr algn="ctr"/>
-          </a:p>
-        </p:txBody>
-      </p:sp>
-      <p:sp>
-        <p:nvSpPr>
-          <p:cNvPr id="90" name="TextBox 89"/>
-          <p:cNvSpPr txBox="1"/>
-          <p:nvPr/>
-        </p:nvSpPr>
-        <p:spPr>
-          <a:xfrm>
-            <a:off x="5184648" y="3044952"/>
-            <a:ext cx="731520" cy="128016"/>
-          </a:xfrm>
-          <a:prstGeom prst="rect">
-            <a:avLst/>
-          </a:prstGeom>
-          <a:noFill/>
-          <a:effectLst/>
-        </p:spPr>
-        <p:txBody>
-          <a:bodyPr wrap="square" lIns="0" rIns="0" tIns="0" bIns="0" anchor="ctr">
-            <a:spAutoFit/>
-          </a:bodyPr>
-          <a:lstStyle/>
-          <a:p>
-            <a:pPr algn="l"/>
-            <a:r>
-              <a:rPr sz="600" b="0" i="0">
-                <a:solidFill>
-                  <a:srgbClr val="BBBBBB"/>
-                </a:solidFill>
-                <a:latin typeface="Arial"/>
-              </a:rPr>
-              <a:t>IGHV1-58</a:t>
-            </a:r>
-          </a:p>
-        </p:txBody>
-      </p:sp>
-      <p:sp>
-        <p:nvSpPr>
-          <p:cNvPr id="91" name="Oval 90"/>
-          <p:cNvSpPr/>
-          <p:nvPr/>
-        </p:nvSpPr>
-        <p:spPr>
-          <a:xfrm>
-            <a:off x="3621024" y="4413504"/>
-            <a:ext cx="73152" cy="73152"/>
-          </a:xfrm>
-          <a:prstGeom prst="ellipse">
-            <a:avLst/>
-          </a:prstGeom>
-          <a:solidFill>
-            <a:srgbClr val="222222"/>
-          </a:solidFill>
-          <a:ln w="3810">
-            <a:solidFill>
-              <a:srgbClr val="222222"/>
-            </a:solidFill>
-          </a:ln>
-          <a:effectLst/>
-        </p:spPr>
-        <p:style>
-          <a:lnRef idx="1">
-            <a:schemeClr val="accent1"/>
-          </a:lnRef>
-          <a:fillRef idx="3">
-            <a:schemeClr val="accent1"/>
-          </a:fillRef>
-          <a:effectRef idx="2">
-            <a:schemeClr val="accent1"/>
-          </a:effectRef>
-          <a:fontRef idx="minor">
-            <a:schemeClr val="lt1"/>
-          </a:fontRef>
-        </p:style>
-        <p:txBody>
-          <a:bodyPr rtlCol="0" anchor="ctr"/>
-          <a:lstStyle/>
-          <a:p>
-            <a:pPr algn="ctr"/>
-          </a:p>
-        </p:txBody>
-      </p:sp>
-      <p:sp>
-        <p:nvSpPr>
-          <p:cNvPr id="92" name="TextBox 91"/>
-          <p:cNvSpPr txBox="1"/>
-          <p:nvPr/>
-        </p:nvSpPr>
-        <p:spPr>
-          <a:xfrm>
-            <a:off x="3721608" y="4386072"/>
-            <a:ext cx="731520" cy="128016"/>
-          </a:xfrm>
-          <a:prstGeom prst="rect">
-            <a:avLst/>
-          </a:prstGeom>
-          <a:noFill/>
-          <a:effectLst/>
-        </p:spPr>
-        <p:txBody>
-          <a:bodyPr wrap="square" lIns="0" rIns="0" tIns="0" bIns="0" anchor="ctr">
-            <a:spAutoFit/>
-          </a:bodyPr>
-          <a:lstStyle/>
-          <a:p>
-            <a:pPr algn="l"/>
-            <a:r>
-              <a:rPr sz="600" b="0" i="0">
-                <a:solidFill>
-                  <a:srgbClr val="BBBBBB"/>
-                </a:solidFill>
-                <a:latin typeface="Arial"/>
-              </a:rPr>
-              <a:t>IGHV1-69</a:t>
-            </a:r>
-          </a:p>
-        </p:txBody>
-      </p:sp>
-      <p:sp>
-        <p:nvSpPr>
-          <p:cNvPr id="93" name="Oval 92"/>
-          <p:cNvSpPr/>
-          <p:nvPr/>
-        </p:nvSpPr>
-        <p:spPr>
-          <a:xfrm>
-            <a:off x="3621024" y="4413504"/>
-            <a:ext cx="73152" cy="73152"/>
-          </a:xfrm>
-          <a:prstGeom prst="ellipse">
-            <a:avLst/>
-          </a:prstGeom>
-          <a:solidFill>
-            <a:srgbClr val="222222"/>
-          </a:solidFill>
-          <a:ln w="3810">
-            <a:solidFill>
-              <a:srgbClr val="222222"/>
-            </a:solidFill>
-          </a:ln>
-          <a:effectLst/>
-        </p:spPr>
-        <p:style>
-          <a:lnRef idx="1">
-            <a:schemeClr val="accent1"/>
-          </a:lnRef>
-          <a:fillRef idx="3">
-            <a:schemeClr val="accent1"/>
-          </a:fillRef>
-          <a:effectRef idx="2">
-            <a:schemeClr val="accent1"/>
-          </a:effectRef>
-          <a:fontRef idx="minor">
-            <a:schemeClr val="lt1"/>
-          </a:fontRef>
-        </p:style>
-        <p:txBody>
-          <a:bodyPr rtlCol="0" anchor="ctr"/>
-          <a:lstStyle/>
-          <a:p>
-            <a:pPr algn="ctr"/>
-          </a:p>
-        </p:txBody>
-      </p:sp>
-      <p:sp>
-        <p:nvSpPr>
-          <p:cNvPr id="94" name="TextBox 93"/>
-          <p:cNvSpPr txBox="1"/>
-          <p:nvPr/>
-        </p:nvSpPr>
-        <p:spPr>
-          <a:xfrm>
-            <a:off x="3721608" y="4386072"/>
-            <a:ext cx="731520" cy="128016"/>
-          </a:xfrm>
-          <a:prstGeom prst="rect">
-            <a:avLst/>
-          </a:prstGeom>
-          <a:noFill/>
-          <a:effectLst/>
-        </p:spPr>
-        <p:txBody>
-          <a:bodyPr wrap="square" lIns="0" rIns="0" tIns="0" bIns="0" anchor="ctr">
-            <a:spAutoFit/>
-          </a:bodyPr>
-          <a:lstStyle/>
-          <a:p>
-            <a:pPr algn="l"/>
-            <a:r>
-              <a:rPr sz="600" b="0" i="0">
-                <a:solidFill>
-                  <a:srgbClr val="BBBBBB"/>
-                </a:solidFill>
-                <a:latin typeface="Arial"/>
-              </a:rPr>
-              <a:t>IGHV3-23</a:t>
-            </a:r>
-          </a:p>
-        </p:txBody>
-      </p:sp>
-      <p:sp>
-        <p:nvSpPr>
-          <p:cNvPr id="95" name="Oval 94"/>
-          <p:cNvSpPr/>
-          <p:nvPr/>
-        </p:nvSpPr>
-        <p:spPr>
-          <a:xfrm>
-            <a:off x="5449824" y="2737104"/>
-            <a:ext cx="73152" cy="73152"/>
-          </a:xfrm>
-          <a:prstGeom prst="ellipse">
-            <a:avLst/>
-          </a:prstGeom>
-          <a:solidFill>
-            <a:srgbClr val="222222"/>
-          </a:solidFill>
-          <a:ln w="3810">
-            <a:solidFill>
-              <a:srgbClr val="222222"/>
-            </a:solidFill>
-          </a:ln>
-          <a:effectLst/>
-        </p:spPr>
-        <p:style>
-          <a:lnRef idx="1">
-            <a:schemeClr val="accent1"/>
-          </a:lnRef>
-          <a:fillRef idx="3">
-            <a:schemeClr val="accent1"/>
-          </a:fillRef>
-          <a:effectRef idx="2">
-            <a:schemeClr val="accent1"/>
-          </a:effectRef>
-          <a:fontRef idx="minor">
-            <a:schemeClr val="lt1"/>
-          </a:fontRef>
-        </p:style>
-        <p:txBody>
-          <a:bodyPr rtlCol="0" anchor="ctr"/>
-          <a:lstStyle/>
-          <a:p>
-            <a:pPr algn="ctr"/>
-          </a:p>
-        </p:txBody>
-      </p:sp>
-      <p:sp>
-        <p:nvSpPr>
-          <p:cNvPr id="96" name="TextBox 95"/>
-          <p:cNvSpPr txBox="1"/>
-          <p:nvPr/>
-        </p:nvSpPr>
-        <p:spPr>
-          <a:xfrm>
-            <a:off x="5550408" y="2709672"/>
-            <a:ext cx="731520" cy="128016"/>
-          </a:xfrm>
-          <a:prstGeom prst="rect">
-            <a:avLst/>
-          </a:prstGeom>
-          <a:noFill/>
-          <a:effectLst/>
-        </p:spPr>
-        <p:txBody>
-          <a:bodyPr wrap="square" lIns="0" rIns="0" tIns="0" bIns="0" anchor="ctr">
-            <a:spAutoFit/>
-          </a:bodyPr>
-          <a:lstStyle/>
-          <a:p>
-            <a:pPr algn="l"/>
-            <a:r>
-              <a:rPr sz="600" b="0" i="0">
-                <a:solidFill>
-                  <a:srgbClr val="BBBBBB"/>
-                </a:solidFill>
-                <a:latin typeface="Arial"/>
-              </a:rPr>
-              <a:t>IGHV1-2</a:t>
-            </a:r>
-          </a:p>
-        </p:txBody>
-      </p:sp>
-      <p:sp>
-        <p:nvSpPr>
-          <p:cNvPr id="97" name="Oval 96"/>
-          <p:cNvSpPr/>
-          <p:nvPr/>
-        </p:nvSpPr>
-        <p:spPr>
-          <a:xfrm>
-            <a:off x="3621024" y="4413504"/>
-            <a:ext cx="73152" cy="73152"/>
-          </a:xfrm>
-          <a:prstGeom prst="ellipse">
-            <a:avLst/>
-          </a:prstGeom>
-          <a:solidFill>
-            <a:srgbClr val="222222"/>
-          </a:solidFill>
-          <a:ln w="3810">
-            <a:solidFill>
-              <a:srgbClr val="222222"/>
-            </a:solidFill>
-          </a:ln>
-          <a:effectLst/>
-        </p:spPr>
-        <p:style>
-          <a:lnRef idx="1">
-            <a:schemeClr val="accent1"/>
-          </a:lnRef>
-          <a:fillRef idx="3">
-            <a:schemeClr val="accent1"/>
-          </a:fillRef>
-          <a:effectRef idx="2">
-            <a:schemeClr val="accent1"/>
-          </a:effectRef>
-          <a:fontRef idx="minor">
-            <a:schemeClr val="lt1"/>
-          </a:fontRef>
-        </p:style>
-        <p:txBody>
-          <a:bodyPr rtlCol="0" anchor="ctr"/>
-          <a:lstStyle/>
-          <a:p>
-            <a:pPr algn="ctr"/>
-          </a:p>
-        </p:txBody>
-      </p:sp>
-      <p:sp>
-        <p:nvSpPr>
-          <p:cNvPr id="98" name="TextBox 97"/>
-          <p:cNvSpPr txBox="1"/>
-          <p:nvPr/>
-        </p:nvSpPr>
-        <p:spPr>
-          <a:xfrm>
-            <a:off x="3721608" y="4386072"/>
-            <a:ext cx="731520" cy="128016"/>
-          </a:xfrm>
-          <a:prstGeom prst="rect">
-            <a:avLst/>
-          </a:prstGeom>
-          <a:noFill/>
-          <a:effectLst/>
-        </p:spPr>
-        <p:txBody>
-          <a:bodyPr wrap="square" lIns="0" rIns="0" tIns="0" bIns="0" anchor="ctr">
-            <a:spAutoFit/>
-          </a:bodyPr>
-          <a:lstStyle/>
-          <a:p>
-            <a:pPr algn="l"/>
-            <a:r>
-              <a:rPr sz="600" b="0" i="0">
-                <a:solidFill>
-                  <a:srgbClr val="BBBBBB"/>
-                </a:solidFill>
-                <a:latin typeface="Arial"/>
-              </a:rPr>
-              <a:t>IGHV3-64</a:t>
-            </a:r>
-          </a:p>
-        </p:txBody>
-      </p:sp>
-      <p:sp>
-        <p:nvSpPr>
-          <p:cNvPr id="99" name="Oval 98"/>
-          <p:cNvSpPr/>
-          <p:nvPr/>
-        </p:nvSpPr>
-        <p:spPr>
-          <a:xfrm>
-            <a:off x="2889504" y="5084064"/>
-            <a:ext cx="73152" cy="73152"/>
-          </a:xfrm>
-          <a:prstGeom prst="ellipse">
-            <a:avLst/>
-          </a:prstGeom>
-          <a:solidFill>
-            <a:srgbClr val="222222"/>
-          </a:solidFill>
-          <a:ln w="3810">
-            <a:solidFill>
-              <a:srgbClr val="222222"/>
-            </a:solidFill>
-          </a:ln>
-          <a:effectLst/>
-        </p:spPr>
-        <p:style>
-          <a:lnRef idx="1">
-            <a:schemeClr val="accent1"/>
-          </a:lnRef>
-          <a:fillRef idx="3">
-            <a:schemeClr val="accent1"/>
-          </a:fillRef>
-          <a:effectRef idx="2">
-            <a:schemeClr val="accent1"/>
-          </a:effectRef>
-          <a:fontRef idx="minor">
-            <a:schemeClr val="lt1"/>
-          </a:fontRef>
-        </p:style>
-        <p:txBody>
-          <a:bodyPr rtlCol="0" anchor="ctr"/>
-          <a:lstStyle/>
-          <a:p>
-            <a:pPr algn="ctr"/>
-          </a:p>
-        </p:txBody>
-      </p:sp>
-      <p:sp>
-        <p:nvSpPr>
-          <p:cNvPr id="100" name="TextBox 99"/>
-          <p:cNvSpPr txBox="1"/>
-          <p:nvPr/>
-        </p:nvSpPr>
-        <p:spPr>
-          <a:xfrm>
-            <a:off x="2990088" y="5056632"/>
-            <a:ext cx="731520" cy="128016"/>
-          </a:xfrm>
-          <a:prstGeom prst="rect">
-            <a:avLst/>
-          </a:prstGeom>
-          <a:noFill/>
-          <a:effectLst/>
-        </p:spPr>
-        <p:txBody>
-          <a:bodyPr wrap="square" lIns="0" rIns="0" tIns="0" bIns="0" anchor="ctr">
-            <a:spAutoFit/>
-          </a:bodyPr>
-          <a:lstStyle/>
-          <a:p>
-            <a:pPr algn="l"/>
-            <a:r>
-              <a:rPr sz="600" b="0" i="0">
-                <a:solidFill>
-                  <a:srgbClr val="BBBBBB"/>
-                </a:solidFill>
-                <a:latin typeface="Arial"/>
-              </a:rPr>
-              <a:t>IGHV3-64D</a:t>
-            </a:r>
-          </a:p>
-        </p:txBody>
-      </p:sp>
-      <p:sp>
-        <p:nvSpPr>
-          <p:cNvPr id="101" name="Oval 100"/>
-          <p:cNvSpPr/>
-          <p:nvPr/>
-        </p:nvSpPr>
-        <p:spPr>
-          <a:xfrm>
-            <a:off x="3602736" y="4395216"/>
-            <a:ext cx="109728" cy="109728"/>
-          </a:xfrm>
-          <a:prstGeom prst="ellipse">
-            <a:avLst/>
-          </a:prstGeom>
-          <a:solidFill>
-            <a:srgbClr val="D4A300"/>
-          </a:solidFill>
-          <a:ln w="3810">
-            <a:solidFill>
-              <a:srgbClr val="222222"/>
-            </a:solidFill>
-          </a:ln>
-          <a:effectLst/>
-        </p:spPr>
-        <p:style>
-          <a:lnRef idx="1">
-            <a:schemeClr val="accent1"/>
-          </a:lnRef>
-          <a:fillRef idx="3">
-            <a:schemeClr val="accent1"/>
-          </a:fillRef>
-          <a:effectRef idx="2">
-            <a:schemeClr val="accent1"/>
-          </a:effectRef>
-          <a:fontRef idx="minor">
-            <a:schemeClr val="lt1"/>
-          </a:fontRef>
-        </p:style>
-        <p:txBody>
-          <a:bodyPr rtlCol="0" anchor="ctr"/>
-          <a:lstStyle/>
-          <a:p>
-            <a:pPr algn="ctr"/>
-          </a:p>
-        </p:txBody>
-      </p:sp>
-      <p:sp>
-        <p:nvSpPr>
-          <p:cNvPr id="102" name="TextBox 101"/>
-          <p:cNvSpPr txBox="1"/>
-          <p:nvPr/>
-        </p:nvSpPr>
-        <p:spPr>
-          <a:xfrm>
-            <a:off x="3721608" y="4386072"/>
-            <a:ext cx="731520" cy="128016"/>
-          </a:xfrm>
-          <a:prstGeom prst="rect">
-            <a:avLst/>
-          </a:prstGeom>
-          <a:noFill/>
-          <a:effectLst/>
-        </p:spPr>
-        <p:txBody>
-          <a:bodyPr wrap="square" lIns="0" rIns="0" tIns="0" bIns="0" anchor="ctr">
-            <a:spAutoFit/>
-          </a:bodyPr>
-          <a:lstStyle/>
-          <a:p>
-            <a:pPr algn="l"/>
-            <a:r>
-              <a:rPr sz="600" b="1" i="0">
+              <a:rPr sz="800" b="1" i="0">
                 <a:solidFill>
                   <a:srgbClr val="D4A300"/>
                 </a:solidFill>
@@ -16014,13 +15161,13 @@
       </p:sp>
       <p:sp>
         <p:nvSpPr>
-          <p:cNvPr id="103" name="Oval 102"/>
-          <p:cNvSpPr/>
-          <p:nvPr/>
-        </p:nvSpPr>
-        <p:spPr>
-          <a:xfrm>
-            <a:off x="1792224" y="6089904"/>
+          <p:cNvPr id="75" name="Oval 74"/>
+          <p:cNvSpPr/>
+          <p:nvPr/>
+        </p:nvSpPr>
+        <p:spPr>
+          <a:xfrm>
+            <a:off x="2249424" y="6089904"/>
             <a:ext cx="73152" cy="73152"/>
           </a:xfrm>
           <a:prstGeom prst="ellipse">
@@ -16060,14 +15207,750 @@
       </p:sp>
       <p:sp>
         <p:nvSpPr>
-          <p:cNvPr id="104" name="TextBox 103"/>
+          <p:cNvPr id="76" name="Oval 75"/>
+          <p:cNvSpPr/>
+          <p:nvPr/>
+        </p:nvSpPr>
+        <p:spPr>
+          <a:xfrm>
+            <a:off x="3925824" y="4413504"/>
+            <a:ext cx="73152" cy="73152"/>
+          </a:xfrm>
+          <a:prstGeom prst="ellipse">
+            <a:avLst/>
+          </a:prstGeom>
+          <a:solidFill>
+            <a:srgbClr val="222222"/>
+          </a:solidFill>
+          <a:ln w="3810">
+            <a:solidFill>
+              <a:srgbClr val="222222"/>
+            </a:solidFill>
+          </a:ln>
+          <a:effectLst/>
+        </p:spPr>
+        <p:style>
+          <a:lnRef idx="1">
+            <a:schemeClr val="accent1"/>
+          </a:lnRef>
+          <a:fillRef idx="3">
+            <a:schemeClr val="accent1"/>
+          </a:fillRef>
+          <a:effectRef idx="2">
+            <a:schemeClr val="accent1"/>
+          </a:effectRef>
+          <a:fontRef idx="minor">
+            <a:schemeClr val="lt1"/>
+          </a:fontRef>
+        </p:style>
+        <p:txBody>
+          <a:bodyPr rtlCol="0" anchor="ctr"/>
+          <a:lstStyle/>
+          <a:p>
+            <a:pPr algn="ctr"/>
+          </a:p>
+        </p:txBody>
+      </p:sp>
+      <p:sp>
+        <p:nvSpPr>
+          <p:cNvPr id="77" name="Oval 76"/>
+          <p:cNvSpPr/>
+          <p:nvPr/>
+        </p:nvSpPr>
+        <p:spPr>
+          <a:xfrm>
+            <a:off x="3925824" y="4413504"/>
+            <a:ext cx="73152" cy="73152"/>
+          </a:xfrm>
+          <a:prstGeom prst="ellipse">
+            <a:avLst/>
+          </a:prstGeom>
+          <a:solidFill>
+            <a:srgbClr val="222222"/>
+          </a:solidFill>
+          <a:ln w="3810">
+            <a:solidFill>
+              <a:srgbClr val="222222"/>
+            </a:solidFill>
+          </a:ln>
+          <a:effectLst/>
+        </p:spPr>
+        <p:style>
+          <a:lnRef idx="1">
+            <a:schemeClr val="accent1"/>
+          </a:lnRef>
+          <a:fillRef idx="3">
+            <a:schemeClr val="accent1"/>
+          </a:fillRef>
+          <a:effectRef idx="2">
+            <a:schemeClr val="accent1"/>
+          </a:effectRef>
+          <a:fontRef idx="minor">
+            <a:schemeClr val="lt1"/>
+          </a:fontRef>
+        </p:style>
+        <p:txBody>
+          <a:bodyPr rtlCol="0" anchor="ctr"/>
+          <a:lstStyle/>
+          <a:p>
+            <a:pPr algn="ctr"/>
+          </a:p>
+        </p:txBody>
+      </p:sp>
+      <p:sp>
+        <p:nvSpPr>
+          <p:cNvPr id="78" name="Oval 77"/>
+          <p:cNvSpPr/>
+          <p:nvPr/>
+        </p:nvSpPr>
+        <p:spPr>
+          <a:xfrm>
+            <a:off x="3925824" y="4413504"/>
+            <a:ext cx="73152" cy="73152"/>
+          </a:xfrm>
+          <a:prstGeom prst="ellipse">
+            <a:avLst/>
+          </a:prstGeom>
+          <a:solidFill>
+            <a:srgbClr val="222222"/>
+          </a:solidFill>
+          <a:ln w="3810">
+            <a:solidFill>
+              <a:srgbClr val="222222"/>
+            </a:solidFill>
+          </a:ln>
+          <a:effectLst/>
+        </p:spPr>
+        <p:style>
+          <a:lnRef idx="1">
+            <a:schemeClr val="accent1"/>
+          </a:lnRef>
+          <a:fillRef idx="3">
+            <a:schemeClr val="accent1"/>
+          </a:fillRef>
+          <a:effectRef idx="2">
+            <a:schemeClr val="accent1"/>
+          </a:effectRef>
+          <a:fontRef idx="minor">
+            <a:schemeClr val="lt1"/>
+          </a:fontRef>
+        </p:style>
+        <p:txBody>
+          <a:bodyPr rtlCol="0" anchor="ctr"/>
+          <a:lstStyle/>
+          <a:p>
+            <a:pPr algn="ctr"/>
+          </a:p>
+        </p:txBody>
+      </p:sp>
+      <p:sp>
+        <p:nvSpPr>
+          <p:cNvPr id="79" name="Oval 78"/>
+          <p:cNvSpPr/>
+          <p:nvPr/>
+        </p:nvSpPr>
+        <p:spPr>
+          <a:xfrm>
+            <a:off x="2249424" y="5084064"/>
+            <a:ext cx="73152" cy="73152"/>
+          </a:xfrm>
+          <a:prstGeom prst="ellipse">
+            <a:avLst/>
+          </a:prstGeom>
+          <a:solidFill>
+            <a:srgbClr val="222222"/>
+          </a:solidFill>
+          <a:ln w="3810">
+            <a:solidFill>
+              <a:srgbClr val="222222"/>
+            </a:solidFill>
+          </a:ln>
+          <a:effectLst/>
+        </p:spPr>
+        <p:style>
+          <a:lnRef idx="1">
+            <a:schemeClr val="accent1"/>
+          </a:lnRef>
+          <a:fillRef idx="3">
+            <a:schemeClr val="accent1"/>
+          </a:fillRef>
+          <a:effectRef idx="2">
+            <a:schemeClr val="accent1"/>
+          </a:effectRef>
+          <a:fontRef idx="minor">
+            <a:schemeClr val="lt1"/>
+          </a:fontRef>
+        </p:style>
+        <p:txBody>
+          <a:bodyPr rtlCol="0" anchor="ctr"/>
+          <a:lstStyle/>
+          <a:p>
+            <a:pPr algn="ctr"/>
+          </a:p>
+        </p:txBody>
+      </p:sp>
+      <p:sp>
+        <p:nvSpPr>
+          <p:cNvPr id="80" name="Oval 79"/>
+          <p:cNvSpPr/>
+          <p:nvPr/>
+        </p:nvSpPr>
+        <p:spPr>
+          <a:xfrm>
+            <a:off x="3925824" y="3072384"/>
+            <a:ext cx="73152" cy="73152"/>
+          </a:xfrm>
+          <a:prstGeom prst="ellipse">
+            <a:avLst/>
+          </a:prstGeom>
+          <a:solidFill>
+            <a:srgbClr val="222222"/>
+          </a:solidFill>
+          <a:ln w="3810">
+            <a:solidFill>
+              <a:srgbClr val="222222"/>
+            </a:solidFill>
+          </a:ln>
+          <a:effectLst/>
+        </p:spPr>
+        <p:style>
+          <a:lnRef idx="1">
+            <a:schemeClr val="accent1"/>
+          </a:lnRef>
+          <a:fillRef idx="3">
+            <a:schemeClr val="accent1"/>
+          </a:fillRef>
+          <a:effectRef idx="2">
+            <a:schemeClr val="accent1"/>
+          </a:effectRef>
+          <a:fontRef idx="minor">
+            <a:schemeClr val="lt1"/>
+          </a:fontRef>
+        </p:style>
+        <p:txBody>
+          <a:bodyPr rtlCol="0" anchor="ctr"/>
+          <a:lstStyle/>
+          <a:p>
+            <a:pPr algn="ctr"/>
+          </a:p>
+        </p:txBody>
+      </p:sp>
+      <p:sp>
+        <p:nvSpPr>
+          <p:cNvPr id="81" name="Oval 80"/>
+          <p:cNvSpPr/>
+          <p:nvPr/>
+        </p:nvSpPr>
+        <p:spPr>
+          <a:xfrm>
+            <a:off x="2249424" y="4413504"/>
+            <a:ext cx="73152" cy="73152"/>
+          </a:xfrm>
+          <a:prstGeom prst="ellipse">
+            <a:avLst/>
+          </a:prstGeom>
+          <a:solidFill>
+            <a:srgbClr val="222222"/>
+          </a:solidFill>
+          <a:ln w="3810">
+            <a:solidFill>
+              <a:srgbClr val="222222"/>
+            </a:solidFill>
+          </a:ln>
+          <a:effectLst/>
+        </p:spPr>
+        <p:style>
+          <a:lnRef idx="1">
+            <a:schemeClr val="accent1"/>
+          </a:lnRef>
+          <a:fillRef idx="3">
+            <a:schemeClr val="accent1"/>
+          </a:fillRef>
+          <a:effectRef idx="2">
+            <a:schemeClr val="accent1"/>
+          </a:effectRef>
+          <a:fontRef idx="minor">
+            <a:schemeClr val="lt1"/>
+          </a:fontRef>
+        </p:style>
+        <p:txBody>
+          <a:bodyPr rtlCol="0" anchor="ctr"/>
+          <a:lstStyle/>
+          <a:p>
+            <a:pPr algn="ctr"/>
+          </a:p>
+        </p:txBody>
+      </p:sp>
+      <p:sp>
+        <p:nvSpPr>
+          <p:cNvPr id="82" name="Oval 81"/>
+          <p:cNvSpPr/>
+          <p:nvPr/>
+        </p:nvSpPr>
+        <p:spPr>
+          <a:xfrm>
+            <a:off x="2249424" y="4413504"/>
+            <a:ext cx="73152" cy="73152"/>
+          </a:xfrm>
+          <a:prstGeom prst="ellipse">
+            <a:avLst/>
+          </a:prstGeom>
+          <a:solidFill>
+            <a:srgbClr val="222222"/>
+          </a:solidFill>
+          <a:ln w="3810">
+            <a:solidFill>
+              <a:srgbClr val="222222"/>
+            </a:solidFill>
+          </a:ln>
+          <a:effectLst/>
+        </p:spPr>
+        <p:style>
+          <a:lnRef idx="1">
+            <a:schemeClr val="accent1"/>
+          </a:lnRef>
+          <a:fillRef idx="3">
+            <a:schemeClr val="accent1"/>
+          </a:fillRef>
+          <a:effectRef idx="2">
+            <a:schemeClr val="accent1"/>
+          </a:effectRef>
+          <a:fontRef idx="minor">
+            <a:schemeClr val="lt1"/>
+          </a:fontRef>
+        </p:style>
+        <p:txBody>
+          <a:bodyPr rtlCol="0" anchor="ctr"/>
+          <a:lstStyle/>
+          <a:p>
+            <a:pPr algn="ctr"/>
+          </a:p>
+        </p:txBody>
+      </p:sp>
+      <p:sp>
+        <p:nvSpPr>
+          <p:cNvPr id="83" name="Oval 82"/>
+          <p:cNvSpPr/>
+          <p:nvPr/>
+        </p:nvSpPr>
+        <p:spPr>
+          <a:xfrm>
+            <a:off x="2249424" y="4413504"/>
+            <a:ext cx="73152" cy="73152"/>
+          </a:xfrm>
+          <a:prstGeom prst="ellipse">
+            <a:avLst/>
+          </a:prstGeom>
+          <a:solidFill>
+            <a:srgbClr val="222222"/>
+          </a:solidFill>
+          <a:ln w="3810">
+            <a:solidFill>
+              <a:srgbClr val="222222"/>
+            </a:solidFill>
+          </a:ln>
+          <a:effectLst/>
+        </p:spPr>
+        <p:style>
+          <a:lnRef idx="1">
+            <a:schemeClr val="accent1"/>
+          </a:lnRef>
+          <a:fillRef idx="3">
+            <a:schemeClr val="accent1"/>
+          </a:fillRef>
+          <a:effectRef idx="2">
+            <a:schemeClr val="accent1"/>
+          </a:effectRef>
+          <a:fontRef idx="minor">
+            <a:schemeClr val="lt1"/>
+          </a:fontRef>
+        </p:style>
+        <p:txBody>
+          <a:bodyPr rtlCol="0" anchor="ctr"/>
+          <a:lstStyle/>
+          <a:p>
+            <a:pPr algn="ctr"/>
+          </a:p>
+        </p:txBody>
+      </p:sp>
+      <p:sp>
+        <p:nvSpPr>
+          <p:cNvPr id="84" name="Oval 83"/>
+          <p:cNvSpPr/>
+          <p:nvPr/>
+        </p:nvSpPr>
+        <p:spPr>
+          <a:xfrm>
+            <a:off x="2249424" y="4413504"/>
+            <a:ext cx="73152" cy="73152"/>
+          </a:xfrm>
+          <a:prstGeom prst="ellipse">
+            <a:avLst/>
+          </a:prstGeom>
+          <a:solidFill>
+            <a:srgbClr val="222222"/>
+          </a:solidFill>
+          <a:ln w="3810">
+            <a:solidFill>
+              <a:srgbClr val="222222"/>
+            </a:solidFill>
+          </a:ln>
+          <a:effectLst/>
+        </p:spPr>
+        <p:style>
+          <a:lnRef idx="1">
+            <a:schemeClr val="accent1"/>
+          </a:lnRef>
+          <a:fillRef idx="3">
+            <a:schemeClr val="accent1"/>
+          </a:fillRef>
+          <a:effectRef idx="2">
+            <a:schemeClr val="accent1"/>
+          </a:effectRef>
+          <a:fontRef idx="minor">
+            <a:schemeClr val="lt1"/>
+          </a:fontRef>
+        </p:style>
+        <p:txBody>
+          <a:bodyPr rtlCol="0" anchor="ctr"/>
+          <a:lstStyle/>
+          <a:p>
+            <a:pPr algn="ctr"/>
+          </a:p>
+        </p:txBody>
+      </p:sp>
+      <p:sp>
+        <p:nvSpPr>
+          <p:cNvPr id="85" name="Oval 84"/>
+          <p:cNvSpPr/>
+          <p:nvPr/>
+        </p:nvSpPr>
+        <p:spPr>
+          <a:xfrm>
+            <a:off x="2249424" y="4413504"/>
+            <a:ext cx="73152" cy="73152"/>
+          </a:xfrm>
+          <a:prstGeom prst="ellipse">
+            <a:avLst/>
+          </a:prstGeom>
+          <a:solidFill>
+            <a:srgbClr val="222222"/>
+          </a:solidFill>
+          <a:ln w="3810">
+            <a:solidFill>
+              <a:srgbClr val="222222"/>
+            </a:solidFill>
+          </a:ln>
+          <a:effectLst/>
+        </p:spPr>
+        <p:style>
+          <a:lnRef idx="1">
+            <a:schemeClr val="accent1"/>
+          </a:lnRef>
+          <a:fillRef idx="3">
+            <a:schemeClr val="accent1"/>
+          </a:fillRef>
+          <a:effectRef idx="2">
+            <a:schemeClr val="accent1"/>
+          </a:effectRef>
+          <a:fontRef idx="minor">
+            <a:schemeClr val="lt1"/>
+          </a:fontRef>
+        </p:style>
+        <p:txBody>
+          <a:bodyPr rtlCol="0" anchor="ctr"/>
+          <a:lstStyle/>
+          <a:p>
+            <a:pPr algn="ctr"/>
+          </a:p>
+        </p:txBody>
+      </p:sp>
+      <p:sp>
+        <p:nvSpPr>
+          <p:cNvPr id="86" name="Oval 85"/>
+          <p:cNvSpPr/>
+          <p:nvPr/>
+        </p:nvSpPr>
+        <p:spPr>
+          <a:xfrm>
+            <a:off x="3925824" y="2737104"/>
+            <a:ext cx="73152" cy="73152"/>
+          </a:xfrm>
+          <a:prstGeom prst="ellipse">
+            <a:avLst/>
+          </a:prstGeom>
+          <a:solidFill>
+            <a:srgbClr val="222222"/>
+          </a:solidFill>
+          <a:ln w="3810">
+            <a:solidFill>
+              <a:srgbClr val="222222"/>
+            </a:solidFill>
+          </a:ln>
+          <a:effectLst/>
+        </p:spPr>
+        <p:style>
+          <a:lnRef idx="1">
+            <a:schemeClr val="accent1"/>
+          </a:lnRef>
+          <a:fillRef idx="3">
+            <a:schemeClr val="accent1"/>
+          </a:fillRef>
+          <a:effectRef idx="2">
+            <a:schemeClr val="accent1"/>
+          </a:effectRef>
+          <a:fontRef idx="minor">
+            <a:schemeClr val="lt1"/>
+          </a:fontRef>
+        </p:style>
+        <p:txBody>
+          <a:bodyPr rtlCol="0" anchor="ctr"/>
+          <a:lstStyle/>
+          <a:p>
+            <a:pPr algn="ctr"/>
+          </a:p>
+        </p:txBody>
+      </p:sp>
+      <p:sp>
+        <p:nvSpPr>
+          <p:cNvPr id="87" name="Oval 86"/>
+          <p:cNvSpPr/>
+          <p:nvPr/>
+        </p:nvSpPr>
+        <p:spPr>
+          <a:xfrm>
+            <a:off x="3925824" y="2737104"/>
+            <a:ext cx="73152" cy="73152"/>
+          </a:xfrm>
+          <a:prstGeom prst="ellipse">
+            <a:avLst/>
+          </a:prstGeom>
+          <a:solidFill>
+            <a:srgbClr val="222222"/>
+          </a:solidFill>
+          <a:ln w="3810">
+            <a:solidFill>
+              <a:srgbClr val="222222"/>
+            </a:solidFill>
+          </a:ln>
+          <a:effectLst/>
+        </p:spPr>
+        <p:style>
+          <a:lnRef idx="1">
+            <a:schemeClr val="accent1"/>
+          </a:lnRef>
+          <a:fillRef idx="3">
+            <a:schemeClr val="accent1"/>
+          </a:fillRef>
+          <a:effectRef idx="2">
+            <a:schemeClr val="accent1"/>
+          </a:effectRef>
+          <a:fontRef idx="minor">
+            <a:schemeClr val="lt1"/>
+          </a:fontRef>
+        </p:style>
+        <p:txBody>
+          <a:bodyPr rtlCol="0" anchor="ctr"/>
+          <a:lstStyle/>
+          <a:p>
+            <a:pPr algn="ctr"/>
+          </a:p>
+        </p:txBody>
+      </p:sp>
+      <p:sp>
+        <p:nvSpPr>
+          <p:cNvPr id="88" name="Oval 87"/>
+          <p:cNvSpPr/>
+          <p:nvPr/>
+        </p:nvSpPr>
+        <p:spPr>
+          <a:xfrm>
+            <a:off x="3925824" y="2737104"/>
+            <a:ext cx="73152" cy="73152"/>
+          </a:xfrm>
+          <a:prstGeom prst="ellipse">
+            <a:avLst/>
+          </a:prstGeom>
+          <a:solidFill>
+            <a:srgbClr val="222222"/>
+          </a:solidFill>
+          <a:ln w="3810">
+            <a:solidFill>
+              <a:srgbClr val="222222"/>
+            </a:solidFill>
+          </a:ln>
+          <a:effectLst/>
+        </p:spPr>
+        <p:style>
+          <a:lnRef idx="1">
+            <a:schemeClr val="accent1"/>
+          </a:lnRef>
+          <a:fillRef idx="3">
+            <a:schemeClr val="accent1"/>
+          </a:fillRef>
+          <a:effectRef idx="2">
+            <a:schemeClr val="accent1"/>
+          </a:effectRef>
+          <a:fontRef idx="minor">
+            <a:schemeClr val="lt1"/>
+          </a:fontRef>
+        </p:style>
+        <p:txBody>
+          <a:bodyPr rtlCol="0" anchor="ctr"/>
+          <a:lstStyle/>
+          <a:p>
+            <a:pPr algn="ctr"/>
+          </a:p>
+        </p:txBody>
+      </p:sp>
+      <p:sp>
+        <p:nvSpPr>
+          <p:cNvPr id="89" name="Oval 88"/>
+          <p:cNvSpPr/>
+          <p:nvPr/>
+        </p:nvSpPr>
+        <p:spPr>
+          <a:xfrm>
+            <a:off x="3255264" y="3072384"/>
+            <a:ext cx="73152" cy="73152"/>
+          </a:xfrm>
+          <a:prstGeom prst="ellipse">
+            <a:avLst/>
+          </a:prstGeom>
+          <a:solidFill>
+            <a:srgbClr val="222222"/>
+          </a:solidFill>
+          <a:ln w="3810">
+            <a:solidFill>
+              <a:srgbClr val="222222"/>
+            </a:solidFill>
+          </a:ln>
+          <a:effectLst/>
+        </p:spPr>
+        <p:style>
+          <a:lnRef idx="1">
+            <a:schemeClr val="accent1"/>
+          </a:lnRef>
+          <a:fillRef idx="3">
+            <a:schemeClr val="accent1"/>
+          </a:fillRef>
+          <a:effectRef idx="2">
+            <a:schemeClr val="accent1"/>
+          </a:effectRef>
+          <a:fontRef idx="minor">
+            <a:schemeClr val="lt1"/>
+          </a:fontRef>
+        </p:style>
+        <p:txBody>
+          <a:bodyPr rtlCol="0" anchor="ctr"/>
+          <a:lstStyle/>
+          <a:p>
+            <a:pPr algn="ctr"/>
+          </a:p>
+        </p:txBody>
+      </p:sp>
+      <p:sp>
+        <p:nvSpPr>
+          <p:cNvPr id="90" name="Oval 89"/>
+          <p:cNvSpPr/>
+          <p:nvPr/>
+        </p:nvSpPr>
+        <p:spPr>
+          <a:xfrm>
+            <a:off x="3255264" y="2737104"/>
+            <a:ext cx="73152" cy="73152"/>
+          </a:xfrm>
+          <a:prstGeom prst="ellipse">
+            <a:avLst/>
+          </a:prstGeom>
+          <a:solidFill>
+            <a:srgbClr val="222222"/>
+          </a:solidFill>
+          <a:ln w="3810">
+            <a:solidFill>
+              <a:srgbClr val="222222"/>
+            </a:solidFill>
+          </a:ln>
+          <a:effectLst/>
+        </p:spPr>
+        <p:style>
+          <a:lnRef idx="1">
+            <a:schemeClr val="accent1"/>
+          </a:lnRef>
+          <a:fillRef idx="3">
+            <a:schemeClr val="accent1"/>
+          </a:fillRef>
+          <a:effectRef idx="2">
+            <a:schemeClr val="accent1"/>
+          </a:effectRef>
+          <a:fontRef idx="minor">
+            <a:schemeClr val="lt1"/>
+          </a:fontRef>
+        </p:style>
+        <p:txBody>
+          <a:bodyPr rtlCol="0" anchor="ctr"/>
+          <a:lstStyle/>
+          <a:p>
+            <a:pPr algn="ctr"/>
+          </a:p>
+        </p:txBody>
+      </p:sp>
+      <p:sp>
+        <p:nvSpPr>
+          <p:cNvPr id="91" name="Oval 90"/>
+          <p:cNvSpPr/>
+          <p:nvPr/>
+        </p:nvSpPr>
+        <p:spPr>
+          <a:xfrm>
+            <a:off x="3925824" y="1060704"/>
+            <a:ext cx="73152" cy="73152"/>
+          </a:xfrm>
+          <a:prstGeom prst="ellipse">
+            <a:avLst/>
+          </a:prstGeom>
+          <a:solidFill>
+            <a:srgbClr val="222222"/>
+          </a:solidFill>
+          <a:ln w="3810">
+            <a:solidFill>
+              <a:srgbClr val="222222"/>
+            </a:solidFill>
+          </a:ln>
+          <a:effectLst/>
+        </p:spPr>
+        <p:style>
+          <a:lnRef idx="1">
+            <a:schemeClr val="accent1"/>
+          </a:lnRef>
+          <a:fillRef idx="3">
+            <a:schemeClr val="accent1"/>
+          </a:fillRef>
+          <a:effectRef idx="2">
+            <a:schemeClr val="accent1"/>
+          </a:effectRef>
+          <a:fontRef idx="minor">
+            <a:schemeClr val="lt1"/>
+          </a:fontRef>
+        </p:style>
+        <p:txBody>
+          <a:bodyPr rtlCol="0" anchor="ctr"/>
+          <a:lstStyle/>
+          <a:p>
+            <a:pPr algn="ctr"/>
+          </a:p>
+        </p:txBody>
+      </p:sp>
+      <p:sp>
+        <p:nvSpPr>
+          <p:cNvPr id="92" name="TextBox 91"/>
           <p:cNvSpPr txBox="1"/>
           <p:nvPr/>
         </p:nvSpPr>
         <p:spPr>
           <a:xfrm>
-            <a:off x="1892808" y="6062472"/>
-            <a:ext cx="731520" cy="128016"/>
+            <a:off x="4892040" y="1188720"/>
+            <a:ext cx="5029200" cy="201168"/>
           </a:xfrm>
           <a:prstGeom prst="rect">
             <a:avLst/>
@@ -16083,73 +15966,179 @@
           <a:p>
             <a:pPr algn="l"/>
             <a:r>
-              <a:rPr sz="600" b="0" i="0">
+              <a:rPr sz="800" b="1" i="0">
+                <a:solidFill>
+                  <a:srgbClr val="0A7D6E"/>
+                </a:solidFill>
+                <a:latin typeface="Arial"/>
+              </a:rPr>
+              <a:t>↗ both-coherent</a:t>
+            </a:r>
+          </a:p>
+        </p:txBody>
+      </p:sp>
+      <p:sp>
+        <p:nvSpPr>
+          <p:cNvPr id="93" name="TextBox 92"/>
+          <p:cNvSpPr txBox="1"/>
+          <p:nvPr/>
+        </p:nvSpPr>
+        <p:spPr>
+          <a:xfrm>
+            <a:off x="4892040" y="3703320"/>
+            <a:ext cx="5029200" cy="201168"/>
+          </a:xfrm>
+          <a:prstGeom prst="rect">
+            <a:avLst/>
+          </a:prstGeom>
+          <a:noFill/>
+          <a:effectLst/>
+        </p:spPr>
+        <p:txBody>
+          <a:bodyPr wrap="square" lIns="0" rIns="0" tIns="0" bIns="0" anchor="ctr">
+            <a:spAutoFit/>
+          </a:bodyPr>
+          <a:lstStyle/>
+          <a:p>
+            <a:pPr algn="l"/>
+            <a:r>
+              <a:rPr sz="800" b="0" i="0">
+                <a:solidFill>
+                  <a:srgbClr val="0A7D6E"/>
+                </a:solidFill>
+                <a:latin typeface="Arial"/>
+              </a:rPr>
+              <a:t>→ good-coherent only</a:t>
+            </a:r>
+          </a:p>
+        </p:txBody>
+      </p:sp>
+      <p:sp>
+        <p:nvSpPr>
+          <p:cNvPr id="94" name="TextBox 93"/>
+          <p:cNvSpPr txBox="1"/>
+          <p:nvPr/>
+        </p:nvSpPr>
+        <p:spPr>
+          <a:xfrm>
+            <a:off x="2377440" y="1188720"/>
+            <a:ext cx="5029200" cy="201168"/>
+          </a:xfrm>
+          <a:prstGeom prst="rect">
+            <a:avLst/>
+          </a:prstGeom>
+          <a:noFill/>
+          <a:effectLst/>
+        </p:spPr>
+        <p:txBody>
+          <a:bodyPr wrap="square" lIns="0" rIns="0" tIns="0" bIns="0" anchor="ctr">
+            <a:spAutoFit/>
+          </a:bodyPr>
+          <a:lstStyle/>
+          <a:p>
+            <a:pPr algn="l"/>
+            <a:r>
+              <a:rPr sz="800" b="0" i="0">
+                <a:solidFill>
+                  <a:srgbClr val="C53E1F"/>
+                </a:solidFill>
+                <a:latin typeface="Arial"/>
+              </a:rPr>
+              <a:t>↑ bad-coherent only</a:t>
+            </a:r>
+          </a:p>
+        </p:txBody>
+      </p:sp>
+      <p:sp>
+        <p:nvSpPr>
+          <p:cNvPr id="95" name="TextBox 94"/>
+          <p:cNvSpPr txBox="1"/>
+          <p:nvPr/>
+        </p:nvSpPr>
+        <p:spPr>
+          <a:xfrm>
+            <a:off x="2377440" y="3703320"/>
+            <a:ext cx="5029200" cy="201168"/>
+          </a:xfrm>
+          <a:prstGeom prst="rect">
+            <a:avLst/>
+          </a:prstGeom>
+          <a:noFill/>
+          <a:effectLst/>
+        </p:spPr>
+        <p:txBody>
+          <a:bodyPr wrap="square" lIns="0" rIns="0" tIns="0" bIns="0" anchor="ctr">
+            <a:spAutoFit/>
+          </a:bodyPr>
+          <a:lstStyle/>
+          <a:p>
+            <a:pPr algn="l"/>
+            <a:r>
+              <a:rPr sz="800" b="0" i="0">
                 <a:solidFill>
                   <a:srgbClr val="BBBBBB"/>
                 </a:solidFill>
                 <a:latin typeface="Arial"/>
               </a:rPr>
-              <a:t>IGHV3-33</a:t>
-            </a:r>
-          </a:p>
-        </p:txBody>
-      </p:sp>
-      <p:sp>
-        <p:nvSpPr>
-          <p:cNvPr id="105" name="Oval 104"/>
-          <p:cNvSpPr/>
-          <p:nvPr/>
-        </p:nvSpPr>
-        <p:spPr>
-          <a:xfrm>
-            <a:off x="3621024" y="4413504"/>
-            <a:ext cx="73152" cy="73152"/>
-          </a:xfrm>
-          <a:prstGeom prst="ellipse">
-            <a:avLst/>
-          </a:prstGeom>
-          <a:solidFill>
-            <a:srgbClr val="222222"/>
-          </a:solidFill>
-          <a:ln w="3810">
-            <a:solidFill>
-              <a:srgbClr val="222222"/>
-            </a:solidFill>
-          </a:ln>
-          <a:effectLst/>
-        </p:spPr>
-        <p:style>
-          <a:lnRef idx="1">
-            <a:schemeClr val="accent1"/>
-          </a:lnRef>
-          <a:fillRef idx="3">
-            <a:schemeClr val="accent1"/>
-          </a:fillRef>
-          <a:effectRef idx="2">
-            <a:schemeClr val="accent1"/>
-          </a:effectRef>
-          <a:fontRef idx="minor">
-            <a:schemeClr val="lt1"/>
-          </a:fontRef>
-        </p:style>
-        <p:txBody>
-          <a:bodyPr rtlCol="0" anchor="ctr"/>
-          <a:lstStyle/>
-          <a:p>
-            <a:pPr algn="ctr"/>
-          </a:p>
-        </p:txBody>
-      </p:sp>
-      <p:sp>
-        <p:nvSpPr>
-          <p:cNvPr id="106" name="TextBox 105"/>
+              <a:t>↙ stochastic</a:t>
+            </a:r>
+          </a:p>
+        </p:txBody>
+      </p:sp>
+      <p:sp>
+        <p:nvSpPr>
+          <p:cNvPr id="96" name="5-Point Star 95"/>
+          <p:cNvSpPr/>
+          <p:nvPr/>
+        </p:nvSpPr>
+        <p:spPr>
+          <a:xfrm>
+            <a:off x="7790688" y="1207008"/>
+            <a:ext cx="146304" cy="146304"/>
+          </a:xfrm>
+          <a:prstGeom prst="star5">
+            <a:avLst/>
+          </a:prstGeom>
+          <a:solidFill>
+            <a:srgbClr val="D4A300"/>
+          </a:solidFill>
+          <a:ln>
+            <a:noFill/>
+          </a:ln>
+          <a:effectLst/>
+        </p:spPr>
+        <p:style>
+          <a:lnRef idx="1">
+            <a:schemeClr val="accent1"/>
+          </a:lnRef>
+          <a:fillRef idx="3">
+            <a:schemeClr val="accent1"/>
+          </a:fillRef>
+          <a:effectRef idx="2">
+            <a:schemeClr val="accent1"/>
+          </a:effectRef>
+          <a:fontRef idx="minor">
+            <a:schemeClr val="lt1"/>
+          </a:fontRef>
+        </p:style>
+        <p:txBody>
+          <a:bodyPr rtlCol="0" anchor="ctr"/>
+          <a:lstStyle/>
+          <a:p>
+            <a:pPr algn="ctr"/>
+          </a:p>
+        </p:txBody>
+      </p:sp>
+      <p:sp>
+        <p:nvSpPr>
+          <p:cNvPr id="97" name="TextBox 96"/>
           <p:cNvSpPr txBox="1"/>
           <p:nvPr/>
         </p:nvSpPr>
         <p:spPr>
           <a:xfrm>
-            <a:off x="3721608" y="4386072"/>
-            <a:ext cx="731520" cy="128016"/>
+            <a:off x="8001000" y="1188720"/>
+            <a:ext cx="4114800" cy="228600"/>
           </a:xfrm>
           <a:prstGeom prst="rect">
             <a:avLst/>
@@ -16165,1423 +16154,13 @@
           <a:p>
             <a:pPr algn="l"/>
             <a:r>
-              <a:rPr sz="600" b="0" i="0">
+              <a:rPr sz="900" b="1" i="0">
                 <a:solidFill>
-                  <a:srgbClr val="BBBBBB"/>
+                  <a:srgbClr val="D4A300"/>
                 </a:solidFill>
                 <a:latin typeface="Arial"/>
               </a:rPr>
-              <a:t>IGHV5-10-1</a:t>
-            </a:r>
-          </a:p>
-        </p:txBody>
-      </p:sp>
-      <p:sp>
-        <p:nvSpPr>
-          <p:cNvPr id="107" name="Oval 106"/>
-          <p:cNvSpPr/>
-          <p:nvPr/>
-        </p:nvSpPr>
-        <p:spPr>
-          <a:xfrm>
-            <a:off x="3621024" y="4413504"/>
-            <a:ext cx="73152" cy="73152"/>
-          </a:xfrm>
-          <a:prstGeom prst="ellipse">
-            <a:avLst/>
-          </a:prstGeom>
-          <a:solidFill>
-            <a:srgbClr val="222222"/>
-          </a:solidFill>
-          <a:ln w="3810">
-            <a:solidFill>
-              <a:srgbClr val="222222"/>
-            </a:solidFill>
-          </a:ln>
-          <a:effectLst/>
-        </p:spPr>
-        <p:style>
-          <a:lnRef idx="1">
-            <a:schemeClr val="accent1"/>
-          </a:lnRef>
-          <a:fillRef idx="3">
-            <a:schemeClr val="accent1"/>
-          </a:fillRef>
-          <a:effectRef idx="2">
-            <a:schemeClr val="accent1"/>
-          </a:effectRef>
-          <a:fontRef idx="minor">
-            <a:schemeClr val="lt1"/>
-          </a:fontRef>
-        </p:style>
-        <p:txBody>
-          <a:bodyPr rtlCol="0" anchor="ctr"/>
-          <a:lstStyle/>
-          <a:p>
-            <a:pPr algn="ctr"/>
-          </a:p>
-        </p:txBody>
-      </p:sp>
-      <p:sp>
-        <p:nvSpPr>
-          <p:cNvPr id="108" name="TextBox 107"/>
-          <p:cNvSpPr txBox="1"/>
-          <p:nvPr/>
-        </p:nvSpPr>
-        <p:spPr>
-          <a:xfrm>
-            <a:off x="3721608" y="4386072"/>
-            <a:ext cx="731520" cy="128016"/>
-          </a:xfrm>
-          <a:prstGeom prst="rect">
-            <a:avLst/>
-          </a:prstGeom>
-          <a:noFill/>
-          <a:effectLst/>
-        </p:spPr>
-        <p:txBody>
-          <a:bodyPr wrap="square" lIns="0" rIns="0" tIns="0" bIns="0" anchor="ctr">
-            <a:spAutoFit/>
-          </a:bodyPr>
-          <a:lstStyle/>
-          <a:p>
-            <a:pPr algn="l"/>
-            <a:r>
-              <a:rPr sz="600" b="0" i="0">
-                <a:solidFill>
-                  <a:srgbClr val="BBBBBB"/>
-                </a:solidFill>
-                <a:latin typeface="Arial"/>
-              </a:rPr>
-              <a:t>IGHV4-4</a:t>
-            </a:r>
-          </a:p>
-        </p:txBody>
-      </p:sp>
-      <p:sp>
-        <p:nvSpPr>
-          <p:cNvPr id="109" name="Oval 108"/>
-          <p:cNvSpPr/>
-          <p:nvPr/>
-        </p:nvSpPr>
-        <p:spPr>
-          <a:xfrm>
-            <a:off x="3621024" y="4413504"/>
-            <a:ext cx="73152" cy="73152"/>
-          </a:xfrm>
-          <a:prstGeom prst="ellipse">
-            <a:avLst/>
-          </a:prstGeom>
-          <a:solidFill>
-            <a:srgbClr val="222222"/>
-          </a:solidFill>
-          <a:ln w="3810">
-            <a:solidFill>
-              <a:srgbClr val="222222"/>
-            </a:solidFill>
-          </a:ln>
-          <a:effectLst/>
-        </p:spPr>
-        <p:style>
-          <a:lnRef idx="1">
-            <a:schemeClr val="accent1"/>
-          </a:lnRef>
-          <a:fillRef idx="3">
-            <a:schemeClr val="accent1"/>
-          </a:fillRef>
-          <a:effectRef idx="2">
-            <a:schemeClr val="accent1"/>
-          </a:effectRef>
-          <a:fontRef idx="minor">
-            <a:schemeClr val="lt1"/>
-          </a:fontRef>
-        </p:style>
-        <p:txBody>
-          <a:bodyPr rtlCol="0" anchor="ctr"/>
-          <a:lstStyle/>
-          <a:p>
-            <a:pPr algn="ctr"/>
-          </a:p>
-        </p:txBody>
-      </p:sp>
-      <p:sp>
-        <p:nvSpPr>
-          <p:cNvPr id="110" name="TextBox 109"/>
-          <p:cNvSpPr txBox="1"/>
-          <p:nvPr/>
-        </p:nvSpPr>
-        <p:spPr>
-          <a:xfrm>
-            <a:off x="3721608" y="4386072"/>
-            <a:ext cx="731520" cy="128016"/>
-          </a:xfrm>
-          <a:prstGeom prst="rect">
-            <a:avLst/>
-          </a:prstGeom>
-          <a:noFill/>
-          <a:effectLst/>
-        </p:spPr>
-        <p:txBody>
-          <a:bodyPr wrap="square" lIns="0" rIns="0" tIns="0" bIns="0" anchor="ctr">
-            <a:spAutoFit/>
-          </a:bodyPr>
-          <a:lstStyle/>
-          <a:p>
-            <a:pPr algn="l"/>
-            <a:r>
-              <a:rPr sz="600" b="0" i="0">
-                <a:solidFill>
-                  <a:srgbClr val="BBBBBB"/>
-                </a:solidFill>
-                <a:latin typeface="Arial"/>
-              </a:rPr>
-              <a:t>IGHV4-34</a:t>
-            </a:r>
-          </a:p>
-        </p:txBody>
-      </p:sp>
-      <p:sp>
-        <p:nvSpPr>
-          <p:cNvPr id="111" name="Oval 110"/>
-          <p:cNvSpPr/>
-          <p:nvPr/>
-        </p:nvSpPr>
-        <p:spPr>
-          <a:xfrm>
-            <a:off x="1792224" y="5084064"/>
-            <a:ext cx="73152" cy="73152"/>
-          </a:xfrm>
-          <a:prstGeom prst="ellipse">
-            <a:avLst/>
-          </a:prstGeom>
-          <a:solidFill>
-            <a:srgbClr val="222222"/>
-          </a:solidFill>
-          <a:ln w="3810">
-            <a:solidFill>
-              <a:srgbClr val="222222"/>
-            </a:solidFill>
-          </a:ln>
-          <a:effectLst/>
-        </p:spPr>
-        <p:style>
-          <a:lnRef idx="1">
-            <a:schemeClr val="accent1"/>
-          </a:lnRef>
-          <a:fillRef idx="3">
-            <a:schemeClr val="accent1"/>
-          </a:fillRef>
-          <a:effectRef idx="2">
-            <a:schemeClr val="accent1"/>
-          </a:effectRef>
-          <a:fontRef idx="minor">
-            <a:schemeClr val="lt1"/>
-          </a:fontRef>
-        </p:style>
-        <p:txBody>
-          <a:bodyPr rtlCol="0" anchor="ctr"/>
-          <a:lstStyle/>
-          <a:p>
-            <a:pPr algn="ctr"/>
-          </a:p>
-        </p:txBody>
-      </p:sp>
-      <p:sp>
-        <p:nvSpPr>
-          <p:cNvPr id="112" name="TextBox 111"/>
-          <p:cNvSpPr txBox="1"/>
-          <p:nvPr/>
-        </p:nvSpPr>
-        <p:spPr>
-          <a:xfrm>
-            <a:off x="1892808" y="5056632"/>
-            <a:ext cx="731520" cy="128016"/>
-          </a:xfrm>
-          <a:prstGeom prst="rect">
-            <a:avLst/>
-          </a:prstGeom>
-          <a:noFill/>
-          <a:effectLst/>
-        </p:spPr>
-        <p:txBody>
-          <a:bodyPr wrap="square" lIns="0" rIns="0" tIns="0" bIns="0" anchor="ctr">
-            <a:spAutoFit/>
-          </a:bodyPr>
-          <a:lstStyle/>
-          <a:p>
-            <a:pPr algn="l"/>
-            <a:r>
-              <a:rPr sz="600" b="0" i="0">
-                <a:solidFill>
-                  <a:srgbClr val="BBBBBB"/>
-                </a:solidFill>
-                <a:latin typeface="Arial"/>
-              </a:rPr>
-              <a:t>IGHV4-38-2</a:t>
-            </a:r>
-          </a:p>
-        </p:txBody>
-      </p:sp>
-      <p:sp>
-        <p:nvSpPr>
-          <p:cNvPr id="113" name="Oval 112"/>
-          <p:cNvSpPr/>
-          <p:nvPr/>
-        </p:nvSpPr>
-        <p:spPr>
-          <a:xfrm>
-            <a:off x="3621024" y="3072384"/>
-            <a:ext cx="73152" cy="73152"/>
-          </a:xfrm>
-          <a:prstGeom prst="ellipse">
-            <a:avLst/>
-          </a:prstGeom>
-          <a:solidFill>
-            <a:srgbClr val="222222"/>
-          </a:solidFill>
-          <a:ln w="3810">
-            <a:solidFill>
-              <a:srgbClr val="222222"/>
-            </a:solidFill>
-          </a:ln>
-          <a:effectLst/>
-        </p:spPr>
-        <p:style>
-          <a:lnRef idx="1">
-            <a:schemeClr val="accent1"/>
-          </a:lnRef>
-          <a:fillRef idx="3">
-            <a:schemeClr val="accent1"/>
-          </a:fillRef>
-          <a:effectRef idx="2">
-            <a:schemeClr val="accent1"/>
-          </a:effectRef>
-          <a:fontRef idx="minor">
-            <a:schemeClr val="lt1"/>
-          </a:fontRef>
-        </p:style>
-        <p:txBody>
-          <a:bodyPr rtlCol="0" anchor="ctr"/>
-          <a:lstStyle/>
-          <a:p>
-            <a:pPr algn="ctr"/>
-          </a:p>
-        </p:txBody>
-      </p:sp>
-      <p:sp>
-        <p:nvSpPr>
-          <p:cNvPr id="114" name="TextBox 113"/>
-          <p:cNvSpPr txBox="1"/>
-          <p:nvPr/>
-        </p:nvSpPr>
-        <p:spPr>
-          <a:xfrm>
-            <a:off x="3721608" y="3044952"/>
-            <a:ext cx="731520" cy="128016"/>
-          </a:xfrm>
-          <a:prstGeom prst="rect">
-            <a:avLst/>
-          </a:prstGeom>
-          <a:noFill/>
-          <a:effectLst/>
-        </p:spPr>
-        <p:txBody>
-          <a:bodyPr wrap="square" lIns="0" rIns="0" tIns="0" bIns="0" anchor="ctr">
-            <a:spAutoFit/>
-          </a:bodyPr>
-          <a:lstStyle/>
-          <a:p>
-            <a:pPr algn="l"/>
-            <a:r>
-              <a:rPr sz="600" b="0" i="0">
-                <a:solidFill>
-                  <a:srgbClr val="BBBBBB"/>
-                </a:solidFill>
-                <a:latin typeface="Arial"/>
-              </a:rPr>
-              <a:t>IGHV5-78</a:t>
-            </a:r>
-          </a:p>
-        </p:txBody>
-      </p:sp>
-      <p:sp>
-        <p:nvSpPr>
-          <p:cNvPr id="115" name="Oval 114"/>
-          <p:cNvSpPr/>
-          <p:nvPr/>
-        </p:nvSpPr>
-        <p:spPr>
-          <a:xfrm>
-            <a:off x="1792224" y="4413504"/>
-            <a:ext cx="73152" cy="73152"/>
-          </a:xfrm>
-          <a:prstGeom prst="ellipse">
-            <a:avLst/>
-          </a:prstGeom>
-          <a:solidFill>
-            <a:srgbClr val="222222"/>
-          </a:solidFill>
-          <a:ln w="3810">
-            <a:solidFill>
-              <a:srgbClr val="222222"/>
-            </a:solidFill>
-          </a:ln>
-          <a:effectLst/>
-        </p:spPr>
-        <p:style>
-          <a:lnRef idx="1">
-            <a:schemeClr val="accent1"/>
-          </a:lnRef>
-          <a:fillRef idx="3">
-            <a:schemeClr val="accent1"/>
-          </a:fillRef>
-          <a:effectRef idx="2">
-            <a:schemeClr val="accent1"/>
-          </a:effectRef>
-          <a:fontRef idx="minor">
-            <a:schemeClr val="lt1"/>
-          </a:fontRef>
-        </p:style>
-        <p:txBody>
-          <a:bodyPr rtlCol="0" anchor="ctr"/>
-          <a:lstStyle/>
-          <a:p>
-            <a:pPr algn="ctr"/>
-          </a:p>
-        </p:txBody>
-      </p:sp>
-      <p:sp>
-        <p:nvSpPr>
-          <p:cNvPr id="116" name="TextBox 115"/>
-          <p:cNvSpPr txBox="1"/>
-          <p:nvPr/>
-        </p:nvSpPr>
-        <p:spPr>
-          <a:xfrm>
-            <a:off x="1892808" y="4386072"/>
-            <a:ext cx="731520" cy="128016"/>
-          </a:xfrm>
-          <a:prstGeom prst="rect">
-            <a:avLst/>
-          </a:prstGeom>
-          <a:noFill/>
-          <a:effectLst/>
-        </p:spPr>
-        <p:txBody>
-          <a:bodyPr wrap="square" lIns="0" rIns="0" tIns="0" bIns="0" anchor="ctr">
-            <a:spAutoFit/>
-          </a:bodyPr>
-          <a:lstStyle/>
-          <a:p>
-            <a:pPr algn="l"/>
-            <a:r>
-              <a:rPr sz="600" b="0" i="0">
-                <a:solidFill>
-                  <a:srgbClr val="BBBBBB"/>
-                </a:solidFill>
-                <a:latin typeface="Arial"/>
-              </a:rPr>
-              <a:t>IGHV2-70</a:t>
-            </a:r>
-          </a:p>
-        </p:txBody>
-      </p:sp>
-      <p:sp>
-        <p:nvSpPr>
-          <p:cNvPr id="117" name="Oval 116"/>
-          <p:cNvSpPr/>
-          <p:nvPr/>
-        </p:nvSpPr>
-        <p:spPr>
-          <a:xfrm>
-            <a:off x="1792224" y="4413504"/>
-            <a:ext cx="73152" cy="73152"/>
-          </a:xfrm>
-          <a:prstGeom prst="ellipse">
-            <a:avLst/>
-          </a:prstGeom>
-          <a:solidFill>
-            <a:srgbClr val="222222"/>
-          </a:solidFill>
-          <a:ln w="3810">
-            <a:solidFill>
-              <a:srgbClr val="222222"/>
-            </a:solidFill>
-          </a:ln>
-          <a:effectLst/>
-        </p:spPr>
-        <p:style>
-          <a:lnRef idx="1">
-            <a:schemeClr val="accent1"/>
-          </a:lnRef>
-          <a:fillRef idx="3">
-            <a:schemeClr val="accent1"/>
-          </a:fillRef>
-          <a:effectRef idx="2">
-            <a:schemeClr val="accent1"/>
-          </a:effectRef>
-          <a:fontRef idx="minor">
-            <a:schemeClr val="lt1"/>
-          </a:fontRef>
-        </p:style>
-        <p:txBody>
-          <a:bodyPr rtlCol="0" anchor="ctr"/>
-          <a:lstStyle/>
-          <a:p>
-            <a:pPr algn="ctr"/>
-          </a:p>
-        </p:txBody>
-      </p:sp>
-      <p:sp>
-        <p:nvSpPr>
-          <p:cNvPr id="118" name="TextBox 117"/>
-          <p:cNvSpPr txBox="1"/>
-          <p:nvPr/>
-        </p:nvSpPr>
-        <p:spPr>
-          <a:xfrm>
-            <a:off x="1892808" y="4386072"/>
-            <a:ext cx="731520" cy="128016"/>
-          </a:xfrm>
-          <a:prstGeom prst="rect">
-            <a:avLst/>
-          </a:prstGeom>
-          <a:noFill/>
-          <a:effectLst/>
-        </p:spPr>
-        <p:txBody>
-          <a:bodyPr wrap="square" lIns="0" rIns="0" tIns="0" bIns="0" anchor="ctr">
-            <a:spAutoFit/>
-          </a:bodyPr>
-          <a:lstStyle/>
-          <a:p>
-            <a:pPr algn="l"/>
-            <a:r>
-              <a:rPr sz="600" b="0" i="0">
-                <a:solidFill>
-                  <a:srgbClr val="BBBBBB"/>
-                </a:solidFill>
-                <a:latin typeface="Arial"/>
-              </a:rPr>
-              <a:t>IGHV3-30</a:t>
-            </a:r>
-          </a:p>
-        </p:txBody>
-      </p:sp>
-      <p:sp>
-        <p:nvSpPr>
-          <p:cNvPr id="119" name="Oval 118"/>
-          <p:cNvSpPr/>
-          <p:nvPr/>
-        </p:nvSpPr>
-        <p:spPr>
-          <a:xfrm>
-            <a:off x="1792224" y="4413504"/>
-            <a:ext cx="73152" cy="73152"/>
-          </a:xfrm>
-          <a:prstGeom prst="ellipse">
-            <a:avLst/>
-          </a:prstGeom>
-          <a:solidFill>
-            <a:srgbClr val="222222"/>
-          </a:solidFill>
-          <a:ln w="3810">
-            <a:solidFill>
-              <a:srgbClr val="222222"/>
-            </a:solidFill>
-          </a:ln>
-          <a:effectLst/>
-        </p:spPr>
-        <p:style>
-          <a:lnRef idx="1">
-            <a:schemeClr val="accent1"/>
-          </a:lnRef>
-          <a:fillRef idx="3">
-            <a:schemeClr val="accent1"/>
-          </a:fillRef>
-          <a:effectRef idx="2">
-            <a:schemeClr val="accent1"/>
-          </a:effectRef>
-          <a:fontRef idx="minor">
-            <a:schemeClr val="lt1"/>
-          </a:fontRef>
-        </p:style>
-        <p:txBody>
-          <a:bodyPr rtlCol="0" anchor="ctr"/>
-          <a:lstStyle/>
-          <a:p>
-            <a:pPr algn="ctr"/>
-          </a:p>
-        </p:txBody>
-      </p:sp>
-      <p:sp>
-        <p:nvSpPr>
-          <p:cNvPr id="120" name="TextBox 119"/>
-          <p:cNvSpPr txBox="1"/>
-          <p:nvPr/>
-        </p:nvSpPr>
-        <p:spPr>
-          <a:xfrm>
-            <a:off x="1892808" y="4386072"/>
-            <a:ext cx="731520" cy="128016"/>
-          </a:xfrm>
-          <a:prstGeom prst="rect">
-            <a:avLst/>
-          </a:prstGeom>
-          <a:noFill/>
-          <a:effectLst/>
-        </p:spPr>
-        <p:txBody>
-          <a:bodyPr wrap="square" lIns="0" rIns="0" tIns="0" bIns="0" anchor="ctr">
-            <a:spAutoFit/>
-          </a:bodyPr>
-          <a:lstStyle/>
-          <a:p>
-            <a:pPr algn="l"/>
-            <a:r>
-              <a:rPr sz="600" b="0" i="0">
-                <a:solidFill>
-                  <a:srgbClr val="BBBBBB"/>
-                </a:solidFill>
-                <a:latin typeface="Arial"/>
-              </a:rPr>
-              <a:t>IGHV3-21</a:t>
-            </a:r>
-          </a:p>
-        </p:txBody>
-      </p:sp>
-      <p:sp>
-        <p:nvSpPr>
-          <p:cNvPr id="121" name="Oval 120"/>
-          <p:cNvSpPr/>
-          <p:nvPr/>
-        </p:nvSpPr>
-        <p:spPr>
-          <a:xfrm>
-            <a:off x="1792224" y="4413504"/>
-            <a:ext cx="73152" cy="73152"/>
-          </a:xfrm>
-          <a:prstGeom prst="ellipse">
-            <a:avLst/>
-          </a:prstGeom>
-          <a:solidFill>
-            <a:srgbClr val="222222"/>
-          </a:solidFill>
-          <a:ln w="3810">
-            <a:solidFill>
-              <a:srgbClr val="222222"/>
-            </a:solidFill>
-          </a:ln>
-          <a:effectLst/>
-        </p:spPr>
-        <p:style>
-          <a:lnRef idx="1">
-            <a:schemeClr val="accent1"/>
-          </a:lnRef>
-          <a:fillRef idx="3">
-            <a:schemeClr val="accent1"/>
-          </a:fillRef>
-          <a:effectRef idx="2">
-            <a:schemeClr val="accent1"/>
-          </a:effectRef>
-          <a:fontRef idx="minor">
-            <a:schemeClr val="lt1"/>
-          </a:fontRef>
-        </p:style>
-        <p:txBody>
-          <a:bodyPr rtlCol="0" anchor="ctr"/>
-          <a:lstStyle/>
-          <a:p>
-            <a:pPr algn="ctr"/>
-          </a:p>
-        </p:txBody>
-      </p:sp>
-      <p:sp>
-        <p:nvSpPr>
-          <p:cNvPr id="122" name="TextBox 121"/>
-          <p:cNvSpPr txBox="1"/>
-          <p:nvPr/>
-        </p:nvSpPr>
-        <p:spPr>
-          <a:xfrm>
-            <a:off x="1892808" y="4386072"/>
-            <a:ext cx="731520" cy="128016"/>
-          </a:xfrm>
-          <a:prstGeom prst="rect">
-            <a:avLst/>
-          </a:prstGeom>
-          <a:noFill/>
-          <a:effectLst/>
-        </p:spPr>
-        <p:txBody>
-          <a:bodyPr wrap="square" lIns="0" rIns="0" tIns="0" bIns="0" anchor="ctr">
-            <a:spAutoFit/>
-          </a:bodyPr>
-          <a:lstStyle/>
-          <a:p>
-            <a:pPr algn="l"/>
-            <a:r>
-              <a:rPr sz="600" b="0" i="0">
-                <a:solidFill>
-                  <a:srgbClr val="BBBBBB"/>
-                </a:solidFill>
-                <a:latin typeface="Arial"/>
-              </a:rPr>
-              <a:t>IGHV3-47</a:t>
-            </a:r>
-          </a:p>
-        </p:txBody>
-      </p:sp>
-      <p:sp>
-        <p:nvSpPr>
-          <p:cNvPr id="123" name="Oval 122"/>
-          <p:cNvSpPr/>
-          <p:nvPr/>
-        </p:nvSpPr>
-        <p:spPr>
-          <a:xfrm>
-            <a:off x="1792224" y="4413504"/>
-            <a:ext cx="73152" cy="73152"/>
-          </a:xfrm>
-          <a:prstGeom prst="ellipse">
-            <a:avLst/>
-          </a:prstGeom>
-          <a:solidFill>
-            <a:srgbClr val="222222"/>
-          </a:solidFill>
-          <a:ln w="3810">
-            <a:solidFill>
-              <a:srgbClr val="222222"/>
-            </a:solidFill>
-          </a:ln>
-          <a:effectLst/>
-        </p:spPr>
-        <p:style>
-          <a:lnRef idx="1">
-            <a:schemeClr val="accent1"/>
-          </a:lnRef>
-          <a:fillRef idx="3">
-            <a:schemeClr val="accent1"/>
-          </a:fillRef>
-          <a:effectRef idx="2">
-            <a:schemeClr val="accent1"/>
-          </a:effectRef>
-          <a:fontRef idx="minor">
-            <a:schemeClr val="lt1"/>
-          </a:fontRef>
-        </p:style>
-        <p:txBody>
-          <a:bodyPr rtlCol="0" anchor="ctr"/>
-          <a:lstStyle/>
-          <a:p>
-            <a:pPr algn="ctr"/>
-          </a:p>
-        </p:txBody>
-      </p:sp>
-      <p:sp>
-        <p:nvSpPr>
-          <p:cNvPr id="124" name="TextBox 123"/>
-          <p:cNvSpPr txBox="1"/>
-          <p:nvPr/>
-        </p:nvSpPr>
-        <p:spPr>
-          <a:xfrm>
-            <a:off x="1892808" y="4386072"/>
-            <a:ext cx="731520" cy="128016"/>
-          </a:xfrm>
-          <a:prstGeom prst="rect">
-            <a:avLst/>
-          </a:prstGeom>
-          <a:noFill/>
-          <a:effectLst/>
-        </p:spPr>
-        <p:txBody>
-          <a:bodyPr wrap="square" lIns="0" rIns="0" tIns="0" bIns="0" anchor="ctr">
-            <a:spAutoFit/>
-          </a:bodyPr>
-          <a:lstStyle/>
-          <a:p>
-            <a:pPr algn="l"/>
-            <a:r>
-              <a:rPr sz="600" b="0" i="0">
-                <a:solidFill>
-                  <a:srgbClr val="BBBBBB"/>
-                </a:solidFill>
-                <a:latin typeface="Arial"/>
-              </a:rPr>
-              <a:t>IGHV3-43</a:t>
-            </a:r>
-          </a:p>
-        </p:txBody>
-      </p:sp>
-      <p:sp>
-        <p:nvSpPr>
-          <p:cNvPr id="125" name="Oval 124"/>
-          <p:cNvSpPr/>
-          <p:nvPr/>
-        </p:nvSpPr>
-        <p:spPr>
-          <a:xfrm>
-            <a:off x="3621024" y="2737104"/>
-            <a:ext cx="73152" cy="73152"/>
-          </a:xfrm>
-          <a:prstGeom prst="ellipse">
-            <a:avLst/>
-          </a:prstGeom>
-          <a:solidFill>
-            <a:srgbClr val="222222"/>
-          </a:solidFill>
-          <a:ln w="3810">
-            <a:solidFill>
-              <a:srgbClr val="222222"/>
-            </a:solidFill>
-          </a:ln>
-          <a:effectLst/>
-        </p:spPr>
-        <p:style>
-          <a:lnRef idx="1">
-            <a:schemeClr val="accent1"/>
-          </a:lnRef>
-          <a:fillRef idx="3">
-            <a:schemeClr val="accent1"/>
-          </a:fillRef>
-          <a:effectRef idx="2">
-            <a:schemeClr val="accent1"/>
-          </a:effectRef>
-          <a:fontRef idx="minor">
-            <a:schemeClr val="lt1"/>
-          </a:fontRef>
-        </p:style>
-        <p:txBody>
-          <a:bodyPr rtlCol="0" anchor="ctr"/>
-          <a:lstStyle/>
-          <a:p>
-            <a:pPr algn="ctr"/>
-          </a:p>
-        </p:txBody>
-      </p:sp>
-      <p:sp>
-        <p:nvSpPr>
-          <p:cNvPr id="126" name="TextBox 125"/>
-          <p:cNvSpPr txBox="1"/>
-          <p:nvPr/>
-        </p:nvSpPr>
-        <p:spPr>
-          <a:xfrm>
-            <a:off x="3721608" y="2709672"/>
-            <a:ext cx="731520" cy="128016"/>
-          </a:xfrm>
-          <a:prstGeom prst="rect">
-            <a:avLst/>
-          </a:prstGeom>
-          <a:noFill/>
-          <a:effectLst/>
-        </p:spPr>
-        <p:txBody>
-          <a:bodyPr wrap="square" lIns="0" rIns="0" tIns="0" bIns="0" anchor="ctr">
-            <a:spAutoFit/>
-          </a:bodyPr>
-          <a:lstStyle/>
-          <a:p>
-            <a:pPr algn="l"/>
-            <a:r>
-              <a:rPr sz="600" b="0" i="0">
-                <a:solidFill>
-                  <a:srgbClr val="BBBBBB"/>
-                </a:solidFill>
-                <a:latin typeface="Arial"/>
-              </a:rPr>
-              <a:t>IGHV1-8</a:t>
-            </a:r>
-          </a:p>
-        </p:txBody>
-      </p:sp>
-      <p:sp>
-        <p:nvSpPr>
-          <p:cNvPr id="127" name="Oval 126"/>
-          <p:cNvSpPr/>
-          <p:nvPr/>
-        </p:nvSpPr>
-        <p:spPr>
-          <a:xfrm>
-            <a:off x="3621024" y="2737104"/>
-            <a:ext cx="73152" cy="73152"/>
-          </a:xfrm>
-          <a:prstGeom prst="ellipse">
-            <a:avLst/>
-          </a:prstGeom>
-          <a:solidFill>
-            <a:srgbClr val="222222"/>
-          </a:solidFill>
-          <a:ln w="3810">
-            <a:solidFill>
-              <a:srgbClr val="222222"/>
-            </a:solidFill>
-          </a:ln>
-          <a:effectLst/>
-        </p:spPr>
-        <p:style>
-          <a:lnRef idx="1">
-            <a:schemeClr val="accent1"/>
-          </a:lnRef>
-          <a:fillRef idx="3">
-            <a:schemeClr val="accent1"/>
-          </a:fillRef>
-          <a:effectRef idx="2">
-            <a:schemeClr val="accent1"/>
-          </a:effectRef>
-          <a:fontRef idx="minor">
-            <a:schemeClr val="lt1"/>
-          </a:fontRef>
-        </p:style>
-        <p:txBody>
-          <a:bodyPr rtlCol="0" anchor="ctr"/>
-          <a:lstStyle/>
-          <a:p>
-            <a:pPr algn="ctr"/>
-          </a:p>
-        </p:txBody>
-      </p:sp>
-      <p:sp>
-        <p:nvSpPr>
-          <p:cNvPr id="128" name="TextBox 127"/>
-          <p:cNvSpPr txBox="1"/>
-          <p:nvPr/>
-        </p:nvSpPr>
-        <p:spPr>
-          <a:xfrm>
-            <a:off x="3721608" y="2709672"/>
-            <a:ext cx="731520" cy="128016"/>
-          </a:xfrm>
-          <a:prstGeom prst="rect">
-            <a:avLst/>
-          </a:prstGeom>
-          <a:noFill/>
-          <a:effectLst/>
-        </p:spPr>
-        <p:txBody>
-          <a:bodyPr wrap="square" lIns="0" rIns="0" tIns="0" bIns="0" anchor="ctr">
-            <a:spAutoFit/>
-          </a:bodyPr>
-          <a:lstStyle/>
-          <a:p>
-            <a:pPr algn="l"/>
-            <a:r>
-              <a:rPr sz="600" b="0" i="0">
-                <a:solidFill>
-                  <a:srgbClr val="BBBBBB"/>
-                </a:solidFill>
-                <a:latin typeface="Arial"/>
-              </a:rPr>
-              <a:t>IGHV3-11</a:t>
-            </a:r>
-          </a:p>
-        </p:txBody>
-      </p:sp>
-      <p:sp>
-        <p:nvSpPr>
-          <p:cNvPr id="129" name="Oval 128"/>
-          <p:cNvSpPr/>
-          <p:nvPr/>
-        </p:nvSpPr>
-        <p:spPr>
-          <a:xfrm>
-            <a:off x="3621024" y="2737104"/>
-            <a:ext cx="73152" cy="73152"/>
-          </a:xfrm>
-          <a:prstGeom prst="ellipse">
-            <a:avLst/>
-          </a:prstGeom>
-          <a:solidFill>
-            <a:srgbClr val="222222"/>
-          </a:solidFill>
-          <a:ln w="3810">
-            <a:solidFill>
-              <a:srgbClr val="222222"/>
-            </a:solidFill>
-          </a:ln>
-          <a:effectLst/>
-        </p:spPr>
-        <p:style>
-          <a:lnRef idx="1">
-            <a:schemeClr val="accent1"/>
-          </a:lnRef>
-          <a:fillRef idx="3">
-            <a:schemeClr val="accent1"/>
-          </a:fillRef>
-          <a:effectRef idx="2">
-            <a:schemeClr val="accent1"/>
-          </a:effectRef>
-          <a:fontRef idx="minor">
-            <a:schemeClr val="lt1"/>
-          </a:fontRef>
-        </p:style>
-        <p:txBody>
-          <a:bodyPr rtlCol="0" anchor="ctr"/>
-          <a:lstStyle/>
-          <a:p>
-            <a:pPr algn="ctr"/>
-          </a:p>
-        </p:txBody>
-      </p:sp>
-      <p:sp>
-        <p:nvSpPr>
-          <p:cNvPr id="130" name="TextBox 129"/>
-          <p:cNvSpPr txBox="1"/>
-          <p:nvPr/>
-        </p:nvSpPr>
-        <p:spPr>
-          <a:xfrm>
-            <a:off x="3721608" y="2709672"/>
-            <a:ext cx="731520" cy="128016"/>
-          </a:xfrm>
-          <a:prstGeom prst="rect">
-            <a:avLst/>
-          </a:prstGeom>
-          <a:noFill/>
-          <a:effectLst/>
-        </p:spPr>
-        <p:txBody>
-          <a:bodyPr wrap="square" lIns="0" rIns="0" tIns="0" bIns="0" anchor="ctr">
-            <a:spAutoFit/>
-          </a:bodyPr>
-          <a:lstStyle/>
-          <a:p>
-            <a:pPr algn="l"/>
-            <a:r>
-              <a:rPr sz="600" b="0" i="0">
-                <a:solidFill>
-                  <a:srgbClr val="BBBBBB"/>
-                </a:solidFill>
-                <a:latin typeface="Arial"/>
-              </a:rPr>
-              <a:t>IGHV2-5</a:t>
-            </a:r>
-          </a:p>
-        </p:txBody>
-      </p:sp>
-      <p:sp>
-        <p:nvSpPr>
-          <p:cNvPr id="131" name="Oval 130"/>
-          <p:cNvSpPr/>
-          <p:nvPr/>
-        </p:nvSpPr>
-        <p:spPr>
-          <a:xfrm>
-            <a:off x="2889504" y="3072384"/>
-            <a:ext cx="73152" cy="73152"/>
-          </a:xfrm>
-          <a:prstGeom prst="ellipse">
-            <a:avLst/>
-          </a:prstGeom>
-          <a:solidFill>
-            <a:srgbClr val="222222"/>
-          </a:solidFill>
-          <a:ln w="3810">
-            <a:solidFill>
-              <a:srgbClr val="222222"/>
-            </a:solidFill>
-          </a:ln>
-          <a:effectLst/>
-        </p:spPr>
-        <p:style>
-          <a:lnRef idx="1">
-            <a:schemeClr val="accent1"/>
-          </a:lnRef>
-          <a:fillRef idx="3">
-            <a:schemeClr val="accent1"/>
-          </a:fillRef>
-          <a:effectRef idx="2">
-            <a:schemeClr val="accent1"/>
-          </a:effectRef>
-          <a:fontRef idx="minor">
-            <a:schemeClr val="lt1"/>
-          </a:fontRef>
-        </p:style>
-        <p:txBody>
-          <a:bodyPr rtlCol="0" anchor="ctr"/>
-          <a:lstStyle/>
-          <a:p>
-            <a:pPr algn="ctr"/>
-          </a:p>
-        </p:txBody>
-      </p:sp>
-      <p:sp>
-        <p:nvSpPr>
-          <p:cNvPr id="132" name="TextBox 131"/>
-          <p:cNvSpPr txBox="1"/>
-          <p:nvPr/>
-        </p:nvSpPr>
-        <p:spPr>
-          <a:xfrm>
-            <a:off x="2990088" y="3044952"/>
-            <a:ext cx="731520" cy="128016"/>
-          </a:xfrm>
-          <a:prstGeom prst="rect">
-            <a:avLst/>
-          </a:prstGeom>
-          <a:noFill/>
-          <a:effectLst/>
-        </p:spPr>
-        <p:txBody>
-          <a:bodyPr wrap="square" lIns="0" rIns="0" tIns="0" bIns="0" anchor="ctr">
-            <a:spAutoFit/>
-          </a:bodyPr>
-          <a:lstStyle/>
-          <a:p>
-            <a:pPr algn="l"/>
-            <a:r>
-              <a:rPr sz="600" b="0" i="0">
-                <a:solidFill>
-                  <a:srgbClr val="BBBBBB"/>
-                </a:solidFill>
-                <a:latin typeface="Arial"/>
-              </a:rPr>
-              <a:t>IGHV3-25</a:t>
-            </a:r>
-          </a:p>
-        </p:txBody>
-      </p:sp>
-      <p:sp>
-        <p:nvSpPr>
-          <p:cNvPr id="133" name="Oval 132"/>
-          <p:cNvSpPr/>
-          <p:nvPr/>
-        </p:nvSpPr>
-        <p:spPr>
-          <a:xfrm>
-            <a:off x="2889504" y="2737104"/>
-            <a:ext cx="73152" cy="73152"/>
-          </a:xfrm>
-          <a:prstGeom prst="ellipse">
-            <a:avLst/>
-          </a:prstGeom>
-          <a:solidFill>
-            <a:srgbClr val="222222"/>
-          </a:solidFill>
-          <a:ln w="3810">
-            <a:solidFill>
-              <a:srgbClr val="222222"/>
-            </a:solidFill>
-          </a:ln>
-          <a:effectLst/>
-        </p:spPr>
-        <p:style>
-          <a:lnRef idx="1">
-            <a:schemeClr val="accent1"/>
-          </a:lnRef>
-          <a:fillRef idx="3">
-            <a:schemeClr val="accent1"/>
-          </a:fillRef>
-          <a:effectRef idx="2">
-            <a:schemeClr val="accent1"/>
-          </a:effectRef>
-          <a:fontRef idx="minor">
-            <a:schemeClr val="lt1"/>
-          </a:fontRef>
-        </p:style>
-        <p:txBody>
-          <a:bodyPr rtlCol="0" anchor="ctr"/>
-          <a:lstStyle/>
-          <a:p>
-            <a:pPr algn="ctr"/>
-          </a:p>
-        </p:txBody>
-      </p:sp>
-      <p:sp>
-        <p:nvSpPr>
-          <p:cNvPr id="134" name="TextBox 133"/>
-          <p:cNvSpPr txBox="1"/>
-          <p:nvPr/>
-        </p:nvSpPr>
-        <p:spPr>
-          <a:xfrm>
-            <a:off x="2990088" y="2709672"/>
-            <a:ext cx="731520" cy="128016"/>
-          </a:xfrm>
-          <a:prstGeom prst="rect">
-            <a:avLst/>
-          </a:prstGeom>
-          <a:noFill/>
-          <a:effectLst/>
-        </p:spPr>
-        <p:txBody>
-          <a:bodyPr wrap="square" lIns="0" rIns="0" tIns="0" bIns="0" anchor="ctr">
-            <a:spAutoFit/>
-          </a:bodyPr>
-          <a:lstStyle/>
-          <a:p>
-            <a:pPr algn="l"/>
-            <a:r>
-              <a:rPr sz="600" b="0" i="0">
-                <a:solidFill>
-                  <a:srgbClr val="BBBBBB"/>
-                </a:solidFill>
-                <a:latin typeface="Arial"/>
-              </a:rPr>
-              <a:t>IGHV3-30-3</a:t>
-            </a:r>
-          </a:p>
-        </p:txBody>
-      </p:sp>
-      <p:sp>
-        <p:nvSpPr>
-          <p:cNvPr id="135" name="Oval 134"/>
-          <p:cNvSpPr/>
-          <p:nvPr/>
-        </p:nvSpPr>
-        <p:spPr>
-          <a:xfrm>
-            <a:off x="3621024" y="1060704"/>
-            <a:ext cx="73152" cy="73152"/>
-          </a:xfrm>
-          <a:prstGeom prst="ellipse">
-            <a:avLst/>
-          </a:prstGeom>
-          <a:solidFill>
-            <a:srgbClr val="222222"/>
-          </a:solidFill>
-          <a:ln w="3810">
-            <a:solidFill>
-              <a:srgbClr val="222222"/>
-            </a:solidFill>
-          </a:ln>
-          <a:effectLst/>
-        </p:spPr>
-        <p:style>
-          <a:lnRef idx="1">
-            <a:schemeClr val="accent1"/>
-          </a:lnRef>
-          <a:fillRef idx="3">
-            <a:schemeClr val="accent1"/>
-          </a:fillRef>
-          <a:effectRef idx="2">
-            <a:schemeClr val="accent1"/>
-          </a:effectRef>
-          <a:fontRef idx="minor">
-            <a:schemeClr val="lt1"/>
-          </a:fontRef>
-        </p:style>
-        <p:txBody>
-          <a:bodyPr rtlCol="0" anchor="ctr"/>
-          <a:lstStyle/>
-          <a:p>
-            <a:pPr algn="ctr"/>
-          </a:p>
-        </p:txBody>
-      </p:sp>
-      <p:sp>
-        <p:nvSpPr>
-          <p:cNvPr id="136" name="TextBox 135"/>
-          <p:cNvSpPr txBox="1"/>
-          <p:nvPr/>
-        </p:nvSpPr>
-        <p:spPr>
-          <a:xfrm>
-            <a:off x="3721608" y="1033272"/>
-            <a:ext cx="731520" cy="128016"/>
-          </a:xfrm>
-          <a:prstGeom prst="rect">
-            <a:avLst/>
-          </a:prstGeom>
-          <a:noFill/>
-          <a:effectLst/>
-        </p:spPr>
-        <p:txBody>
-          <a:bodyPr wrap="square" lIns="0" rIns="0" tIns="0" bIns="0" anchor="ctr">
-            <a:spAutoFit/>
-          </a:bodyPr>
-          <a:lstStyle/>
-          <a:p>
-            <a:pPr algn="l"/>
-            <a:r>
-              <a:rPr sz="600" b="0" i="0">
-                <a:solidFill>
-                  <a:srgbClr val="BBBBBB"/>
-                </a:solidFill>
-                <a:latin typeface="Arial"/>
-              </a:rPr>
-              <a:t>IGHV3-66</a:t>
-            </a:r>
-          </a:p>
-        </p:txBody>
-      </p:sp>
-      <p:sp>
-        <p:nvSpPr>
-          <p:cNvPr id="137" name="TextBox 136"/>
-          <p:cNvSpPr txBox="1"/>
-          <p:nvPr/>
-        </p:nvSpPr>
-        <p:spPr>
-          <a:xfrm>
-            <a:off x="7772400" y="1280160"/>
-            <a:ext cx="3657600" cy="228600"/>
-          </a:xfrm>
-          <a:prstGeom prst="rect">
-            <a:avLst/>
-          </a:prstGeom>
-          <a:noFill/>
-          <a:effectLst/>
-        </p:spPr>
-        <p:txBody>
-          <a:bodyPr wrap="square" lIns="0" rIns="0" tIns="0" bIns="0" anchor="ctr">
-            <a:spAutoFit/>
-          </a:bodyPr>
-          <a:lstStyle/>
-          <a:p>
-            <a:pPr algn="l"/>
-            <a:r>
-              <a:rPr sz="1100" b="1" i="0">
-                <a:solidFill>
-                  <a:srgbClr val="222222"/>
-                </a:solidFill>
-                <a:latin typeface="Arial"/>
-              </a:rPr>
-              <a:t>Pattern-class quadrants</a:t>
-            </a:r>
-          </a:p>
-        </p:txBody>
-      </p:sp>
-      <p:sp>
-        <p:nvSpPr>
-          <p:cNvPr id="138" name="TextBox 137"/>
-          <p:cNvSpPr txBox="1"/>
-          <p:nvPr/>
-        </p:nvSpPr>
-        <p:spPr>
-          <a:xfrm>
-            <a:off x="7772400" y="1645920"/>
-            <a:ext cx="4206240" cy="320040"/>
-          </a:xfrm>
-          <a:prstGeom prst="rect">
-            <a:avLst/>
-          </a:prstGeom>
-          <a:noFill/>
-          <a:effectLst/>
-        </p:spPr>
-        <p:txBody>
-          <a:bodyPr wrap="square" lIns="0" rIns="0" tIns="0" bIns="0" anchor="ctr">
-            <a:spAutoFit/>
-          </a:bodyPr>
-          <a:lstStyle/>
-          <a:p>
-            <a:pPr algn="l"/>
-            <a:r>
-              <a:rPr sz="900" b="0" i="0">
-                <a:solidFill>
-                  <a:srgbClr val="222222"/>
-                </a:solidFill>
-                <a:latin typeface="Arial"/>
-              </a:rPr>
-              <a:t>↗ good-coherent (fraction ≥ 0.83): repertoire direction concentrated in good responders</a:t>
-            </a:r>
-          </a:p>
-        </p:txBody>
-      </p:sp>
-      <p:sp>
-        <p:nvSpPr>
-          <p:cNvPr id="139" name="TextBox 138"/>
-          <p:cNvSpPr txBox="1"/>
-          <p:nvPr/>
-        </p:nvSpPr>
-        <p:spPr>
-          <a:xfrm>
-            <a:off x="7772400" y="2011680"/>
-            <a:ext cx="4206240" cy="320040"/>
-          </a:xfrm>
-          <a:prstGeom prst="rect">
-            <a:avLst/>
-          </a:prstGeom>
-          <a:noFill/>
-          <a:effectLst/>
-        </p:spPr>
-        <p:txBody>
-          <a:bodyPr wrap="square" lIns="0" rIns="0" tIns="0" bIns="0" anchor="ctr">
-            <a:spAutoFit/>
-          </a:bodyPr>
-          <a:lstStyle/>
-          <a:p>
-            <a:pPr algn="l"/>
-            <a:r>
-              <a:rPr sz="900" b="0" i="0">
-                <a:solidFill>
-                  <a:srgbClr val="222222"/>
-                </a:solidFill>
-                <a:latin typeface="Arial"/>
-              </a:rPr>
-              <a:t>↙ stochastic: both groups hover at ~0.5 chance</a:t>
-            </a:r>
-          </a:p>
-        </p:txBody>
-      </p:sp>
-      <p:sp>
-        <p:nvSpPr>
-          <p:cNvPr id="140" name="TextBox 139"/>
-          <p:cNvSpPr txBox="1"/>
-          <p:nvPr/>
-        </p:nvSpPr>
-        <p:spPr>
-          <a:xfrm>
-            <a:off x="7772400" y="2377440"/>
-            <a:ext cx="4206240" cy="320040"/>
-          </a:xfrm>
-          <a:prstGeom prst="rect">
-            <a:avLst/>
-          </a:prstGeom>
-          <a:noFill/>
-          <a:effectLst/>
-        </p:spPr>
-        <p:txBody>
-          <a:bodyPr wrap="square" lIns="0" rIns="0" tIns="0" bIns="0" anchor="ctr">
-            <a:spAutoFit/>
-          </a:bodyPr>
-          <a:lstStyle/>
-          <a:p>
-            <a:pPr algn="l"/>
-            <a:r>
-              <a:rPr sz="900" b="0" i="0">
-                <a:solidFill>
-                  <a:srgbClr val="222222"/>
-                </a:solidFill>
-                <a:latin typeface="Arial"/>
-              </a:rPr>
-              <a:t>→ good-down-bad-up: polar-opposite response pattern (IGHV6-1)</a:t>
-            </a:r>
-          </a:p>
-        </p:txBody>
-      </p:sp>
-      <p:sp>
-        <p:nvSpPr>
-          <p:cNvPr id="141" name="TextBox 140"/>
-          <p:cNvSpPr txBox="1"/>
-          <p:nvPr/>
-        </p:nvSpPr>
-        <p:spPr>
-          <a:xfrm>
-            <a:off x="7772400" y="2743200"/>
-            <a:ext cx="4206240" cy="320040"/>
-          </a:xfrm>
-          <a:prstGeom prst="rect">
-            <a:avLst/>
-          </a:prstGeom>
-          <a:noFill/>
-          <a:effectLst/>
-        </p:spPr>
-        <p:txBody>
-          <a:bodyPr wrap="square" lIns="0" rIns="0" tIns="0" bIns="0" anchor="ctr">
-            <a:spAutoFit/>
-          </a:bodyPr>
-          <a:lstStyle/>
-          <a:p>
-            <a:pPr algn="l"/>
-            <a:r>
-              <a:rPr sz="900" b="0" i="0">
-                <a:solidFill>
-                  <a:srgbClr val="222222"/>
-                </a:solidFill>
-                <a:latin typeface="Arial"/>
-              </a:rPr>
-              <a:t>focus ★ = IGHV6-1 (6/6 down good vs 4/2 up bad) + IGHV3-74, IGHV3-7</a:t>
+              <a:t>Focus V-genes: IGHV6-1, IGHV3-7, IGHV3-74</a:t>
             </a:r>
           </a:p>
         </p:txBody>
